--- a/Section_03_Data_Modeling_Schema_Design_Validation/Lesson_028_Understanding_Relations/ppt/Lesson_028_Understanding_Relations.pptx
+++ b/Section_03_Data_Modeling_Schema_Design_Validation/Lesson_028_Understanding_Relations/ppt/Lesson_028_Understanding_Relations.pptx
@@ -5,21 +5,21 @@
     <p:sldMasterId id="2147483648" r:id="rId1"/>
   </p:sldMasterIdLst>
   <p:sldIdLst>
-    <p:sldId id="268" r:id="rId19"/>
-    <p:sldId id="256" r:id="rId7"/>
-    <p:sldId id="257" r:id="rId8"/>
-    <p:sldId id="258" r:id="rId9"/>
-    <p:sldId id="259" r:id="rId10"/>
-    <p:sldId id="260" r:id="rId11"/>
-    <p:sldId id="261" r:id="rId12"/>
-    <p:sldId id="262" r:id="rId13"/>
-    <p:sldId id="263" r:id="rId14"/>
-    <p:sldId id="264" r:id="rId15"/>
-    <p:sldId id="265" r:id="rId16"/>
-    <p:sldId id="266" r:id="rId17"/>
-    <p:sldId id="267" r:id="rId18"/>
+    <p:sldId id="268" r:id="rId2"/>
+    <p:sldId id="256" r:id="rId3"/>
+    <p:sldId id="257" r:id="rId4"/>
+    <p:sldId id="258" r:id="rId5"/>
+    <p:sldId id="259" r:id="rId6"/>
+    <p:sldId id="260" r:id="rId7"/>
+    <p:sldId id="261" r:id="rId8"/>
+    <p:sldId id="262" r:id="rId9"/>
+    <p:sldId id="263" r:id="rId10"/>
+    <p:sldId id="264" r:id="rId11"/>
+    <p:sldId id="265" r:id="rId12"/>
+    <p:sldId id="266" r:id="rId13"/>
+    <p:sldId id="267" r:id="rId14"/>
   </p:sldIdLst>
-  <p:sldSz cx="12191695" cy="6858000" type="screen4x3"/>
+  <p:sldSz cx="12192000" cy="6858000"/>
   <p:notesSz cx="6858000" cy="9144000"/>
   <p:defaultTextStyle>
     <a:defPPr>
@@ -116,6 +116,22 @@
       </a:defRPr>
     </a:lvl9pPr>
   </p:defaultTextStyle>
+  <p:extLst>
+    <p:ext uri="{EFAFB233-063F-42B5-8137-9DF3F51BA10A}">
+      <p15:sldGuideLst xmlns:p15="http://schemas.microsoft.com/office/powerpoint/2012/main">
+        <p15:guide id="1" orient="horz" pos="2160">
+          <p15:clr>
+            <a:srgbClr val="A4A3A4"/>
+          </p15:clr>
+        </p15:guide>
+        <p15:guide id="2" pos="2880">
+          <p15:clr>
+            <a:srgbClr val="A4A3A4"/>
+          </p15:clr>
+        </p15:guide>
+      </p15:sldGuideLst>
+    </p:ext>
+  </p:extLst>
 </p:presentation>
 </file>
 
@@ -157,10 +173,9 @@
           <a:lstStyle/>
           <a:p>
             <a:r>
-              <a:rPr lang="en-US" smtClean="0"/>
+              <a:rPr lang="en-US"/>
               <a:t>Click to edit Master title style</a:t>
             </a:r>
-            <a:endParaRPr lang="en-US"/>
           </a:p>
         </p:txBody>
       </p:sp>
@@ -276,10 +291,9 @@
           </a:lstStyle>
           <a:p>
             <a:r>
-              <a:rPr lang="en-US" smtClean="0"/>
+              <a:rPr lang="en-US"/>
               <a:t>Click to edit Master subtitle style</a:t>
             </a:r>
-            <a:endParaRPr lang="en-US"/>
           </a:p>
         </p:txBody>
       </p:sp>
@@ -300,7 +314,7 @@
           <a:p>
             <a:fld id="{5BCAD085-E8A6-8845-BD4E-CB4CCA059FC4}" type="datetimeFigureOut">
               <a:rPr lang="en-US" smtClean="0"/>
-              <a:t>1/27/13</a:t>
+              <a:t>10/2/2026</a:t>
             </a:fld>
             <a:endParaRPr lang="en-US"/>
           </a:p>
@@ -394,10 +408,9 @@
           <a:lstStyle/>
           <a:p>
             <a:r>
-              <a:rPr lang="en-US" smtClean="0"/>
+              <a:rPr lang="en-US"/>
               <a:t>Click to edit Master title style</a:t>
             </a:r>
-            <a:endParaRPr lang="en-US"/>
           </a:p>
         </p:txBody>
       </p:sp>
@@ -418,38 +431,37 @@
           <a:p>
             <a:pPr lvl="0"/>
             <a:r>
-              <a:rPr lang="en-US" smtClean="0"/>
+              <a:rPr lang="en-US"/>
               <a:t>Click to edit Master text styles</a:t>
             </a:r>
           </a:p>
           <a:p>
             <a:pPr lvl="1"/>
             <a:r>
-              <a:rPr lang="en-US" smtClean="0"/>
+              <a:rPr lang="en-US"/>
               <a:t>Second level</a:t>
             </a:r>
           </a:p>
           <a:p>
             <a:pPr lvl="2"/>
             <a:r>
-              <a:rPr lang="en-US" smtClean="0"/>
+              <a:rPr lang="en-US"/>
               <a:t>Third level</a:t>
             </a:r>
           </a:p>
           <a:p>
             <a:pPr lvl="3"/>
             <a:r>
-              <a:rPr lang="en-US" smtClean="0"/>
+              <a:rPr lang="en-US"/>
               <a:t>Fourth level</a:t>
             </a:r>
           </a:p>
           <a:p>
             <a:pPr lvl="4"/>
             <a:r>
-              <a:rPr lang="en-US" smtClean="0"/>
+              <a:rPr lang="en-US"/>
               <a:t>Fifth level</a:t>
             </a:r>
-            <a:endParaRPr lang="en-US"/>
           </a:p>
         </p:txBody>
       </p:sp>
@@ -470,7 +482,7 @@
           <a:p>
             <a:fld id="{5BCAD085-E8A6-8845-BD4E-CB4CCA059FC4}" type="datetimeFigureOut">
               <a:rPr lang="en-US" smtClean="0"/>
-              <a:t>1/27/13</a:t>
+              <a:t>10/2/2026</a:t>
             </a:fld>
             <a:endParaRPr lang="en-US"/>
           </a:p>
@@ -569,10 +581,9 @@
           <a:lstStyle/>
           <a:p>
             <a:r>
-              <a:rPr lang="en-US" smtClean="0"/>
+              <a:rPr lang="en-US"/>
               <a:t>Click to edit Master title style</a:t>
             </a:r>
-            <a:endParaRPr lang="en-US"/>
           </a:p>
         </p:txBody>
       </p:sp>
@@ -598,38 +609,37 @@
           <a:p>
             <a:pPr lvl="0"/>
             <a:r>
-              <a:rPr lang="en-US" smtClean="0"/>
+              <a:rPr lang="en-US"/>
               <a:t>Click to edit Master text styles</a:t>
             </a:r>
           </a:p>
           <a:p>
             <a:pPr lvl="1"/>
             <a:r>
-              <a:rPr lang="en-US" smtClean="0"/>
+              <a:rPr lang="en-US"/>
               <a:t>Second level</a:t>
             </a:r>
           </a:p>
           <a:p>
             <a:pPr lvl="2"/>
             <a:r>
-              <a:rPr lang="en-US" smtClean="0"/>
+              <a:rPr lang="en-US"/>
               <a:t>Third level</a:t>
             </a:r>
           </a:p>
           <a:p>
             <a:pPr lvl="3"/>
             <a:r>
-              <a:rPr lang="en-US" smtClean="0"/>
+              <a:rPr lang="en-US"/>
               <a:t>Fourth level</a:t>
             </a:r>
           </a:p>
           <a:p>
             <a:pPr lvl="4"/>
             <a:r>
-              <a:rPr lang="en-US" smtClean="0"/>
+              <a:rPr lang="en-US"/>
               <a:t>Fifth level</a:t>
             </a:r>
-            <a:endParaRPr lang="en-US"/>
           </a:p>
         </p:txBody>
       </p:sp>
@@ -650,7 +660,7 @@
           <a:p>
             <a:fld id="{5BCAD085-E8A6-8845-BD4E-CB4CCA059FC4}" type="datetimeFigureOut">
               <a:rPr lang="en-US" smtClean="0"/>
-              <a:t>1/27/13</a:t>
+              <a:t>10/2/2026</a:t>
             </a:fld>
             <a:endParaRPr lang="en-US"/>
           </a:p>
@@ -744,10 +754,9 @@
           <a:lstStyle/>
           <a:p>
             <a:r>
-              <a:rPr lang="en-US" smtClean="0"/>
+              <a:rPr lang="en-US"/>
               <a:t>Click to edit Master title style</a:t>
             </a:r>
-            <a:endParaRPr lang="en-US"/>
           </a:p>
         </p:txBody>
       </p:sp>
@@ -768,38 +777,37 @@
           <a:p>
             <a:pPr lvl="0"/>
             <a:r>
-              <a:rPr lang="en-US" smtClean="0"/>
+              <a:rPr lang="en-US"/>
               <a:t>Click to edit Master text styles</a:t>
             </a:r>
           </a:p>
           <a:p>
             <a:pPr lvl="1"/>
             <a:r>
-              <a:rPr lang="en-US" smtClean="0"/>
+              <a:rPr lang="en-US"/>
               <a:t>Second level</a:t>
             </a:r>
           </a:p>
           <a:p>
             <a:pPr lvl="2"/>
             <a:r>
-              <a:rPr lang="en-US" smtClean="0"/>
+              <a:rPr lang="en-US"/>
               <a:t>Third level</a:t>
             </a:r>
           </a:p>
           <a:p>
             <a:pPr lvl="3"/>
             <a:r>
-              <a:rPr lang="en-US" smtClean="0"/>
+              <a:rPr lang="en-US"/>
               <a:t>Fourth level</a:t>
             </a:r>
           </a:p>
           <a:p>
             <a:pPr lvl="4"/>
             <a:r>
-              <a:rPr lang="en-US" smtClean="0"/>
+              <a:rPr lang="en-US"/>
               <a:t>Fifth level</a:t>
             </a:r>
-            <a:endParaRPr lang="en-US"/>
           </a:p>
         </p:txBody>
       </p:sp>
@@ -820,7 +828,7 @@
           <a:p>
             <a:fld id="{5BCAD085-E8A6-8845-BD4E-CB4CCA059FC4}" type="datetimeFigureOut">
               <a:rPr lang="en-US" smtClean="0"/>
-              <a:t>1/27/13</a:t>
+              <a:t>10/2/2026</a:t>
             </a:fld>
             <a:endParaRPr lang="en-US"/>
           </a:p>
@@ -923,10 +931,9 @@
           </a:lstStyle>
           <a:p>
             <a:r>
-              <a:rPr lang="en-US" smtClean="0"/>
+              <a:rPr lang="en-US"/>
               <a:t>Click to edit Master title style</a:t>
             </a:r>
-            <a:endParaRPr lang="en-US"/>
           </a:p>
         </p:txBody>
       </p:sp>
@@ -1043,7 +1050,7 @@
           <a:p>
             <a:pPr lvl="0"/>
             <a:r>
-              <a:rPr lang="en-US" smtClean="0"/>
+              <a:rPr lang="en-US"/>
               <a:t>Click to edit Master text styles</a:t>
             </a:r>
           </a:p>
@@ -1066,7 +1073,7 @@
           <a:p>
             <a:fld id="{5BCAD085-E8A6-8845-BD4E-CB4CCA059FC4}" type="datetimeFigureOut">
               <a:rPr lang="en-US" smtClean="0"/>
-              <a:t>1/27/13</a:t>
+              <a:t>10/2/2026</a:t>
             </a:fld>
             <a:endParaRPr lang="en-US"/>
           </a:p>
@@ -1160,10 +1167,9 @@
           <a:lstStyle/>
           <a:p>
             <a:r>
-              <a:rPr lang="en-US" smtClean="0"/>
+              <a:rPr lang="en-US"/>
               <a:t>Click to edit Master title style</a:t>
             </a:r>
-            <a:endParaRPr lang="en-US"/>
           </a:p>
         </p:txBody>
       </p:sp>
@@ -1217,38 +1223,37 @@
           <a:p>
             <a:pPr lvl="0"/>
             <a:r>
-              <a:rPr lang="en-US" smtClean="0"/>
+              <a:rPr lang="en-US"/>
               <a:t>Click to edit Master text styles</a:t>
             </a:r>
           </a:p>
           <a:p>
             <a:pPr lvl="1"/>
             <a:r>
-              <a:rPr lang="en-US" smtClean="0"/>
+              <a:rPr lang="en-US"/>
               <a:t>Second level</a:t>
             </a:r>
           </a:p>
           <a:p>
             <a:pPr lvl="2"/>
             <a:r>
-              <a:rPr lang="en-US" smtClean="0"/>
+              <a:rPr lang="en-US"/>
               <a:t>Third level</a:t>
             </a:r>
           </a:p>
           <a:p>
             <a:pPr lvl="3"/>
             <a:r>
-              <a:rPr lang="en-US" smtClean="0"/>
+              <a:rPr lang="en-US"/>
               <a:t>Fourth level</a:t>
             </a:r>
           </a:p>
           <a:p>
             <a:pPr lvl="4"/>
             <a:r>
-              <a:rPr lang="en-US" smtClean="0"/>
+              <a:rPr lang="en-US"/>
               <a:t>Fifth level</a:t>
             </a:r>
-            <a:endParaRPr lang="en-US"/>
           </a:p>
         </p:txBody>
       </p:sp>
@@ -1302,38 +1307,37 @@
           <a:p>
             <a:pPr lvl="0"/>
             <a:r>
-              <a:rPr lang="en-US" smtClean="0"/>
+              <a:rPr lang="en-US"/>
               <a:t>Click to edit Master text styles</a:t>
             </a:r>
           </a:p>
           <a:p>
             <a:pPr lvl="1"/>
             <a:r>
-              <a:rPr lang="en-US" smtClean="0"/>
+              <a:rPr lang="en-US"/>
               <a:t>Second level</a:t>
             </a:r>
           </a:p>
           <a:p>
             <a:pPr lvl="2"/>
             <a:r>
-              <a:rPr lang="en-US" smtClean="0"/>
+              <a:rPr lang="en-US"/>
               <a:t>Third level</a:t>
             </a:r>
           </a:p>
           <a:p>
             <a:pPr lvl="3"/>
             <a:r>
-              <a:rPr lang="en-US" smtClean="0"/>
+              <a:rPr lang="en-US"/>
               <a:t>Fourth level</a:t>
             </a:r>
           </a:p>
           <a:p>
             <a:pPr lvl="4"/>
             <a:r>
-              <a:rPr lang="en-US" smtClean="0"/>
+              <a:rPr lang="en-US"/>
               <a:t>Fifth level</a:t>
             </a:r>
-            <a:endParaRPr lang="en-US"/>
           </a:p>
         </p:txBody>
       </p:sp>
@@ -1354,7 +1358,7 @@
           <a:p>
             <a:fld id="{5BCAD085-E8A6-8845-BD4E-CB4CCA059FC4}" type="datetimeFigureOut">
               <a:rPr lang="en-US" smtClean="0"/>
-              <a:t>1/27/13</a:t>
+              <a:t>10/2/2026</a:t>
             </a:fld>
             <a:endParaRPr lang="en-US"/>
           </a:p>
@@ -1452,10 +1456,9 @@
           </a:lstStyle>
           <a:p>
             <a:r>
-              <a:rPr lang="en-US" smtClean="0"/>
+              <a:rPr lang="en-US"/>
               <a:t>Click to edit Master title style</a:t>
             </a:r>
-            <a:endParaRPr lang="en-US"/>
           </a:p>
         </p:txBody>
       </p:sp>
@@ -1518,7 +1521,7 @@
           <a:p>
             <a:pPr lvl="0"/>
             <a:r>
-              <a:rPr lang="en-US" smtClean="0"/>
+              <a:rPr lang="en-US"/>
               <a:t>Click to edit Master text styles</a:t>
             </a:r>
           </a:p>
@@ -1574,38 +1577,37 @@
           <a:p>
             <a:pPr lvl="0"/>
             <a:r>
-              <a:rPr lang="en-US" smtClean="0"/>
+              <a:rPr lang="en-US"/>
               <a:t>Click to edit Master text styles</a:t>
             </a:r>
           </a:p>
           <a:p>
             <a:pPr lvl="1"/>
             <a:r>
-              <a:rPr lang="en-US" smtClean="0"/>
+              <a:rPr lang="en-US"/>
               <a:t>Second level</a:t>
             </a:r>
           </a:p>
           <a:p>
             <a:pPr lvl="2"/>
             <a:r>
-              <a:rPr lang="en-US" smtClean="0"/>
+              <a:rPr lang="en-US"/>
               <a:t>Third level</a:t>
             </a:r>
           </a:p>
           <a:p>
             <a:pPr lvl="3"/>
             <a:r>
-              <a:rPr lang="en-US" smtClean="0"/>
+              <a:rPr lang="en-US"/>
               <a:t>Fourth level</a:t>
             </a:r>
           </a:p>
           <a:p>
             <a:pPr lvl="4"/>
             <a:r>
-              <a:rPr lang="en-US" smtClean="0"/>
+              <a:rPr lang="en-US"/>
               <a:t>Fifth level</a:t>
             </a:r>
-            <a:endParaRPr lang="en-US"/>
           </a:p>
         </p:txBody>
       </p:sp>
@@ -1668,7 +1670,7 @@
           <a:p>
             <a:pPr lvl="0"/>
             <a:r>
-              <a:rPr lang="en-US" smtClean="0"/>
+              <a:rPr lang="en-US"/>
               <a:t>Click to edit Master text styles</a:t>
             </a:r>
           </a:p>
@@ -1724,38 +1726,37 @@
           <a:p>
             <a:pPr lvl="0"/>
             <a:r>
-              <a:rPr lang="en-US" smtClean="0"/>
+              <a:rPr lang="en-US"/>
               <a:t>Click to edit Master text styles</a:t>
             </a:r>
           </a:p>
           <a:p>
             <a:pPr lvl="1"/>
             <a:r>
-              <a:rPr lang="en-US" smtClean="0"/>
+              <a:rPr lang="en-US"/>
               <a:t>Second level</a:t>
             </a:r>
           </a:p>
           <a:p>
             <a:pPr lvl="2"/>
             <a:r>
-              <a:rPr lang="en-US" smtClean="0"/>
+              <a:rPr lang="en-US"/>
               <a:t>Third level</a:t>
             </a:r>
           </a:p>
           <a:p>
             <a:pPr lvl="3"/>
             <a:r>
-              <a:rPr lang="en-US" smtClean="0"/>
+              <a:rPr lang="en-US"/>
               <a:t>Fourth level</a:t>
             </a:r>
           </a:p>
           <a:p>
             <a:pPr lvl="4"/>
             <a:r>
-              <a:rPr lang="en-US" smtClean="0"/>
+              <a:rPr lang="en-US"/>
               <a:t>Fifth level</a:t>
             </a:r>
-            <a:endParaRPr lang="en-US"/>
           </a:p>
         </p:txBody>
       </p:sp>
@@ -1776,7 +1777,7 @@
           <a:p>
             <a:fld id="{5BCAD085-E8A6-8845-BD4E-CB4CCA059FC4}" type="datetimeFigureOut">
               <a:rPr lang="en-US" smtClean="0"/>
-              <a:t>1/27/13</a:t>
+              <a:t>10/2/2026</a:t>
             </a:fld>
             <a:endParaRPr lang="en-US"/>
           </a:p>
@@ -1870,10 +1871,9 @@
           <a:lstStyle/>
           <a:p>
             <a:r>
-              <a:rPr lang="en-US" smtClean="0"/>
+              <a:rPr lang="en-US"/>
               <a:t>Click to edit Master title style</a:t>
             </a:r>
-            <a:endParaRPr lang="en-US"/>
           </a:p>
         </p:txBody>
       </p:sp>
@@ -1894,7 +1894,7 @@
           <a:p>
             <a:fld id="{5BCAD085-E8A6-8845-BD4E-CB4CCA059FC4}" type="datetimeFigureOut">
               <a:rPr lang="en-US" smtClean="0"/>
-              <a:t>1/27/13</a:t>
+              <a:t>10/2/2026</a:t>
             </a:fld>
             <a:endParaRPr lang="en-US"/>
           </a:p>
@@ -1989,7 +1989,7 @@
           <a:p>
             <a:fld id="{5BCAD085-E8A6-8845-BD4E-CB4CCA059FC4}" type="datetimeFigureOut">
               <a:rPr lang="en-US" smtClean="0"/>
-              <a:t>1/27/13</a:t>
+              <a:t>10/2/2026</a:t>
             </a:fld>
             <a:endParaRPr lang="en-US"/>
           </a:p>
@@ -2092,10 +2092,9 @@
           </a:lstStyle>
           <a:p>
             <a:r>
-              <a:rPr lang="en-US" smtClean="0"/>
+              <a:rPr lang="en-US"/>
               <a:t>Click to edit Master title style</a:t>
             </a:r>
-            <a:endParaRPr lang="en-US"/>
           </a:p>
         </p:txBody>
       </p:sp>
@@ -2149,38 +2148,37 @@
           <a:p>
             <a:pPr lvl="0"/>
             <a:r>
-              <a:rPr lang="en-US" smtClean="0"/>
+              <a:rPr lang="en-US"/>
               <a:t>Click to edit Master text styles</a:t>
             </a:r>
           </a:p>
           <a:p>
             <a:pPr lvl="1"/>
             <a:r>
-              <a:rPr lang="en-US" smtClean="0"/>
+              <a:rPr lang="en-US"/>
               <a:t>Second level</a:t>
             </a:r>
           </a:p>
           <a:p>
             <a:pPr lvl="2"/>
             <a:r>
-              <a:rPr lang="en-US" smtClean="0"/>
+              <a:rPr lang="en-US"/>
               <a:t>Third level</a:t>
             </a:r>
           </a:p>
           <a:p>
             <a:pPr lvl="3"/>
             <a:r>
-              <a:rPr lang="en-US" smtClean="0"/>
+              <a:rPr lang="en-US"/>
               <a:t>Fourth level</a:t>
             </a:r>
           </a:p>
           <a:p>
             <a:pPr lvl="4"/>
             <a:r>
-              <a:rPr lang="en-US" smtClean="0"/>
+              <a:rPr lang="en-US"/>
               <a:t>Fifth level</a:t>
             </a:r>
-            <a:endParaRPr lang="en-US"/>
           </a:p>
         </p:txBody>
       </p:sp>
@@ -2243,7 +2241,7 @@
           <a:p>
             <a:pPr lvl="0"/>
             <a:r>
-              <a:rPr lang="en-US" smtClean="0"/>
+              <a:rPr lang="en-US"/>
               <a:t>Click to edit Master text styles</a:t>
             </a:r>
           </a:p>
@@ -2266,7 +2264,7 @@
           <a:p>
             <a:fld id="{5BCAD085-E8A6-8845-BD4E-CB4CCA059FC4}" type="datetimeFigureOut">
               <a:rPr lang="en-US" smtClean="0"/>
-              <a:t>1/27/13</a:t>
+              <a:t>10/2/2026</a:t>
             </a:fld>
             <a:endParaRPr lang="en-US"/>
           </a:p>
@@ -2369,10 +2367,9 @@
           </a:lstStyle>
           <a:p>
             <a:r>
-              <a:rPr lang="en-US" smtClean="0"/>
+              <a:rPr lang="en-US"/>
               <a:t>Click to edit Master title style</a:t>
             </a:r>
-            <a:endParaRPr lang="en-US"/>
           </a:p>
         </p:txBody>
       </p:sp>
@@ -2496,7 +2493,7 @@
           <a:p>
             <a:pPr lvl="0"/>
             <a:r>
-              <a:rPr lang="en-US" smtClean="0"/>
+              <a:rPr lang="en-US"/>
               <a:t>Click to edit Master text styles</a:t>
             </a:r>
           </a:p>
@@ -2519,7 +2516,7 @@
           <a:p>
             <a:fld id="{5BCAD085-E8A6-8845-BD4E-CB4CCA059FC4}" type="datetimeFigureOut">
               <a:rPr lang="en-US" smtClean="0"/>
-              <a:t>1/27/13</a:t>
+              <a:t>10/2/2026</a:t>
             </a:fld>
             <a:endParaRPr lang="en-US"/>
           </a:p>
@@ -2628,10 +2625,9 @@
           <a:lstStyle/>
           <a:p>
             <a:r>
-              <a:rPr lang="en-US" smtClean="0"/>
+              <a:rPr lang="en-US"/>
               <a:t>Click to edit Master title style</a:t>
             </a:r>
-            <a:endParaRPr lang="en-US"/>
           </a:p>
         </p:txBody>
       </p:sp>
@@ -2662,38 +2658,37 @@
           <a:p>
             <a:pPr lvl="0"/>
             <a:r>
-              <a:rPr lang="en-US" smtClean="0"/>
+              <a:rPr lang="en-US"/>
               <a:t>Click to edit Master text styles</a:t>
             </a:r>
           </a:p>
           <a:p>
             <a:pPr lvl="1"/>
             <a:r>
-              <a:rPr lang="en-US" smtClean="0"/>
+              <a:rPr lang="en-US"/>
               <a:t>Second level</a:t>
             </a:r>
           </a:p>
           <a:p>
             <a:pPr lvl="2"/>
             <a:r>
-              <a:rPr lang="en-US" smtClean="0"/>
+              <a:rPr lang="en-US"/>
               <a:t>Third level</a:t>
             </a:r>
           </a:p>
           <a:p>
             <a:pPr lvl="3"/>
             <a:r>
-              <a:rPr lang="en-US" smtClean="0"/>
+              <a:rPr lang="en-US"/>
               <a:t>Fourth level</a:t>
             </a:r>
           </a:p>
           <a:p>
             <a:pPr lvl="4"/>
             <a:r>
-              <a:rPr lang="en-US" smtClean="0"/>
+              <a:rPr lang="en-US"/>
               <a:t>Fifth level</a:t>
             </a:r>
-            <a:endParaRPr lang="en-US"/>
           </a:p>
         </p:txBody>
       </p:sp>
@@ -2732,7 +2727,7 @@
           <a:p>
             <a:fld id="{5BCAD085-E8A6-8845-BD4E-CB4CCA059FC4}" type="datetimeFigureOut">
               <a:rPr lang="en-US" smtClean="0"/>
-              <a:t>1/27/13</a:t>
+              <a:t>10/2/2026</a:t>
             </a:fld>
             <a:endParaRPr lang="en-US"/>
           </a:p>
@@ -3091,7 +3086,7 @@
 </file>
 
 <file path=ppt/slides/slide1.xml><?xml version="1.0" encoding="utf-8"?>
-<p:sld xmlns:a="http://schemas.openxmlformats.org/drawingml/2006/main" xmlns:p="http://schemas.openxmlformats.org/presentationml/2006/main" xmlns:r="http://schemas.openxmlformats.org/officeDocument/2006/relationships">
+<p:sld xmlns:a="http://schemas.openxmlformats.org/drawingml/2006/main" xmlns:r="http://schemas.openxmlformats.org/officeDocument/2006/relationships" xmlns:p="http://schemas.openxmlformats.org/presentationml/2006/main">
   <p:cSld>
     <p:spTree>
       <p:nvGrpSpPr>
@@ -3099,7 +3094,14 @@
         <p:cNvGrpSpPr/>
         <p:nvPr/>
       </p:nvGrpSpPr>
-      <p:grpSpPr/>
+      <p:grpSpPr>
+        <a:xfrm>
+          <a:off x="0" y="0"/>
+          <a:ext cx="0" cy="0"/>
+          <a:chOff x="0" y="0"/>
+          <a:chExt cx="0" cy="0"/>
+        </a:xfrm>
+      </p:grpSpPr>
       <p:pic>
         <p:nvPicPr>
           <p:cNvPr id="2" name="Picture 1" descr="a_wide_infographic_style_tutorial_slide_on_a_dark.png"/>
@@ -3109,7 +3111,7 @@
           <p:nvPr/>
         </p:nvPicPr>
         <p:blipFill>
-          <a:blip r:embed="rId3"/>
+          <a:blip r:embed="rId2"/>
           <a:stretch>
             <a:fillRect/>
           </a:stretch>
@@ -3133,7 +3135,7 @@
 </file>
 
 <file path=ppt/slides/slide10.xml><?xml version="1.0" encoding="utf-8"?>
-<p:sld xmlns:a="http://schemas.openxmlformats.org/drawingml/2006/main" xmlns:p="http://schemas.openxmlformats.org/presentationml/2006/main" xmlns:r="http://schemas.openxmlformats.org/officeDocument/2006/relationships">
+<p:sld xmlns:a="http://schemas.openxmlformats.org/drawingml/2006/main" xmlns:r="http://schemas.openxmlformats.org/officeDocument/2006/relationships" xmlns:p="http://schemas.openxmlformats.org/presentationml/2006/main">
   <p:cSld>
     <p:bg>
       <p:bgPr>
@@ -3149,7 +3151,14 @@
         <p:cNvGrpSpPr/>
         <p:nvPr/>
       </p:nvGrpSpPr>
-      <p:grpSpPr/>
+      <p:grpSpPr>
+        <a:xfrm>
+          <a:off x="0" y="0"/>
+          <a:ext cx="0" cy="0"/>
+          <a:chOff x="0" y="0"/>
+          <a:chExt cx="0" cy="0"/>
+        </a:xfrm>
+      </p:grpSpPr>
       <p:sp>
         <p:nvSpPr>
           <p:cNvPr id="2" name="TextBox 1"/>
@@ -3167,7 +3176,7 @@
           <a:noFill/>
         </p:spPr>
         <p:txBody>
-          <a:bodyPr wrap="none" lIns="54864" rIns="54864" tIns="54864" bIns="54864" anchor="t">
+          <a:bodyPr wrap="none" lIns="54864" tIns="54864" rIns="54864" bIns="54864" anchor="t">
             <a:spAutoFit/>
           </a:bodyPr>
           <a:lstStyle/>
@@ -3202,7 +3211,7 @@
           <a:noFill/>
         </p:spPr>
         <p:txBody>
-          <a:bodyPr wrap="none" lIns="54864" rIns="54864" tIns="54864" bIns="54864" anchor="t">
+          <a:bodyPr wrap="none" lIns="54864" tIns="54864" rIns="54864" bIns="54864" anchor="t">
             <a:spAutoFit/>
           </a:bodyPr>
           <a:lstStyle/>
@@ -3262,6 +3271,7 @@
           <a:lstStyle/>
           <a:p>
             <a:pPr algn="ctr"/>
+            <a:endParaRPr/>
           </a:p>
         </p:txBody>
       </p:sp>
@@ -3282,7 +3292,7 @@
           <a:noFill/>
         </p:spPr>
         <p:txBody>
-          <a:bodyPr wrap="none" lIns="54864" rIns="54864" tIns="54864" bIns="54864" anchor="t">
+          <a:bodyPr wrap="none" lIns="54864" tIns="54864" rIns="54864" bIns="54864" anchor="t">
             <a:spAutoFit/>
           </a:bodyPr>
           <a:lstStyle/>
@@ -3342,6 +3352,7 @@
           <a:lstStyle/>
           <a:p>
             <a:pPr algn="ctr"/>
+            <a:endParaRPr/>
           </a:p>
         </p:txBody>
       </p:sp>
@@ -3362,7 +3373,7 @@
           <a:noFill/>
         </p:spPr>
         <p:txBody>
-          <a:bodyPr wrap="none" lIns="54864" rIns="54864" tIns="54864" bIns="54864" anchor="t">
+          <a:bodyPr wrap="none" lIns="54864" tIns="54864" rIns="54864" bIns="54864" anchor="t">
             <a:spAutoFit/>
           </a:bodyPr>
           <a:lstStyle/>
@@ -3422,6 +3433,7 @@
           <a:lstStyle/>
           <a:p>
             <a:pPr algn="ctr"/>
+            <a:endParaRPr/>
           </a:p>
         </p:txBody>
       </p:sp>
@@ -3442,7 +3454,7 @@
           <a:noFill/>
         </p:spPr>
         <p:txBody>
-          <a:bodyPr wrap="none" lIns="54864" rIns="54864" tIns="54864" bIns="54864" anchor="t">
+          <a:bodyPr wrap="none" lIns="54864" tIns="54864" rIns="54864" bIns="54864" anchor="t">
             <a:spAutoFit/>
           </a:bodyPr>
           <a:lstStyle/>
@@ -3502,6 +3514,7 @@
           <a:lstStyle/>
           <a:p>
             <a:pPr algn="ctr"/>
+            <a:endParaRPr/>
           </a:p>
         </p:txBody>
       </p:sp>
@@ -3522,7 +3535,7 @@
           <a:noFill/>
         </p:spPr>
         <p:txBody>
-          <a:bodyPr wrap="none" lIns="54864" rIns="54864" tIns="54864" bIns="54864" anchor="t">
+          <a:bodyPr wrap="none" lIns="54864" tIns="54864" rIns="54864" bIns="54864" anchor="t">
             <a:spAutoFit/>
           </a:bodyPr>
           <a:lstStyle/>
@@ -3582,6 +3595,7 @@
           <a:lstStyle/>
           <a:p>
             <a:pPr algn="ctr"/>
+            <a:endParaRPr/>
           </a:p>
         </p:txBody>
       </p:sp>
@@ -3602,7 +3616,7 @@
           <a:noFill/>
         </p:spPr>
         <p:txBody>
-          <a:bodyPr wrap="none" lIns="54864" rIns="54864" tIns="54864" bIns="54864" anchor="t">
+          <a:bodyPr wrap="none" lIns="54864" tIns="54864" rIns="54864" bIns="54864" anchor="t">
             <a:spAutoFit/>
           </a:bodyPr>
           <a:lstStyle/>
@@ -3662,6 +3676,7 @@
           <a:lstStyle/>
           <a:p>
             <a:pPr algn="ctr"/>
+            <a:endParaRPr/>
           </a:p>
         </p:txBody>
       </p:sp>
@@ -3682,7 +3697,7 @@
           <a:noFill/>
         </p:spPr>
         <p:txBody>
-          <a:bodyPr wrap="none" lIns="54864" rIns="54864" tIns="54864" bIns="54864" anchor="t">
+          <a:bodyPr wrap="none" lIns="54864" tIns="54864" rIns="54864" bIns="54864" anchor="t">
             <a:spAutoFit/>
           </a:bodyPr>
           <a:lstStyle/>
@@ -3742,6 +3757,7 @@
           <a:lstStyle/>
           <a:p>
             <a:pPr algn="ctr"/>
+            <a:endParaRPr/>
           </a:p>
         </p:txBody>
       </p:sp>
@@ -3762,7 +3778,7 @@
           <a:noFill/>
         </p:spPr>
         <p:txBody>
-          <a:bodyPr wrap="none" lIns="54864" rIns="54864" tIns="54864" bIns="54864" anchor="t">
+          <a:bodyPr wrap="none" lIns="54864" tIns="54864" rIns="54864" bIns="54864" anchor="t">
             <a:spAutoFit/>
           </a:bodyPr>
           <a:lstStyle/>
@@ -3822,6 +3838,7 @@
           <a:lstStyle/>
           <a:p>
             <a:pPr algn="ctr"/>
+            <a:endParaRPr/>
           </a:p>
         </p:txBody>
       </p:sp>
@@ -3842,7 +3859,7 @@
           <a:noFill/>
         </p:spPr>
         <p:txBody>
-          <a:bodyPr wrap="none" lIns="54864" rIns="54864" tIns="54864" bIns="54864" anchor="t">
+          <a:bodyPr wrap="none" lIns="54864" tIns="54864" rIns="54864" bIns="54864" anchor="t">
             <a:spAutoFit/>
           </a:bodyPr>
           <a:lstStyle/>
@@ -3902,6 +3919,7 @@
           <a:lstStyle/>
           <a:p>
             <a:pPr algn="ctr"/>
+            <a:endParaRPr/>
           </a:p>
         </p:txBody>
       </p:sp>
@@ -3922,7 +3940,7 @@
           <a:noFill/>
         </p:spPr>
         <p:txBody>
-          <a:bodyPr wrap="none" lIns="54864" rIns="54864" tIns="54864" bIns="54864" anchor="t">
+          <a:bodyPr wrap="none" lIns="54864" tIns="54864" rIns="54864" bIns="54864" anchor="t">
             <a:spAutoFit/>
           </a:bodyPr>
           <a:lstStyle/>
@@ -3982,6 +4000,7 @@
           <a:lstStyle/>
           <a:p>
             <a:pPr algn="ctr"/>
+            <a:endParaRPr/>
           </a:p>
         </p:txBody>
       </p:sp>
@@ -4002,7 +4021,7 @@
           <a:noFill/>
         </p:spPr>
         <p:txBody>
-          <a:bodyPr wrap="none" lIns="54864" rIns="54864" tIns="54864" bIns="54864" anchor="t">
+          <a:bodyPr wrap="none" lIns="54864" tIns="54864" rIns="54864" bIns="54864" anchor="t">
             <a:spAutoFit/>
           </a:bodyPr>
           <a:lstStyle/>
@@ -4037,7 +4056,7 @@
           <a:noFill/>
         </p:spPr>
         <p:txBody>
-          <a:bodyPr wrap="none" lIns="54864" rIns="54864" tIns="54864" bIns="54864" anchor="t">
+          <a:bodyPr wrap="none" lIns="54864" tIns="54864" rIns="54864" bIns="54864" anchor="t">
             <a:spAutoFit/>
           </a:bodyPr>
           <a:lstStyle/>
@@ -4107,7 +4126,7 @@
           <a:noFill/>
         </p:spPr>
         <p:txBody>
-          <a:bodyPr wrap="none" lIns="54864" rIns="54864" tIns="54864" bIns="54864" anchor="t">
+          <a:bodyPr wrap="none" lIns="54864" tIns="54864" rIns="54864" bIns="54864" anchor="t">
             <a:spAutoFit/>
           </a:bodyPr>
           <a:lstStyle/>
@@ -4142,7 +4161,7 @@
           <a:noFill/>
         </p:spPr>
         <p:txBody>
-          <a:bodyPr wrap="none" lIns="54864" rIns="54864" tIns="54864" bIns="54864" anchor="t">
+          <a:bodyPr wrap="none" lIns="54864" tIns="54864" rIns="54864" bIns="54864" anchor="t">
             <a:spAutoFit/>
           </a:bodyPr>
           <a:lstStyle/>
@@ -4212,7 +4231,7 @@
           <a:noFill/>
         </p:spPr>
         <p:txBody>
-          <a:bodyPr wrap="none" lIns="54864" rIns="54864" tIns="54864" bIns="54864" anchor="t">
+          <a:bodyPr wrap="none" lIns="54864" tIns="54864" rIns="54864" bIns="54864" anchor="t">
             <a:spAutoFit/>
           </a:bodyPr>
           <a:lstStyle/>
@@ -4247,7 +4266,7 @@
           <a:noFill/>
         </p:spPr>
         <p:txBody>
-          <a:bodyPr wrap="none" lIns="54864" rIns="54864" tIns="54864" bIns="54864" anchor="t">
+          <a:bodyPr wrap="none" lIns="54864" tIns="54864" rIns="54864" bIns="54864" anchor="t">
             <a:spAutoFit/>
           </a:bodyPr>
           <a:lstStyle/>
@@ -4317,7 +4336,7 @@
           <a:noFill/>
         </p:spPr>
         <p:txBody>
-          <a:bodyPr wrap="none" lIns="54864" rIns="54864" tIns="54864" bIns="54864" anchor="t">
+          <a:bodyPr wrap="none" lIns="54864" tIns="54864" rIns="54864" bIns="54864" anchor="t">
             <a:spAutoFit/>
           </a:bodyPr>
           <a:lstStyle/>
@@ -4352,7 +4371,7 @@
           <a:noFill/>
         </p:spPr>
         <p:txBody>
-          <a:bodyPr wrap="none" lIns="54864" rIns="54864" tIns="54864" bIns="54864" anchor="t">
+          <a:bodyPr wrap="none" lIns="54864" tIns="54864" rIns="54864" bIns="54864" anchor="t">
             <a:spAutoFit/>
           </a:bodyPr>
           <a:lstStyle/>
@@ -4422,7 +4441,7 @@
           <a:noFill/>
         </p:spPr>
         <p:txBody>
-          <a:bodyPr wrap="none" lIns="54864" rIns="54864" tIns="54864" bIns="54864" anchor="t">
+          <a:bodyPr wrap="none" lIns="54864" tIns="54864" rIns="54864" bIns="54864" anchor="t">
             <a:spAutoFit/>
           </a:bodyPr>
           <a:lstStyle/>
@@ -4457,7 +4476,7 @@
           <a:noFill/>
         </p:spPr>
         <p:txBody>
-          <a:bodyPr wrap="none" lIns="54864" rIns="54864" tIns="54864" bIns="54864" anchor="t">
+          <a:bodyPr wrap="none" lIns="54864" tIns="54864" rIns="54864" bIns="54864" anchor="t">
             <a:spAutoFit/>
           </a:bodyPr>
           <a:lstStyle/>
@@ -4527,7 +4546,7 @@
           <a:noFill/>
         </p:spPr>
         <p:txBody>
-          <a:bodyPr wrap="none" lIns="54864" rIns="54864" tIns="54864" bIns="54864" anchor="t">
+          <a:bodyPr wrap="none" lIns="54864" tIns="54864" rIns="54864" bIns="54864" anchor="t">
             <a:spAutoFit/>
           </a:bodyPr>
           <a:lstStyle/>
@@ -4562,7 +4581,7 @@
           <a:noFill/>
         </p:spPr>
         <p:txBody>
-          <a:bodyPr wrap="none" lIns="54864" rIns="54864" tIns="54864" bIns="54864" anchor="t">
+          <a:bodyPr wrap="none" lIns="54864" tIns="54864" rIns="54864" bIns="54864" anchor="t">
             <a:spAutoFit/>
           </a:bodyPr>
           <a:lstStyle/>
@@ -4589,7 +4608,7 @@
 </file>
 
 <file path=ppt/slides/slide11.xml><?xml version="1.0" encoding="utf-8"?>
-<p:sld xmlns:a="http://schemas.openxmlformats.org/drawingml/2006/main" xmlns:p="http://schemas.openxmlformats.org/presentationml/2006/main" xmlns:r="http://schemas.openxmlformats.org/officeDocument/2006/relationships">
+<p:sld xmlns:a="http://schemas.openxmlformats.org/drawingml/2006/main" xmlns:r="http://schemas.openxmlformats.org/officeDocument/2006/relationships" xmlns:p="http://schemas.openxmlformats.org/presentationml/2006/main">
   <p:cSld>
     <p:bg>
       <p:bgPr>
@@ -4605,7 +4624,14 @@
         <p:cNvGrpSpPr/>
         <p:nvPr/>
       </p:nvGrpSpPr>
-      <p:grpSpPr/>
+      <p:grpSpPr>
+        <a:xfrm>
+          <a:off x="0" y="0"/>
+          <a:ext cx="0" cy="0"/>
+          <a:chOff x="0" y="0"/>
+          <a:chExt cx="0" cy="0"/>
+        </a:xfrm>
+      </p:grpSpPr>
       <p:sp>
         <p:nvSpPr>
           <p:cNvPr id="2" name="TextBox 1"/>
@@ -4623,7 +4649,7 @@
           <a:noFill/>
         </p:spPr>
         <p:txBody>
-          <a:bodyPr wrap="none" lIns="54864" rIns="54864" tIns="54864" bIns="54864" anchor="t">
+          <a:bodyPr wrap="none" lIns="54864" tIns="54864" rIns="54864" bIns="54864" anchor="t">
             <a:spAutoFit/>
           </a:bodyPr>
           <a:lstStyle/>
@@ -4658,7 +4684,7 @@
           <a:noFill/>
         </p:spPr>
         <p:txBody>
-          <a:bodyPr wrap="none" lIns="54864" rIns="54864" tIns="54864" bIns="54864" anchor="t">
+          <a:bodyPr wrap="none" lIns="54864" tIns="54864" rIns="54864" bIns="54864" anchor="t">
             <a:spAutoFit/>
           </a:bodyPr>
           <a:lstStyle/>
@@ -4718,6 +4744,7 @@
           <a:lstStyle/>
           <a:p>
             <a:pPr algn="ctr"/>
+            <a:endParaRPr/>
           </a:p>
         </p:txBody>
       </p:sp>
@@ -4763,6 +4790,7 @@
           <a:lstStyle/>
           <a:p>
             <a:pPr algn="ctr"/>
+            <a:endParaRPr/>
           </a:p>
         </p:txBody>
       </p:sp>
@@ -4783,7 +4811,7 @@
           <a:noFill/>
         </p:spPr>
         <p:txBody>
-          <a:bodyPr wrap="none" lIns="54864" rIns="54864" tIns="54864" bIns="54864" anchor="t">
+          <a:bodyPr wrap="none" lIns="54864" tIns="54864" rIns="54864" bIns="54864" anchor="t">
             <a:spAutoFit/>
           </a:bodyPr>
           <a:lstStyle/>
@@ -4818,7 +4846,7 @@
           <a:noFill/>
         </p:spPr>
         <p:txBody>
-          <a:bodyPr wrap="none" lIns="54864" rIns="54864" tIns="54864" bIns="54864" anchor="t">
+          <a:bodyPr wrap="none" lIns="54864" tIns="54864" rIns="54864" bIns="54864" anchor="t">
             <a:spAutoFit/>
           </a:bodyPr>
           <a:lstStyle/>
@@ -4878,6 +4906,7 @@
           <a:lstStyle/>
           <a:p>
             <a:pPr algn="ctr"/>
+            <a:endParaRPr/>
           </a:p>
         </p:txBody>
       </p:sp>
@@ -4898,7 +4927,7 @@
           <a:noFill/>
         </p:spPr>
         <p:txBody>
-          <a:bodyPr wrap="none" lIns="54864" rIns="54864" tIns="54864" bIns="54864" anchor="t">
+          <a:bodyPr wrap="none" lIns="54864" tIns="54864" rIns="54864" bIns="54864" anchor="t">
             <a:spAutoFit/>
           </a:bodyPr>
           <a:lstStyle/>
@@ -4933,7 +4962,7 @@
           <a:noFill/>
         </p:spPr>
         <p:txBody>
-          <a:bodyPr wrap="none" lIns="54864" rIns="54864" tIns="54864" bIns="54864" anchor="t">
+          <a:bodyPr wrap="none" lIns="54864" tIns="54864" rIns="54864" bIns="54864" anchor="t">
             <a:spAutoFit/>
           </a:bodyPr>
           <a:lstStyle/>
@@ -4993,6 +5022,7 @@
           <a:lstStyle/>
           <a:p>
             <a:pPr algn="ctr"/>
+            <a:endParaRPr/>
           </a:p>
         </p:txBody>
       </p:sp>
@@ -5013,7 +5043,7 @@
           <a:noFill/>
         </p:spPr>
         <p:txBody>
-          <a:bodyPr wrap="none" lIns="54864" rIns="54864" tIns="54864" bIns="54864" anchor="t">
+          <a:bodyPr wrap="none" lIns="54864" tIns="54864" rIns="54864" bIns="54864" anchor="t">
             <a:spAutoFit/>
           </a:bodyPr>
           <a:lstStyle/>
@@ -5048,7 +5078,7 @@
           <a:noFill/>
         </p:spPr>
         <p:txBody>
-          <a:bodyPr wrap="none" lIns="54864" rIns="54864" tIns="54864" bIns="54864" anchor="t">
+          <a:bodyPr wrap="none" lIns="54864" tIns="54864" rIns="54864" bIns="54864" anchor="t">
             <a:spAutoFit/>
           </a:bodyPr>
           <a:lstStyle/>
@@ -5108,6 +5138,7 @@
           <a:lstStyle/>
           <a:p>
             <a:pPr algn="ctr"/>
+            <a:endParaRPr/>
           </a:p>
         </p:txBody>
       </p:sp>
@@ -5128,7 +5159,7 @@
           <a:noFill/>
         </p:spPr>
         <p:txBody>
-          <a:bodyPr wrap="none" lIns="54864" rIns="54864" tIns="54864" bIns="54864" anchor="t">
+          <a:bodyPr wrap="none" lIns="54864" tIns="54864" rIns="54864" bIns="54864" anchor="t">
             <a:spAutoFit/>
           </a:bodyPr>
           <a:lstStyle/>
@@ -5163,7 +5194,7 @@
           <a:noFill/>
         </p:spPr>
         <p:txBody>
-          <a:bodyPr wrap="none" lIns="54864" rIns="54864" tIns="54864" bIns="54864" anchor="t">
+          <a:bodyPr wrap="none" lIns="54864" tIns="54864" rIns="54864" bIns="54864" anchor="t">
             <a:spAutoFit/>
           </a:bodyPr>
           <a:lstStyle/>
@@ -5201,7 +5232,7 @@
           <a:noFill/>
         </p:spPr>
         <p:txBody>
-          <a:bodyPr wrap="none" lIns="54864" rIns="54864" tIns="54864" bIns="54864" anchor="t">
+          <a:bodyPr wrap="none" lIns="54864" tIns="54864" rIns="54864" bIns="54864" anchor="t">
             <a:spAutoFit/>
           </a:bodyPr>
           <a:lstStyle/>
@@ -5261,6 +5292,7 @@
           <a:lstStyle/>
           <a:p>
             <a:pPr algn="ctr"/>
+            <a:endParaRPr/>
           </a:p>
         </p:txBody>
       </p:sp>
@@ -5281,7 +5313,7 @@
           <a:noFill/>
         </p:spPr>
         <p:txBody>
-          <a:bodyPr wrap="none" lIns="54864" rIns="54864" tIns="54864" bIns="54864" anchor="t">
+          <a:bodyPr wrap="none" lIns="54864" tIns="54864" rIns="54864" bIns="54864" anchor="t">
             <a:spAutoFit/>
           </a:bodyPr>
           <a:lstStyle/>
@@ -5316,7 +5348,7 @@
           <a:noFill/>
         </p:spPr>
         <p:txBody>
-          <a:bodyPr wrap="none" lIns="54864" rIns="54864" tIns="54864" bIns="54864" anchor="t">
+          <a:bodyPr wrap="none" lIns="54864" tIns="54864" rIns="54864" bIns="54864" anchor="t">
             <a:spAutoFit/>
           </a:bodyPr>
           <a:lstStyle/>
@@ -5386,7 +5418,7 @@
           <a:noFill/>
         </p:spPr>
         <p:txBody>
-          <a:bodyPr wrap="none" lIns="54864" rIns="54864" tIns="54864" bIns="54864" anchor="t">
+          <a:bodyPr wrap="none" lIns="54864" tIns="54864" rIns="54864" bIns="54864" anchor="t">
             <a:spAutoFit/>
           </a:bodyPr>
           <a:lstStyle/>
@@ -5421,7 +5453,7 @@
           <a:noFill/>
         </p:spPr>
         <p:txBody>
-          <a:bodyPr wrap="none" lIns="54864" rIns="54864" tIns="54864" bIns="54864" anchor="t">
+          <a:bodyPr wrap="none" lIns="54864" tIns="54864" rIns="54864" bIns="54864" anchor="t">
             <a:spAutoFit/>
           </a:bodyPr>
           <a:lstStyle/>
@@ -5491,7 +5523,7 @@
           <a:noFill/>
         </p:spPr>
         <p:txBody>
-          <a:bodyPr wrap="none" lIns="54864" rIns="54864" tIns="54864" bIns="54864" anchor="t">
+          <a:bodyPr wrap="none" lIns="54864" tIns="54864" rIns="54864" bIns="54864" anchor="t">
             <a:spAutoFit/>
           </a:bodyPr>
           <a:lstStyle/>
@@ -5526,7 +5558,7 @@
           <a:noFill/>
         </p:spPr>
         <p:txBody>
-          <a:bodyPr wrap="none" lIns="54864" rIns="54864" tIns="54864" bIns="54864" anchor="t">
+          <a:bodyPr wrap="none" lIns="54864" tIns="54864" rIns="54864" bIns="54864" anchor="t">
             <a:spAutoFit/>
           </a:bodyPr>
           <a:lstStyle/>
@@ -5596,7 +5628,7 @@
           <a:noFill/>
         </p:spPr>
         <p:txBody>
-          <a:bodyPr wrap="none" lIns="54864" rIns="54864" tIns="54864" bIns="54864" anchor="t">
+          <a:bodyPr wrap="none" lIns="54864" tIns="54864" rIns="54864" bIns="54864" anchor="t">
             <a:spAutoFit/>
           </a:bodyPr>
           <a:lstStyle/>
@@ -5631,7 +5663,7 @@
           <a:noFill/>
         </p:spPr>
         <p:txBody>
-          <a:bodyPr wrap="none" lIns="54864" rIns="54864" tIns="54864" bIns="54864" anchor="t">
+          <a:bodyPr wrap="none" lIns="54864" tIns="54864" rIns="54864" bIns="54864" anchor="t">
             <a:spAutoFit/>
           </a:bodyPr>
           <a:lstStyle/>
@@ -5701,7 +5733,7 @@
           <a:noFill/>
         </p:spPr>
         <p:txBody>
-          <a:bodyPr wrap="none" lIns="54864" rIns="54864" tIns="54864" bIns="54864" anchor="t">
+          <a:bodyPr wrap="none" lIns="54864" tIns="54864" rIns="54864" bIns="54864" anchor="t">
             <a:spAutoFit/>
           </a:bodyPr>
           <a:lstStyle/>
@@ -5736,7 +5768,7 @@
           <a:noFill/>
         </p:spPr>
         <p:txBody>
-          <a:bodyPr wrap="none" lIns="54864" rIns="54864" tIns="54864" bIns="54864" anchor="t">
+          <a:bodyPr wrap="none" lIns="54864" tIns="54864" rIns="54864" bIns="54864" anchor="t">
             <a:spAutoFit/>
           </a:bodyPr>
           <a:lstStyle/>
@@ -5806,7 +5838,7 @@
           <a:noFill/>
         </p:spPr>
         <p:txBody>
-          <a:bodyPr wrap="none" lIns="54864" rIns="54864" tIns="54864" bIns="54864" anchor="t">
+          <a:bodyPr wrap="none" lIns="54864" tIns="54864" rIns="54864" bIns="54864" anchor="t">
             <a:spAutoFit/>
           </a:bodyPr>
           <a:lstStyle/>
@@ -5841,7 +5873,7 @@
           <a:noFill/>
         </p:spPr>
         <p:txBody>
-          <a:bodyPr wrap="none" lIns="54864" rIns="54864" tIns="54864" bIns="54864" anchor="t">
+          <a:bodyPr wrap="none" lIns="54864" tIns="54864" rIns="54864" bIns="54864" anchor="t">
             <a:spAutoFit/>
           </a:bodyPr>
           <a:lstStyle/>
@@ -5868,7 +5900,7 @@
 </file>
 
 <file path=ppt/slides/slide12.xml><?xml version="1.0" encoding="utf-8"?>
-<p:sld xmlns:a="http://schemas.openxmlformats.org/drawingml/2006/main" xmlns:p="http://schemas.openxmlformats.org/presentationml/2006/main" xmlns:r="http://schemas.openxmlformats.org/officeDocument/2006/relationships">
+<p:sld xmlns:a="http://schemas.openxmlformats.org/drawingml/2006/main" xmlns:r="http://schemas.openxmlformats.org/officeDocument/2006/relationships" xmlns:p="http://schemas.openxmlformats.org/presentationml/2006/main">
   <p:cSld>
     <p:bg>
       <p:bgPr>
@@ -5884,7 +5916,14 @@
         <p:cNvGrpSpPr/>
         <p:nvPr/>
       </p:nvGrpSpPr>
-      <p:grpSpPr/>
+      <p:grpSpPr>
+        <a:xfrm>
+          <a:off x="0" y="0"/>
+          <a:ext cx="0" cy="0"/>
+          <a:chOff x="0" y="0"/>
+          <a:chExt cx="0" cy="0"/>
+        </a:xfrm>
+      </p:grpSpPr>
       <p:sp>
         <p:nvSpPr>
           <p:cNvPr id="2" name="TextBox 1"/>
@@ -5902,7 +5941,7 @@
           <a:noFill/>
         </p:spPr>
         <p:txBody>
-          <a:bodyPr wrap="none" lIns="54864" rIns="54864" tIns="54864" bIns="54864" anchor="t">
+          <a:bodyPr wrap="none" lIns="54864" tIns="54864" rIns="54864" bIns="54864" anchor="t">
             <a:spAutoFit/>
           </a:bodyPr>
           <a:lstStyle/>
@@ -5937,7 +5976,7 @@
           <a:noFill/>
         </p:spPr>
         <p:txBody>
-          <a:bodyPr wrap="none" lIns="54864" rIns="54864" tIns="54864" bIns="54864" anchor="t">
+          <a:bodyPr wrap="none" lIns="54864" tIns="54864" rIns="54864" bIns="54864" anchor="t">
             <a:spAutoFit/>
           </a:bodyPr>
           <a:lstStyle/>
@@ -5997,6 +6036,7 @@
           <a:lstStyle/>
           <a:p>
             <a:pPr algn="ctr"/>
+            <a:endParaRPr/>
           </a:p>
         </p:txBody>
       </p:sp>
@@ -6017,7 +6057,7 @@
           <a:noFill/>
         </p:spPr>
         <p:txBody>
-          <a:bodyPr wrap="none" lIns="54864" rIns="54864" tIns="54864" bIns="54864" anchor="t">
+          <a:bodyPr wrap="none" lIns="54864" tIns="54864" rIns="54864" bIns="54864" anchor="t">
             <a:spAutoFit/>
           </a:bodyPr>
           <a:lstStyle/>
@@ -6052,7 +6092,7 @@
           <a:noFill/>
         </p:spPr>
         <p:txBody>
-          <a:bodyPr wrap="none" lIns="54864" rIns="54864" tIns="54864" bIns="54864" anchor="t">
+          <a:bodyPr wrap="none" lIns="54864" tIns="54864" rIns="54864" bIns="54864" anchor="t">
             <a:spAutoFit/>
           </a:bodyPr>
           <a:lstStyle/>
@@ -6087,7 +6127,7 @@
           <a:noFill/>
         </p:spPr>
         <p:txBody>
-          <a:bodyPr wrap="none" lIns="54864" rIns="54864" tIns="54864" bIns="54864" anchor="ctr">
+          <a:bodyPr wrap="none" lIns="54864" tIns="54864" rIns="54864" bIns="54864" anchor="ctr">
             <a:spAutoFit/>
           </a:bodyPr>
           <a:lstStyle/>
@@ -6182,6 +6222,7 @@
           <a:lstStyle/>
           <a:p>
             <a:pPr algn="ctr"/>
+            <a:endParaRPr/>
           </a:p>
         </p:txBody>
       </p:sp>
@@ -6202,7 +6243,7 @@
           <a:noFill/>
         </p:spPr>
         <p:txBody>
-          <a:bodyPr wrap="none" lIns="54864" rIns="54864" tIns="54864" bIns="54864" anchor="t">
+          <a:bodyPr wrap="none" lIns="54864" tIns="54864" rIns="54864" bIns="54864" anchor="t">
             <a:spAutoFit/>
           </a:bodyPr>
           <a:lstStyle/>
@@ -6237,7 +6278,7 @@
           <a:noFill/>
         </p:spPr>
         <p:txBody>
-          <a:bodyPr wrap="none" lIns="54864" rIns="54864" tIns="54864" bIns="54864" anchor="t">
+          <a:bodyPr wrap="none" lIns="54864" tIns="54864" rIns="54864" bIns="54864" anchor="t">
             <a:spAutoFit/>
           </a:bodyPr>
           <a:lstStyle/>
@@ -6272,7 +6313,7 @@
           <a:noFill/>
         </p:spPr>
         <p:txBody>
-          <a:bodyPr wrap="none" lIns="54864" rIns="54864" tIns="54864" bIns="54864" anchor="ctr">
+          <a:bodyPr wrap="none" lIns="54864" tIns="54864" rIns="54864" bIns="54864" anchor="ctr">
             <a:spAutoFit/>
           </a:bodyPr>
           <a:lstStyle/>
@@ -6367,6 +6408,7 @@
           <a:lstStyle/>
           <a:p>
             <a:pPr algn="ctr"/>
+            <a:endParaRPr/>
           </a:p>
         </p:txBody>
       </p:sp>
@@ -6387,7 +6429,7 @@
           <a:noFill/>
         </p:spPr>
         <p:txBody>
-          <a:bodyPr wrap="none" lIns="54864" rIns="54864" tIns="54864" bIns="54864" anchor="t">
+          <a:bodyPr wrap="none" lIns="54864" tIns="54864" rIns="54864" bIns="54864" anchor="t">
             <a:spAutoFit/>
           </a:bodyPr>
           <a:lstStyle/>
@@ -6422,7 +6464,7 @@
           <a:noFill/>
         </p:spPr>
         <p:txBody>
-          <a:bodyPr wrap="none" lIns="54864" rIns="54864" tIns="54864" bIns="54864" anchor="t">
+          <a:bodyPr wrap="none" lIns="54864" tIns="54864" rIns="54864" bIns="54864" anchor="t">
             <a:spAutoFit/>
           </a:bodyPr>
           <a:lstStyle/>
@@ -6457,7 +6499,7 @@
           <a:noFill/>
         </p:spPr>
         <p:txBody>
-          <a:bodyPr wrap="none" lIns="54864" rIns="54864" tIns="54864" bIns="54864" anchor="ctr">
+          <a:bodyPr wrap="none" lIns="54864" tIns="54864" rIns="54864" bIns="54864" anchor="ctr">
             <a:spAutoFit/>
           </a:bodyPr>
           <a:lstStyle/>
@@ -6552,6 +6594,7 @@
           <a:lstStyle/>
           <a:p>
             <a:pPr algn="ctr"/>
+            <a:endParaRPr/>
           </a:p>
         </p:txBody>
       </p:sp>
@@ -6572,7 +6615,7 @@
           <a:noFill/>
         </p:spPr>
         <p:txBody>
-          <a:bodyPr wrap="none" lIns="54864" rIns="54864" tIns="54864" bIns="54864" anchor="t">
+          <a:bodyPr wrap="none" lIns="54864" tIns="54864" rIns="54864" bIns="54864" anchor="t">
             <a:spAutoFit/>
           </a:bodyPr>
           <a:lstStyle/>
@@ -6607,7 +6650,7 @@
           <a:noFill/>
         </p:spPr>
         <p:txBody>
-          <a:bodyPr wrap="none" lIns="54864" rIns="54864" tIns="54864" bIns="54864" anchor="t">
+          <a:bodyPr wrap="none" lIns="54864" tIns="54864" rIns="54864" bIns="54864" anchor="t">
             <a:spAutoFit/>
           </a:bodyPr>
           <a:lstStyle/>
@@ -6642,7 +6685,7 @@
           <a:noFill/>
         </p:spPr>
         <p:txBody>
-          <a:bodyPr wrap="none" lIns="54864" rIns="54864" tIns="54864" bIns="54864" anchor="ctr">
+          <a:bodyPr wrap="none" lIns="54864" tIns="54864" rIns="54864" bIns="54864" anchor="ctr">
             <a:spAutoFit/>
           </a:bodyPr>
           <a:lstStyle/>
@@ -6737,6 +6780,7 @@
           <a:lstStyle/>
           <a:p>
             <a:pPr algn="ctr"/>
+            <a:endParaRPr/>
           </a:p>
         </p:txBody>
       </p:sp>
@@ -6757,7 +6801,7 @@
           <a:noFill/>
         </p:spPr>
         <p:txBody>
-          <a:bodyPr wrap="none" lIns="54864" rIns="54864" tIns="54864" bIns="54864" anchor="t">
+          <a:bodyPr wrap="none" lIns="54864" tIns="54864" rIns="54864" bIns="54864" anchor="t">
             <a:spAutoFit/>
           </a:bodyPr>
           <a:lstStyle/>
@@ -6792,7 +6836,7 @@
           <a:noFill/>
         </p:spPr>
         <p:txBody>
-          <a:bodyPr wrap="none" lIns="54864" rIns="54864" tIns="54864" bIns="54864" anchor="t">
+          <a:bodyPr wrap="none" lIns="54864" tIns="54864" rIns="54864" bIns="54864" anchor="t">
             <a:spAutoFit/>
           </a:bodyPr>
           <a:lstStyle/>
@@ -6827,7 +6871,7 @@
           <a:noFill/>
         </p:spPr>
         <p:txBody>
-          <a:bodyPr wrap="none" lIns="54864" rIns="54864" tIns="54864" bIns="54864" anchor="ctr">
+          <a:bodyPr wrap="none" lIns="54864" tIns="54864" rIns="54864" bIns="54864" anchor="ctr">
             <a:spAutoFit/>
           </a:bodyPr>
           <a:lstStyle/>
@@ -6887,6 +6931,7 @@
           <a:lstStyle/>
           <a:p>
             <a:pPr algn="ctr"/>
+            <a:endParaRPr/>
           </a:p>
         </p:txBody>
       </p:sp>
@@ -6907,7 +6952,7 @@
           <a:noFill/>
         </p:spPr>
         <p:txBody>
-          <a:bodyPr wrap="none" lIns="54864" rIns="54864" tIns="54864" bIns="54864" anchor="t">
+          <a:bodyPr wrap="none" lIns="54864" tIns="54864" rIns="54864" bIns="54864" anchor="t">
             <a:spAutoFit/>
           </a:bodyPr>
           <a:lstStyle/>
@@ -6968,6 +7013,7 @@
           <a:lstStyle/>
           <a:p>
             <a:pPr algn="ctr"/>
+            <a:endParaRPr/>
           </a:p>
         </p:txBody>
       </p:sp>
@@ -6988,7 +7034,7 @@
           <a:noFill/>
         </p:spPr>
         <p:txBody>
-          <a:bodyPr wrap="none" lIns="54864" rIns="54864" tIns="54864" bIns="54864" anchor="t">
+          <a:bodyPr wrap="none" lIns="54864" tIns="54864" rIns="54864" bIns="54864" anchor="t">
             <a:spAutoFit/>
           </a:bodyPr>
           <a:lstStyle/>
@@ -7023,7 +7069,7 @@
           <a:noFill/>
         </p:spPr>
         <p:txBody>
-          <a:bodyPr wrap="none" lIns="54864" rIns="54864" tIns="54864" bIns="54864" anchor="t">
+          <a:bodyPr wrap="none" lIns="54864" tIns="54864" rIns="54864" bIns="54864" anchor="t">
             <a:spAutoFit/>
           </a:bodyPr>
           <a:lstStyle/>
@@ -7093,7 +7139,7 @@
           <a:noFill/>
         </p:spPr>
         <p:txBody>
-          <a:bodyPr wrap="none" lIns="54864" rIns="54864" tIns="54864" bIns="54864" anchor="t">
+          <a:bodyPr wrap="none" lIns="54864" tIns="54864" rIns="54864" bIns="54864" anchor="t">
             <a:spAutoFit/>
           </a:bodyPr>
           <a:lstStyle/>
@@ -7128,7 +7174,7 @@
           <a:noFill/>
         </p:spPr>
         <p:txBody>
-          <a:bodyPr wrap="none" lIns="54864" rIns="54864" tIns="54864" bIns="54864" anchor="t">
+          <a:bodyPr wrap="none" lIns="54864" tIns="54864" rIns="54864" bIns="54864" anchor="t">
             <a:spAutoFit/>
           </a:bodyPr>
           <a:lstStyle/>
@@ -7198,7 +7244,7 @@
           <a:noFill/>
         </p:spPr>
         <p:txBody>
-          <a:bodyPr wrap="none" lIns="54864" rIns="54864" tIns="54864" bIns="54864" anchor="t">
+          <a:bodyPr wrap="none" lIns="54864" tIns="54864" rIns="54864" bIns="54864" anchor="t">
             <a:spAutoFit/>
           </a:bodyPr>
           <a:lstStyle/>
@@ -7233,7 +7279,7 @@
           <a:noFill/>
         </p:spPr>
         <p:txBody>
-          <a:bodyPr wrap="none" lIns="54864" rIns="54864" tIns="54864" bIns="54864" anchor="t">
+          <a:bodyPr wrap="none" lIns="54864" tIns="54864" rIns="54864" bIns="54864" anchor="t">
             <a:spAutoFit/>
           </a:bodyPr>
           <a:lstStyle/>
@@ -7303,7 +7349,7 @@
           <a:noFill/>
         </p:spPr>
         <p:txBody>
-          <a:bodyPr wrap="none" lIns="54864" rIns="54864" tIns="54864" bIns="54864" anchor="t">
+          <a:bodyPr wrap="none" lIns="54864" tIns="54864" rIns="54864" bIns="54864" anchor="t">
             <a:spAutoFit/>
           </a:bodyPr>
           <a:lstStyle/>
@@ -7338,7 +7384,7 @@
           <a:noFill/>
         </p:spPr>
         <p:txBody>
-          <a:bodyPr wrap="none" lIns="54864" rIns="54864" tIns="54864" bIns="54864" anchor="t">
+          <a:bodyPr wrap="none" lIns="54864" tIns="54864" rIns="54864" bIns="54864" anchor="t">
             <a:spAutoFit/>
           </a:bodyPr>
           <a:lstStyle/>
@@ -7408,7 +7454,7 @@
           <a:noFill/>
         </p:spPr>
         <p:txBody>
-          <a:bodyPr wrap="none" lIns="54864" rIns="54864" tIns="54864" bIns="54864" anchor="t">
+          <a:bodyPr wrap="none" lIns="54864" tIns="54864" rIns="54864" bIns="54864" anchor="t">
             <a:spAutoFit/>
           </a:bodyPr>
           <a:lstStyle/>
@@ -7443,7 +7489,7 @@
           <a:noFill/>
         </p:spPr>
         <p:txBody>
-          <a:bodyPr wrap="none" lIns="54864" rIns="54864" tIns="54864" bIns="54864" anchor="t">
+          <a:bodyPr wrap="none" lIns="54864" tIns="54864" rIns="54864" bIns="54864" anchor="t">
             <a:spAutoFit/>
           </a:bodyPr>
           <a:lstStyle/>
@@ -7513,7 +7559,7 @@
           <a:noFill/>
         </p:spPr>
         <p:txBody>
-          <a:bodyPr wrap="none" lIns="54864" rIns="54864" tIns="54864" bIns="54864" anchor="t">
+          <a:bodyPr wrap="none" lIns="54864" tIns="54864" rIns="54864" bIns="54864" anchor="t">
             <a:spAutoFit/>
           </a:bodyPr>
           <a:lstStyle/>
@@ -7548,7 +7594,7 @@
           <a:noFill/>
         </p:spPr>
         <p:txBody>
-          <a:bodyPr wrap="none" lIns="54864" rIns="54864" tIns="54864" bIns="54864" anchor="t">
+          <a:bodyPr wrap="none" lIns="54864" tIns="54864" rIns="54864" bIns="54864" anchor="t">
             <a:spAutoFit/>
           </a:bodyPr>
           <a:lstStyle/>
@@ -7575,7 +7621,7 @@
 </file>
 
 <file path=ppt/slides/slide13.xml><?xml version="1.0" encoding="utf-8"?>
-<p:sld xmlns:a="http://schemas.openxmlformats.org/drawingml/2006/main" xmlns:p="http://schemas.openxmlformats.org/presentationml/2006/main" xmlns:r="http://schemas.openxmlformats.org/officeDocument/2006/relationships">
+<p:sld xmlns:a="http://schemas.openxmlformats.org/drawingml/2006/main" xmlns:r="http://schemas.openxmlformats.org/officeDocument/2006/relationships" xmlns:p="http://schemas.openxmlformats.org/presentationml/2006/main">
   <p:cSld>
     <p:bg>
       <p:bgPr>
@@ -7591,7 +7637,14 @@
         <p:cNvGrpSpPr/>
         <p:nvPr/>
       </p:nvGrpSpPr>
-      <p:grpSpPr/>
+      <p:grpSpPr>
+        <a:xfrm>
+          <a:off x="0" y="0"/>
+          <a:ext cx="0" cy="0"/>
+          <a:chOff x="0" y="0"/>
+          <a:chExt cx="0" cy="0"/>
+        </a:xfrm>
+      </p:grpSpPr>
       <p:sp>
         <p:nvSpPr>
           <p:cNvPr id="2" name="TextBox 1"/>
@@ -7609,7 +7662,7 @@
           <a:noFill/>
         </p:spPr>
         <p:txBody>
-          <a:bodyPr wrap="none" lIns="54864" rIns="54864" tIns="54864" bIns="54864" anchor="t">
+          <a:bodyPr wrap="none" lIns="54864" tIns="54864" rIns="54864" bIns="54864" anchor="t">
             <a:spAutoFit/>
           </a:bodyPr>
           <a:lstStyle/>
@@ -7644,7 +7697,7 @@
           <a:noFill/>
         </p:spPr>
         <p:txBody>
-          <a:bodyPr wrap="none" lIns="54864" rIns="54864" tIns="54864" bIns="54864" anchor="t">
+          <a:bodyPr wrap="none" lIns="54864" tIns="54864" rIns="54864" bIns="54864" anchor="t">
             <a:spAutoFit/>
           </a:bodyPr>
           <a:lstStyle/>
@@ -7704,6 +7757,7 @@
           <a:lstStyle/>
           <a:p>
             <a:pPr algn="ctr"/>
+            <a:endParaRPr/>
           </a:p>
         </p:txBody>
       </p:sp>
@@ -7749,6 +7803,7 @@
           <a:lstStyle/>
           <a:p>
             <a:pPr algn="ctr"/>
+            <a:endParaRPr/>
           </a:p>
         </p:txBody>
       </p:sp>
@@ -7769,7 +7824,7 @@
           <a:noFill/>
         </p:spPr>
         <p:txBody>
-          <a:bodyPr wrap="none" lIns="54864" rIns="54864" tIns="54864" bIns="54864" anchor="t">
+          <a:bodyPr wrap="none" lIns="54864" tIns="54864" rIns="54864" bIns="54864" anchor="t">
             <a:spAutoFit/>
           </a:bodyPr>
           <a:lstStyle/>
@@ -7829,6 +7884,7 @@
           <a:lstStyle/>
           <a:p>
             <a:pPr algn="ctr"/>
+            <a:endParaRPr/>
           </a:p>
         </p:txBody>
       </p:sp>
@@ -7849,7 +7905,7 @@
           <a:noFill/>
         </p:spPr>
         <p:txBody>
-          <a:bodyPr wrap="none" lIns="54864" rIns="54864" tIns="54864" bIns="54864" anchor="t">
+          <a:bodyPr wrap="none" lIns="54864" tIns="54864" rIns="54864" bIns="54864" anchor="t">
             <a:spAutoFit/>
           </a:bodyPr>
           <a:lstStyle/>
@@ -7884,7 +7940,7 @@
           <a:noFill/>
         </p:spPr>
         <p:txBody>
-          <a:bodyPr wrap="none" lIns="54864" rIns="54864" tIns="54864" bIns="54864" anchor="t">
+          <a:bodyPr wrap="none" lIns="54864" tIns="54864" rIns="54864" bIns="54864" anchor="t">
             <a:spAutoFit/>
           </a:bodyPr>
           <a:lstStyle/>
@@ -7919,7 +7975,7 @@
           <a:noFill/>
         </p:spPr>
         <p:txBody>
-          <a:bodyPr wrap="none" lIns="54864" rIns="54864" tIns="54864" bIns="54864" anchor="t">
+          <a:bodyPr wrap="none" lIns="54864" tIns="54864" rIns="54864" bIns="54864" anchor="t">
             <a:spAutoFit/>
           </a:bodyPr>
           <a:lstStyle/>
@@ -7979,6 +8035,7 @@
           <a:lstStyle/>
           <a:p>
             <a:pPr algn="ctr"/>
+            <a:endParaRPr/>
           </a:p>
         </p:txBody>
       </p:sp>
@@ -7999,7 +8056,7 @@
           <a:noFill/>
         </p:spPr>
         <p:txBody>
-          <a:bodyPr wrap="none" lIns="54864" rIns="54864" tIns="54864" bIns="54864" anchor="t">
+          <a:bodyPr wrap="none" lIns="54864" tIns="54864" rIns="54864" bIns="54864" anchor="t">
             <a:spAutoFit/>
           </a:bodyPr>
           <a:lstStyle/>
@@ -8034,7 +8091,7 @@
           <a:noFill/>
         </p:spPr>
         <p:txBody>
-          <a:bodyPr wrap="none" lIns="54864" rIns="54864" tIns="54864" bIns="54864" anchor="t">
+          <a:bodyPr wrap="none" lIns="54864" tIns="54864" rIns="54864" bIns="54864" anchor="t">
             <a:spAutoFit/>
           </a:bodyPr>
           <a:lstStyle/>
@@ -8069,7 +8126,7 @@
           <a:noFill/>
         </p:spPr>
         <p:txBody>
-          <a:bodyPr wrap="none" lIns="54864" rIns="54864" tIns="54864" bIns="54864" anchor="t">
+          <a:bodyPr wrap="none" lIns="54864" tIns="54864" rIns="54864" bIns="54864" anchor="t">
             <a:spAutoFit/>
           </a:bodyPr>
           <a:lstStyle/>
@@ -8129,6 +8186,7 @@
           <a:lstStyle/>
           <a:p>
             <a:pPr algn="ctr"/>
+            <a:endParaRPr/>
           </a:p>
         </p:txBody>
       </p:sp>
@@ -8149,7 +8207,7 @@
           <a:noFill/>
         </p:spPr>
         <p:txBody>
-          <a:bodyPr wrap="none" lIns="54864" rIns="54864" tIns="54864" bIns="54864" anchor="t">
+          <a:bodyPr wrap="none" lIns="54864" tIns="54864" rIns="54864" bIns="54864" anchor="t">
             <a:spAutoFit/>
           </a:bodyPr>
           <a:lstStyle/>
@@ -8184,7 +8242,7 @@
           <a:noFill/>
         </p:spPr>
         <p:txBody>
-          <a:bodyPr wrap="none" lIns="54864" rIns="54864" tIns="54864" bIns="54864" anchor="t">
+          <a:bodyPr wrap="none" lIns="54864" tIns="54864" rIns="54864" bIns="54864" anchor="t">
             <a:spAutoFit/>
           </a:bodyPr>
           <a:lstStyle/>
@@ -8219,7 +8277,7 @@
           <a:noFill/>
         </p:spPr>
         <p:txBody>
-          <a:bodyPr wrap="none" lIns="54864" rIns="54864" tIns="54864" bIns="54864" anchor="t">
+          <a:bodyPr wrap="none" lIns="54864" tIns="54864" rIns="54864" bIns="54864" anchor="t">
             <a:spAutoFit/>
           </a:bodyPr>
           <a:lstStyle/>
@@ -8279,6 +8337,7 @@
           <a:lstStyle/>
           <a:p>
             <a:pPr algn="ctr"/>
+            <a:endParaRPr/>
           </a:p>
         </p:txBody>
       </p:sp>
@@ -8299,7 +8358,7 @@
           <a:noFill/>
         </p:spPr>
         <p:txBody>
-          <a:bodyPr wrap="none" lIns="54864" rIns="54864" tIns="54864" bIns="54864" anchor="t">
+          <a:bodyPr wrap="none" lIns="54864" tIns="54864" rIns="54864" bIns="54864" anchor="t">
             <a:spAutoFit/>
           </a:bodyPr>
           <a:lstStyle/>
@@ -8334,7 +8393,7 @@
           <a:noFill/>
         </p:spPr>
         <p:txBody>
-          <a:bodyPr wrap="none" lIns="54864" rIns="54864" tIns="54864" bIns="54864" anchor="t">
+          <a:bodyPr wrap="none" lIns="54864" tIns="54864" rIns="54864" bIns="54864" anchor="t">
             <a:spAutoFit/>
           </a:bodyPr>
           <a:lstStyle/>
@@ -8369,7 +8428,7 @@
           <a:noFill/>
         </p:spPr>
         <p:txBody>
-          <a:bodyPr wrap="none" lIns="54864" rIns="54864" tIns="54864" bIns="54864" anchor="t">
+          <a:bodyPr wrap="none" lIns="54864" tIns="54864" rIns="54864" bIns="54864" anchor="t">
             <a:spAutoFit/>
           </a:bodyPr>
           <a:lstStyle/>
@@ -8548,7 +8607,7 @@
           <a:noFill/>
         </p:spPr>
         <p:txBody>
-          <a:bodyPr wrap="none" lIns="54864" rIns="54864" tIns="54864" bIns="54864" anchor="t">
+          <a:bodyPr wrap="none" lIns="54864" tIns="54864" rIns="54864" bIns="54864" anchor="t">
             <a:spAutoFit/>
           </a:bodyPr>
           <a:lstStyle/>
@@ -8608,6 +8667,7 @@
           <a:lstStyle/>
           <a:p>
             <a:pPr algn="ctr"/>
+            <a:endParaRPr/>
           </a:p>
         </p:txBody>
       </p:sp>
@@ -8628,7 +8688,7 @@
           <a:noFill/>
         </p:spPr>
         <p:txBody>
-          <a:bodyPr wrap="none" lIns="54864" rIns="54864" tIns="54864" bIns="54864" anchor="t">
+          <a:bodyPr wrap="none" lIns="54864" tIns="54864" rIns="54864" bIns="54864" anchor="t">
             <a:spAutoFit/>
           </a:bodyPr>
           <a:lstStyle/>
@@ -8663,7 +8723,7 @@
           <a:noFill/>
         </p:spPr>
         <p:txBody>
-          <a:bodyPr wrap="none" lIns="54864" rIns="54864" tIns="54864" bIns="54864" anchor="t">
+          <a:bodyPr wrap="none" lIns="54864" tIns="54864" rIns="54864" bIns="54864" anchor="t">
             <a:spAutoFit/>
           </a:bodyPr>
           <a:lstStyle/>
@@ -8733,7 +8793,7 @@
           <a:noFill/>
         </p:spPr>
         <p:txBody>
-          <a:bodyPr wrap="none" lIns="54864" rIns="54864" tIns="54864" bIns="54864" anchor="t">
+          <a:bodyPr wrap="none" lIns="54864" tIns="54864" rIns="54864" bIns="54864" anchor="t">
             <a:spAutoFit/>
           </a:bodyPr>
           <a:lstStyle/>
@@ -8768,7 +8828,7 @@
           <a:noFill/>
         </p:spPr>
         <p:txBody>
-          <a:bodyPr wrap="none" lIns="54864" rIns="54864" tIns="54864" bIns="54864" anchor="t">
+          <a:bodyPr wrap="none" lIns="54864" tIns="54864" rIns="54864" bIns="54864" anchor="t">
             <a:spAutoFit/>
           </a:bodyPr>
           <a:lstStyle/>
@@ -8838,7 +8898,7 @@
           <a:noFill/>
         </p:spPr>
         <p:txBody>
-          <a:bodyPr wrap="none" lIns="54864" rIns="54864" tIns="54864" bIns="54864" anchor="t">
+          <a:bodyPr wrap="none" lIns="54864" tIns="54864" rIns="54864" bIns="54864" anchor="t">
             <a:spAutoFit/>
           </a:bodyPr>
           <a:lstStyle/>
@@ -8873,7 +8933,7 @@
           <a:noFill/>
         </p:spPr>
         <p:txBody>
-          <a:bodyPr wrap="none" lIns="54864" rIns="54864" tIns="54864" bIns="54864" anchor="t">
+          <a:bodyPr wrap="none" lIns="54864" tIns="54864" rIns="54864" bIns="54864" anchor="t">
             <a:spAutoFit/>
           </a:bodyPr>
           <a:lstStyle/>
@@ -8943,7 +9003,7 @@
           <a:noFill/>
         </p:spPr>
         <p:txBody>
-          <a:bodyPr wrap="none" lIns="54864" rIns="54864" tIns="54864" bIns="54864" anchor="t">
+          <a:bodyPr wrap="none" lIns="54864" tIns="54864" rIns="54864" bIns="54864" anchor="t">
             <a:spAutoFit/>
           </a:bodyPr>
           <a:lstStyle/>
@@ -8978,7 +9038,7 @@
           <a:noFill/>
         </p:spPr>
         <p:txBody>
-          <a:bodyPr wrap="none" lIns="54864" rIns="54864" tIns="54864" bIns="54864" anchor="t">
+          <a:bodyPr wrap="none" lIns="54864" tIns="54864" rIns="54864" bIns="54864" anchor="t">
             <a:spAutoFit/>
           </a:bodyPr>
           <a:lstStyle/>
@@ -9048,7 +9108,7 @@
           <a:noFill/>
         </p:spPr>
         <p:txBody>
-          <a:bodyPr wrap="none" lIns="54864" rIns="54864" tIns="54864" bIns="54864" anchor="t">
+          <a:bodyPr wrap="none" lIns="54864" tIns="54864" rIns="54864" bIns="54864" anchor="t">
             <a:spAutoFit/>
           </a:bodyPr>
           <a:lstStyle/>
@@ -9083,7 +9143,7 @@
           <a:noFill/>
         </p:spPr>
         <p:txBody>
-          <a:bodyPr wrap="none" lIns="54864" rIns="54864" tIns="54864" bIns="54864" anchor="t">
+          <a:bodyPr wrap="none" lIns="54864" tIns="54864" rIns="54864" bIns="54864" anchor="t">
             <a:spAutoFit/>
           </a:bodyPr>
           <a:lstStyle/>
@@ -9153,7 +9213,7 @@
           <a:noFill/>
         </p:spPr>
         <p:txBody>
-          <a:bodyPr wrap="none" lIns="54864" rIns="54864" tIns="54864" bIns="54864" anchor="t">
+          <a:bodyPr wrap="none" lIns="54864" tIns="54864" rIns="54864" bIns="54864" anchor="t">
             <a:spAutoFit/>
           </a:bodyPr>
           <a:lstStyle/>
@@ -9188,7 +9248,7 @@
           <a:noFill/>
         </p:spPr>
         <p:txBody>
-          <a:bodyPr wrap="none" lIns="54864" rIns="54864" tIns="54864" bIns="54864" anchor="t">
+          <a:bodyPr wrap="none" lIns="54864" tIns="54864" rIns="54864" bIns="54864" anchor="t">
             <a:spAutoFit/>
           </a:bodyPr>
           <a:lstStyle/>
@@ -9215,7 +9275,7 @@
 </file>
 
 <file path=ppt/slides/slide2.xml><?xml version="1.0" encoding="utf-8"?>
-<p:sld xmlns:a="http://schemas.openxmlformats.org/drawingml/2006/main" xmlns:p="http://schemas.openxmlformats.org/presentationml/2006/main" xmlns:r="http://schemas.openxmlformats.org/officeDocument/2006/relationships">
+<p:sld xmlns:a="http://schemas.openxmlformats.org/drawingml/2006/main" xmlns:r="http://schemas.openxmlformats.org/officeDocument/2006/relationships" xmlns:p="http://schemas.openxmlformats.org/presentationml/2006/main">
   <p:cSld>
     <p:bg>
       <p:bgPr>
@@ -9231,7 +9291,14 @@
         <p:cNvGrpSpPr/>
         <p:nvPr/>
       </p:nvGrpSpPr>
-      <p:grpSpPr/>
+      <p:grpSpPr>
+        <a:xfrm>
+          <a:off x="0" y="0"/>
+          <a:ext cx="0" cy="0"/>
+          <a:chOff x="0" y="0"/>
+          <a:chExt cx="0" cy="0"/>
+        </a:xfrm>
+      </p:grpSpPr>
       <p:sp>
         <p:nvSpPr>
           <p:cNvPr id="2" name="TextBox 1"/>
@@ -9249,7 +9316,7 @@
           <a:noFill/>
         </p:spPr>
         <p:txBody>
-          <a:bodyPr wrap="none" lIns="54864" rIns="54864" tIns="54864" bIns="54864" anchor="t">
+          <a:bodyPr wrap="none" lIns="54864" tIns="54864" rIns="54864" bIns="54864" anchor="t">
             <a:spAutoFit/>
           </a:bodyPr>
           <a:lstStyle/>
@@ -9284,7 +9351,7 @@
           <a:noFill/>
         </p:spPr>
         <p:txBody>
-          <a:bodyPr wrap="none" lIns="54864" rIns="54864" tIns="54864" bIns="54864" anchor="t">
+          <a:bodyPr wrap="none" lIns="54864" tIns="54864" rIns="54864" bIns="54864" anchor="t">
             <a:spAutoFit/>
           </a:bodyPr>
           <a:lstStyle/>
@@ -9344,6 +9411,7 @@
           <a:lstStyle/>
           <a:p>
             <a:pPr algn="ctr"/>
+            <a:endParaRPr/>
           </a:p>
         </p:txBody>
       </p:sp>
@@ -9364,7 +9432,7 @@
           <a:noFill/>
         </p:spPr>
         <p:txBody>
-          <a:bodyPr wrap="none" lIns="54864" rIns="54864" tIns="54864" bIns="54864" anchor="t">
+          <a:bodyPr wrap="none" lIns="54864" tIns="54864" rIns="54864" bIns="54864" anchor="t">
             <a:spAutoFit/>
           </a:bodyPr>
           <a:lstStyle/>
@@ -9422,6 +9490,7 @@
           <a:lstStyle/>
           <a:p>
             <a:pPr algn="ctr"/>
+            <a:endParaRPr/>
           </a:p>
         </p:txBody>
       </p:sp>
@@ -9502,6 +9571,7 @@
           <a:lstStyle/>
           <a:p>
             <a:pPr algn="ctr"/>
+            <a:endParaRPr/>
           </a:p>
         </p:txBody>
       </p:sp>
@@ -9547,6 +9617,7 @@
           <a:lstStyle/>
           <a:p>
             <a:pPr algn="ctr"/>
+            <a:endParaRPr/>
           </a:p>
         </p:txBody>
       </p:sp>
@@ -9567,7 +9638,7 @@
           <a:noFill/>
         </p:spPr>
         <p:txBody>
-          <a:bodyPr wrap="square" lIns="73152" rIns="36576" tIns="36576" bIns="36576">
+          <a:bodyPr wrap="square" lIns="73152" tIns="36576" rIns="36576" bIns="36576">
             <a:spAutoFit/>
           </a:bodyPr>
           <a:lstStyle/>
@@ -9679,6 +9750,7 @@
           <a:lstStyle/>
           <a:p>
             <a:pPr algn="ctr"/>
+            <a:endParaRPr/>
           </a:p>
         </p:txBody>
       </p:sp>
@@ -9699,7 +9771,7 @@
           <a:noFill/>
         </p:spPr>
         <p:txBody>
-          <a:bodyPr wrap="none" lIns="54864" rIns="54864" tIns="54864" bIns="54864" anchor="t">
+          <a:bodyPr wrap="none" lIns="54864" tIns="54864" rIns="54864" bIns="54864" anchor="t">
             <a:spAutoFit/>
           </a:bodyPr>
           <a:lstStyle/>
@@ -9759,6 +9831,7 @@
           <a:lstStyle/>
           <a:p>
             <a:pPr algn="ctr"/>
+            <a:endParaRPr/>
           </a:p>
         </p:txBody>
       </p:sp>
@@ -9779,7 +9852,7 @@
           <a:noFill/>
         </p:spPr>
         <p:txBody>
-          <a:bodyPr wrap="none" lIns="54864" rIns="54864" tIns="54864" bIns="54864" anchor="t">
+          <a:bodyPr wrap="none" lIns="54864" tIns="54864" rIns="54864" bIns="54864" anchor="t">
             <a:spAutoFit/>
           </a:bodyPr>
           <a:lstStyle/>
@@ -9839,6 +9912,7 @@
           <a:lstStyle/>
           <a:p>
             <a:pPr algn="ctr"/>
+            <a:endParaRPr/>
           </a:p>
         </p:txBody>
       </p:sp>
@@ -9859,7 +9933,7 @@
           <a:noFill/>
         </p:spPr>
         <p:txBody>
-          <a:bodyPr wrap="none" lIns="54864" rIns="54864" tIns="54864" bIns="54864" anchor="t">
+          <a:bodyPr wrap="none" lIns="54864" tIns="54864" rIns="54864" bIns="54864" anchor="t">
             <a:spAutoFit/>
           </a:bodyPr>
           <a:lstStyle/>
@@ -9919,6 +9993,7 @@
           <a:lstStyle/>
           <a:p>
             <a:pPr algn="ctr"/>
+            <a:endParaRPr/>
           </a:p>
         </p:txBody>
       </p:sp>
@@ -9939,7 +10014,7 @@
           <a:noFill/>
         </p:spPr>
         <p:txBody>
-          <a:bodyPr wrap="none" lIns="54864" rIns="54864" tIns="54864" bIns="54864" anchor="t">
+          <a:bodyPr wrap="none" lIns="54864" tIns="54864" rIns="54864" bIns="54864" anchor="t">
             <a:spAutoFit/>
           </a:bodyPr>
           <a:lstStyle/>
@@ -10044,7 +10119,7 @@
           <a:noFill/>
         </p:spPr>
         <p:txBody>
-          <a:bodyPr wrap="none" lIns="54864" rIns="54864" tIns="54864" bIns="54864" anchor="t">
+          <a:bodyPr wrap="none" lIns="54864" tIns="54864" rIns="54864" bIns="54864" anchor="t">
             <a:spAutoFit/>
           </a:bodyPr>
           <a:lstStyle/>
@@ -10079,7 +10154,7 @@
           <a:noFill/>
         </p:spPr>
         <p:txBody>
-          <a:bodyPr wrap="none" lIns="54864" rIns="54864" tIns="54864" bIns="54864" anchor="t">
+          <a:bodyPr wrap="none" lIns="54864" tIns="54864" rIns="54864" bIns="54864" anchor="t">
             <a:spAutoFit/>
           </a:bodyPr>
           <a:lstStyle/>
@@ -10139,6 +10214,7 @@
           <a:lstStyle/>
           <a:p>
             <a:pPr algn="ctr"/>
+            <a:endParaRPr/>
           </a:p>
         </p:txBody>
       </p:sp>
@@ -10159,7 +10235,7 @@
           <a:noFill/>
         </p:spPr>
         <p:txBody>
-          <a:bodyPr wrap="none" lIns="54864" rIns="54864" tIns="54864" bIns="54864" anchor="t">
+          <a:bodyPr wrap="none" lIns="54864" tIns="54864" rIns="54864" bIns="54864" anchor="t">
             <a:spAutoFit/>
           </a:bodyPr>
           <a:lstStyle/>
@@ -10230,7 +10306,7 @@
           <a:noFill/>
         </p:spPr>
         <p:txBody>
-          <a:bodyPr wrap="none" lIns="54864" rIns="54864" tIns="54864" bIns="54864" anchor="t">
+          <a:bodyPr wrap="none" lIns="54864" tIns="54864" rIns="54864" bIns="54864" anchor="t">
             <a:spAutoFit/>
           </a:bodyPr>
           <a:lstStyle/>
@@ -10290,6 +10366,7 @@
           <a:lstStyle/>
           <a:p>
             <a:pPr algn="ctr"/>
+            <a:endParaRPr/>
           </a:p>
         </p:txBody>
       </p:sp>
@@ -10310,7 +10387,7 @@
           <a:noFill/>
         </p:spPr>
         <p:txBody>
-          <a:bodyPr wrap="none" lIns="54864" rIns="54864" tIns="54864" bIns="54864" anchor="t">
+          <a:bodyPr wrap="none" lIns="54864" tIns="54864" rIns="54864" bIns="54864" anchor="t">
             <a:spAutoFit/>
           </a:bodyPr>
           <a:lstStyle/>
@@ -10345,7 +10422,7 @@
           <a:noFill/>
         </p:spPr>
         <p:txBody>
-          <a:bodyPr wrap="none" lIns="54864" rIns="54864" tIns="54864" bIns="54864" anchor="t">
+          <a:bodyPr wrap="none" lIns="54864" tIns="54864" rIns="54864" bIns="54864" anchor="t">
             <a:spAutoFit/>
           </a:bodyPr>
           <a:lstStyle/>
@@ -10415,7 +10492,7 @@
           <a:noFill/>
         </p:spPr>
         <p:txBody>
-          <a:bodyPr wrap="none" lIns="54864" rIns="54864" tIns="54864" bIns="54864" anchor="t">
+          <a:bodyPr wrap="none" lIns="54864" tIns="54864" rIns="54864" bIns="54864" anchor="t">
             <a:spAutoFit/>
           </a:bodyPr>
           <a:lstStyle/>
@@ -10450,7 +10527,7 @@
           <a:noFill/>
         </p:spPr>
         <p:txBody>
-          <a:bodyPr wrap="none" lIns="54864" rIns="54864" tIns="54864" bIns="54864" anchor="t">
+          <a:bodyPr wrap="none" lIns="54864" tIns="54864" rIns="54864" bIns="54864" anchor="t">
             <a:spAutoFit/>
           </a:bodyPr>
           <a:lstStyle/>
@@ -10520,7 +10597,7 @@
           <a:noFill/>
         </p:spPr>
         <p:txBody>
-          <a:bodyPr wrap="none" lIns="54864" rIns="54864" tIns="54864" bIns="54864" anchor="t">
+          <a:bodyPr wrap="none" lIns="54864" tIns="54864" rIns="54864" bIns="54864" anchor="t">
             <a:spAutoFit/>
           </a:bodyPr>
           <a:lstStyle/>
@@ -10555,7 +10632,7 @@
           <a:noFill/>
         </p:spPr>
         <p:txBody>
-          <a:bodyPr wrap="none" lIns="54864" rIns="54864" tIns="54864" bIns="54864" anchor="t">
+          <a:bodyPr wrap="none" lIns="54864" tIns="54864" rIns="54864" bIns="54864" anchor="t">
             <a:spAutoFit/>
           </a:bodyPr>
           <a:lstStyle/>
@@ -10625,7 +10702,7 @@
           <a:noFill/>
         </p:spPr>
         <p:txBody>
-          <a:bodyPr wrap="none" lIns="54864" rIns="54864" tIns="54864" bIns="54864" anchor="t">
+          <a:bodyPr wrap="none" lIns="54864" tIns="54864" rIns="54864" bIns="54864" anchor="t">
             <a:spAutoFit/>
           </a:bodyPr>
           <a:lstStyle/>
@@ -10660,7 +10737,7 @@
           <a:noFill/>
         </p:spPr>
         <p:txBody>
-          <a:bodyPr wrap="none" lIns="54864" rIns="54864" tIns="54864" bIns="54864" anchor="t">
+          <a:bodyPr wrap="none" lIns="54864" tIns="54864" rIns="54864" bIns="54864" anchor="t">
             <a:spAutoFit/>
           </a:bodyPr>
           <a:lstStyle/>
@@ -10730,7 +10807,7 @@
           <a:noFill/>
         </p:spPr>
         <p:txBody>
-          <a:bodyPr wrap="none" lIns="54864" rIns="54864" tIns="54864" bIns="54864" anchor="t">
+          <a:bodyPr wrap="none" lIns="54864" tIns="54864" rIns="54864" bIns="54864" anchor="t">
             <a:spAutoFit/>
           </a:bodyPr>
           <a:lstStyle/>
@@ -10765,7 +10842,7 @@
           <a:noFill/>
         </p:spPr>
         <p:txBody>
-          <a:bodyPr wrap="none" lIns="54864" rIns="54864" tIns="54864" bIns="54864" anchor="t">
+          <a:bodyPr wrap="none" lIns="54864" tIns="54864" rIns="54864" bIns="54864" anchor="t">
             <a:spAutoFit/>
           </a:bodyPr>
           <a:lstStyle/>
@@ -10835,7 +10912,7 @@
           <a:noFill/>
         </p:spPr>
         <p:txBody>
-          <a:bodyPr wrap="none" lIns="54864" rIns="54864" tIns="54864" bIns="54864" anchor="t">
+          <a:bodyPr wrap="none" lIns="54864" tIns="54864" rIns="54864" bIns="54864" anchor="t">
             <a:spAutoFit/>
           </a:bodyPr>
           <a:lstStyle/>
@@ -10870,7 +10947,7 @@
           <a:noFill/>
         </p:spPr>
         <p:txBody>
-          <a:bodyPr wrap="none" lIns="54864" rIns="54864" tIns="54864" bIns="54864" anchor="t">
+          <a:bodyPr wrap="none" lIns="54864" tIns="54864" rIns="54864" bIns="54864" anchor="t">
             <a:spAutoFit/>
           </a:bodyPr>
           <a:lstStyle/>
@@ -10897,7 +10974,7 @@
 </file>
 
 <file path=ppt/slides/slide3.xml><?xml version="1.0" encoding="utf-8"?>
-<p:sld xmlns:a="http://schemas.openxmlformats.org/drawingml/2006/main" xmlns:p="http://schemas.openxmlformats.org/presentationml/2006/main" xmlns:r="http://schemas.openxmlformats.org/officeDocument/2006/relationships">
+<p:sld xmlns:a="http://schemas.openxmlformats.org/drawingml/2006/main" xmlns:r="http://schemas.openxmlformats.org/officeDocument/2006/relationships" xmlns:p="http://schemas.openxmlformats.org/presentationml/2006/main">
   <p:cSld>
     <p:bg>
       <p:bgPr>
@@ -10913,7 +10990,14 @@
         <p:cNvGrpSpPr/>
         <p:nvPr/>
       </p:nvGrpSpPr>
-      <p:grpSpPr/>
+      <p:grpSpPr>
+        <a:xfrm>
+          <a:off x="0" y="0"/>
+          <a:ext cx="0" cy="0"/>
+          <a:chOff x="0" y="0"/>
+          <a:chExt cx="0" cy="0"/>
+        </a:xfrm>
+      </p:grpSpPr>
       <p:sp>
         <p:nvSpPr>
           <p:cNvPr id="2" name="TextBox 1"/>
@@ -10931,7 +11015,7 @@
           <a:noFill/>
         </p:spPr>
         <p:txBody>
-          <a:bodyPr wrap="none" lIns="54864" rIns="54864" tIns="54864" bIns="54864" anchor="t">
+          <a:bodyPr wrap="none" lIns="54864" tIns="54864" rIns="54864" bIns="54864" anchor="t">
             <a:spAutoFit/>
           </a:bodyPr>
           <a:lstStyle/>
@@ -10966,7 +11050,7 @@
           <a:noFill/>
         </p:spPr>
         <p:txBody>
-          <a:bodyPr wrap="none" lIns="54864" rIns="54864" tIns="54864" bIns="54864" anchor="t">
+          <a:bodyPr wrap="none" lIns="54864" tIns="54864" rIns="54864" bIns="54864" anchor="t">
             <a:spAutoFit/>
           </a:bodyPr>
           <a:lstStyle/>
@@ -11026,6 +11110,7 @@
           <a:lstStyle/>
           <a:p>
             <a:pPr algn="ctr"/>
+            <a:endParaRPr/>
           </a:p>
         </p:txBody>
       </p:sp>
@@ -11046,7 +11131,7 @@
           <a:noFill/>
         </p:spPr>
         <p:txBody>
-          <a:bodyPr wrap="none" lIns="54864" rIns="54864" tIns="54864" bIns="54864" anchor="ctr">
+          <a:bodyPr wrap="none" lIns="54864" tIns="54864" rIns="54864" bIns="54864" anchor="ctr">
             <a:spAutoFit/>
           </a:bodyPr>
           <a:lstStyle/>
@@ -11081,7 +11166,7 @@
           <a:noFill/>
         </p:spPr>
         <p:txBody>
-          <a:bodyPr wrap="none" lIns="54864" rIns="54864" tIns="54864" bIns="54864" anchor="ctr">
+          <a:bodyPr wrap="none" lIns="54864" tIns="54864" rIns="54864" bIns="54864" anchor="ctr">
             <a:spAutoFit/>
           </a:bodyPr>
           <a:lstStyle/>
@@ -11141,6 +11226,7 @@
           <a:lstStyle/>
           <a:p>
             <a:pPr algn="ctr"/>
+            <a:endParaRPr/>
           </a:p>
         </p:txBody>
       </p:sp>
@@ -11186,6 +11272,7 @@
           <a:lstStyle/>
           <a:p>
             <a:pPr algn="ctr"/>
+            <a:endParaRPr/>
           </a:p>
         </p:txBody>
       </p:sp>
@@ -11231,6 +11318,7 @@
           <a:lstStyle/>
           <a:p>
             <a:pPr algn="ctr"/>
+            <a:endParaRPr/>
           </a:p>
         </p:txBody>
       </p:sp>
@@ -11276,6 +11364,7 @@
           <a:lstStyle/>
           <a:p>
             <a:pPr algn="ctr"/>
+            <a:endParaRPr/>
           </a:p>
         </p:txBody>
       </p:sp>
@@ -11296,7 +11385,7 @@
           <a:noFill/>
         </p:spPr>
         <p:txBody>
-          <a:bodyPr wrap="none" lIns="54864" rIns="54864" tIns="54864" bIns="54864" anchor="t">
+          <a:bodyPr wrap="none" lIns="54864" tIns="54864" rIns="54864" bIns="54864" anchor="t">
             <a:spAutoFit/>
           </a:bodyPr>
           <a:lstStyle/>
@@ -11331,7 +11420,7 @@
           <a:noFill/>
         </p:spPr>
         <p:txBody>
-          <a:bodyPr wrap="none" lIns="54864" rIns="54864" tIns="54864" bIns="54864" anchor="t">
+          <a:bodyPr wrap="none" lIns="54864" tIns="54864" rIns="54864" bIns="54864" anchor="t">
             <a:spAutoFit/>
           </a:bodyPr>
           <a:lstStyle/>
@@ -11391,6 +11480,7 @@
           <a:lstStyle/>
           <a:p>
             <a:pPr algn="ctr"/>
+            <a:endParaRPr/>
           </a:p>
         </p:txBody>
       </p:sp>
@@ -11436,6 +11526,7 @@
           <a:lstStyle/>
           <a:p>
             <a:pPr algn="ctr"/>
+            <a:endParaRPr/>
           </a:p>
         </p:txBody>
       </p:sp>
@@ -11481,6 +11572,7 @@
           <a:lstStyle/>
           <a:p>
             <a:pPr algn="ctr"/>
+            <a:endParaRPr/>
           </a:p>
         </p:txBody>
       </p:sp>
@@ -11526,6 +11618,7 @@
           <a:lstStyle/>
           <a:p>
             <a:pPr algn="ctr"/>
+            <a:endParaRPr/>
           </a:p>
         </p:txBody>
       </p:sp>
@@ -11546,7 +11639,7 @@
           <a:noFill/>
         </p:spPr>
         <p:txBody>
-          <a:bodyPr wrap="none" lIns="54864" rIns="54864" tIns="54864" bIns="54864" anchor="t">
+          <a:bodyPr wrap="none" lIns="54864" tIns="54864" rIns="54864" bIns="54864" anchor="t">
             <a:spAutoFit/>
           </a:bodyPr>
           <a:lstStyle/>
@@ -11581,7 +11674,7 @@
           <a:noFill/>
         </p:spPr>
         <p:txBody>
-          <a:bodyPr wrap="none" lIns="54864" rIns="54864" tIns="54864" bIns="54864" anchor="t">
+          <a:bodyPr wrap="none" lIns="54864" tIns="54864" rIns="54864" bIns="54864" anchor="t">
             <a:spAutoFit/>
           </a:bodyPr>
           <a:lstStyle/>
@@ -11641,6 +11734,7 @@
           <a:lstStyle/>
           <a:p>
             <a:pPr algn="ctr"/>
+            <a:endParaRPr/>
           </a:p>
         </p:txBody>
       </p:sp>
@@ -11686,6 +11780,7 @@
           <a:lstStyle/>
           <a:p>
             <a:pPr algn="ctr"/>
+            <a:endParaRPr/>
           </a:p>
         </p:txBody>
       </p:sp>
@@ -11731,6 +11826,7 @@
           <a:lstStyle/>
           <a:p>
             <a:pPr algn="ctr"/>
+            <a:endParaRPr/>
           </a:p>
         </p:txBody>
       </p:sp>
@@ -11776,6 +11872,7 @@
           <a:lstStyle/>
           <a:p>
             <a:pPr algn="ctr"/>
+            <a:endParaRPr/>
           </a:p>
         </p:txBody>
       </p:sp>
@@ -11796,7 +11893,7 @@
           <a:noFill/>
         </p:spPr>
         <p:txBody>
-          <a:bodyPr wrap="none" lIns="54864" rIns="54864" tIns="54864" bIns="54864" anchor="t">
+          <a:bodyPr wrap="none" lIns="54864" tIns="54864" rIns="54864" bIns="54864" anchor="t">
             <a:spAutoFit/>
           </a:bodyPr>
           <a:lstStyle/>
@@ -11831,7 +11928,7 @@
           <a:noFill/>
         </p:spPr>
         <p:txBody>
-          <a:bodyPr wrap="none" lIns="54864" rIns="54864" tIns="54864" bIns="54864" anchor="t">
+          <a:bodyPr wrap="none" lIns="54864" tIns="54864" rIns="54864" bIns="54864" anchor="t">
             <a:spAutoFit/>
           </a:bodyPr>
           <a:lstStyle/>
@@ -11961,6 +12058,7 @@
           <a:lstStyle/>
           <a:p>
             <a:pPr algn="ctr"/>
+            <a:endParaRPr/>
           </a:p>
         </p:txBody>
       </p:sp>
@@ -11981,7 +12079,7 @@
           <a:noFill/>
         </p:spPr>
         <p:txBody>
-          <a:bodyPr wrap="none" lIns="54864" rIns="54864" tIns="54864" bIns="54864" anchor="t">
+          <a:bodyPr wrap="none" lIns="54864" tIns="54864" rIns="54864" bIns="54864" anchor="t">
             <a:spAutoFit/>
           </a:bodyPr>
           <a:lstStyle/>
@@ -12041,6 +12139,7 @@
           <a:lstStyle/>
           <a:p>
             <a:pPr algn="ctr"/>
+            <a:endParaRPr/>
           </a:p>
         </p:txBody>
       </p:sp>
@@ -12061,7 +12160,7 @@
           <a:noFill/>
         </p:spPr>
         <p:txBody>
-          <a:bodyPr wrap="none" lIns="54864" rIns="54864" tIns="54864" bIns="54864" anchor="t">
+          <a:bodyPr wrap="none" lIns="54864" tIns="54864" rIns="54864" bIns="54864" anchor="t">
             <a:spAutoFit/>
           </a:bodyPr>
           <a:lstStyle/>
@@ -12096,7 +12195,7 @@
           <a:noFill/>
         </p:spPr>
         <p:txBody>
-          <a:bodyPr wrap="none" lIns="54864" rIns="54864" tIns="54864" bIns="54864" anchor="t">
+          <a:bodyPr wrap="none" lIns="54864" tIns="54864" rIns="54864" bIns="54864" anchor="t">
             <a:spAutoFit/>
           </a:bodyPr>
           <a:lstStyle/>
@@ -12156,6 +12255,7 @@
           <a:lstStyle/>
           <a:p>
             <a:pPr algn="ctr"/>
+            <a:endParaRPr/>
           </a:p>
         </p:txBody>
       </p:sp>
@@ -12176,7 +12276,7 @@
           <a:noFill/>
         </p:spPr>
         <p:txBody>
-          <a:bodyPr wrap="none" lIns="54864" rIns="54864" tIns="54864" bIns="54864" anchor="t">
+          <a:bodyPr wrap="none" lIns="54864" tIns="54864" rIns="54864" bIns="54864" anchor="t">
             <a:spAutoFit/>
           </a:bodyPr>
           <a:lstStyle/>
@@ -12211,7 +12311,7 @@
           <a:noFill/>
         </p:spPr>
         <p:txBody>
-          <a:bodyPr wrap="none" lIns="54864" rIns="54864" tIns="54864" bIns="54864" anchor="t">
+          <a:bodyPr wrap="none" lIns="54864" tIns="54864" rIns="54864" bIns="54864" anchor="t">
             <a:spAutoFit/>
           </a:bodyPr>
           <a:lstStyle/>
@@ -12271,6 +12371,7 @@
           <a:lstStyle/>
           <a:p>
             <a:pPr algn="ctr"/>
+            <a:endParaRPr/>
           </a:p>
         </p:txBody>
       </p:sp>
@@ -12291,7 +12392,7 @@
           <a:noFill/>
         </p:spPr>
         <p:txBody>
-          <a:bodyPr wrap="none" lIns="54864" rIns="54864" tIns="54864" bIns="54864" anchor="t">
+          <a:bodyPr wrap="none" lIns="54864" tIns="54864" rIns="54864" bIns="54864" anchor="t">
             <a:spAutoFit/>
           </a:bodyPr>
           <a:lstStyle/>
@@ -12326,7 +12427,7 @@
           <a:noFill/>
         </p:spPr>
         <p:txBody>
-          <a:bodyPr wrap="none" lIns="54864" rIns="54864" tIns="54864" bIns="54864" anchor="t">
+          <a:bodyPr wrap="none" lIns="54864" tIns="54864" rIns="54864" bIns="54864" anchor="t">
             <a:spAutoFit/>
           </a:bodyPr>
           <a:lstStyle/>
@@ -12386,6 +12487,7 @@
           <a:lstStyle/>
           <a:p>
             <a:pPr algn="ctr"/>
+            <a:endParaRPr/>
           </a:p>
         </p:txBody>
       </p:sp>
@@ -12406,7 +12508,7 @@
           <a:noFill/>
         </p:spPr>
         <p:txBody>
-          <a:bodyPr wrap="none" lIns="54864" rIns="54864" tIns="54864" bIns="54864" anchor="t">
+          <a:bodyPr wrap="none" lIns="54864" tIns="54864" rIns="54864" bIns="54864" anchor="t">
             <a:spAutoFit/>
           </a:bodyPr>
           <a:lstStyle/>
@@ -12441,7 +12543,7 @@
           <a:noFill/>
         </p:spPr>
         <p:txBody>
-          <a:bodyPr wrap="none" lIns="54864" rIns="54864" tIns="54864" bIns="54864" anchor="t">
+          <a:bodyPr wrap="none" lIns="54864" tIns="54864" rIns="54864" bIns="54864" anchor="t">
             <a:spAutoFit/>
           </a:bodyPr>
           <a:lstStyle/>
@@ -12476,7 +12578,7 @@
           <a:noFill/>
         </p:spPr>
         <p:txBody>
-          <a:bodyPr wrap="none" lIns="54864" rIns="54864" tIns="54864" bIns="54864" anchor="t">
+          <a:bodyPr wrap="none" lIns="54864" tIns="54864" rIns="54864" bIns="54864" anchor="t">
             <a:spAutoFit/>
           </a:bodyPr>
           <a:lstStyle/>
@@ -12536,6 +12638,7 @@
           <a:lstStyle/>
           <a:p>
             <a:pPr algn="ctr"/>
+            <a:endParaRPr/>
           </a:p>
         </p:txBody>
       </p:sp>
@@ -12556,7 +12659,7 @@
           <a:noFill/>
         </p:spPr>
         <p:txBody>
-          <a:bodyPr wrap="none" lIns="54864" rIns="54864" tIns="54864" bIns="54864" anchor="t">
+          <a:bodyPr wrap="none" lIns="54864" tIns="54864" rIns="54864" bIns="54864" anchor="t">
             <a:spAutoFit/>
           </a:bodyPr>
           <a:lstStyle/>
@@ -12591,7 +12694,7 @@
           <a:noFill/>
         </p:spPr>
         <p:txBody>
-          <a:bodyPr wrap="none" lIns="54864" rIns="54864" tIns="54864" bIns="54864" anchor="t">
+          <a:bodyPr wrap="none" lIns="54864" tIns="54864" rIns="54864" bIns="54864" anchor="t">
             <a:spAutoFit/>
           </a:bodyPr>
           <a:lstStyle/>
@@ -12661,7 +12764,7 @@
           <a:noFill/>
         </p:spPr>
         <p:txBody>
-          <a:bodyPr wrap="none" lIns="54864" rIns="54864" tIns="54864" bIns="54864" anchor="t">
+          <a:bodyPr wrap="none" lIns="54864" tIns="54864" rIns="54864" bIns="54864" anchor="t">
             <a:spAutoFit/>
           </a:bodyPr>
           <a:lstStyle/>
@@ -12696,7 +12799,7 @@
           <a:noFill/>
         </p:spPr>
         <p:txBody>
-          <a:bodyPr wrap="none" lIns="54864" rIns="54864" tIns="54864" bIns="54864" anchor="t">
+          <a:bodyPr wrap="none" lIns="54864" tIns="54864" rIns="54864" bIns="54864" anchor="t">
             <a:spAutoFit/>
           </a:bodyPr>
           <a:lstStyle/>
@@ -12766,7 +12869,7 @@
           <a:noFill/>
         </p:spPr>
         <p:txBody>
-          <a:bodyPr wrap="none" lIns="54864" rIns="54864" tIns="54864" bIns="54864" anchor="t">
+          <a:bodyPr wrap="none" lIns="54864" tIns="54864" rIns="54864" bIns="54864" anchor="t">
             <a:spAutoFit/>
           </a:bodyPr>
           <a:lstStyle/>
@@ -12801,7 +12904,7 @@
           <a:noFill/>
         </p:spPr>
         <p:txBody>
-          <a:bodyPr wrap="none" lIns="54864" rIns="54864" tIns="54864" bIns="54864" anchor="t">
+          <a:bodyPr wrap="none" lIns="54864" tIns="54864" rIns="54864" bIns="54864" anchor="t">
             <a:spAutoFit/>
           </a:bodyPr>
           <a:lstStyle/>
@@ -12871,7 +12974,7 @@
           <a:noFill/>
         </p:spPr>
         <p:txBody>
-          <a:bodyPr wrap="none" lIns="54864" rIns="54864" tIns="54864" bIns="54864" anchor="t">
+          <a:bodyPr wrap="none" lIns="54864" tIns="54864" rIns="54864" bIns="54864" anchor="t">
             <a:spAutoFit/>
           </a:bodyPr>
           <a:lstStyle/>
@@ -12906,7 +13009,7 @@
           <a:noFill/>
         </p:spPr>
         <p:txBody>
-          <a:bodyPr wrap="none" lIns="54864" rIns="54864" tIns="54864" bIns="54864" anchor="t">
+          <a:bodyPr wrap="none" lIns="54864" tIns="54864" rIns="54864" bIns="54864" anchor="t">
             <a:spAutoFit/>
           </a:bodyPr>
           <a:lstStyle/>
@@ -12976,7 +13079,7 @@
           <a:noFill/>
         </p:spPr>
         <p:txBody>
-          <a:bodyPr wrap="none" lIns="54864" rIns="54864" tIns="54864" bIns="54864" anchor="t">
+          <a:bodyPr wrap="none" lIns="54864" tIns="54864" rIns="54864" bIns="54864" anchor="t">
             <a:spAutoFit/>
           </a:bodyPr>
           <a:lstStyle/>
@@ -13011,7 +13114,7 @@
           <a:noFill/>
         </p:spPr>
         <p:txBody>
-          <a:bodyPr wrap="none" lIns="54864" rIns="54864" tIns="54864" bIns="54864" anchor="t">
+          <a:bodyPr wrap="none" lIns="54864" tIns="54864" rIns="54864" bIns="54864" anchor="t">
             <a:spAutoFit/>
           </a:bodyPr>
           <a:lstStyle/>
@@ -13081,7 +13184,7 @@
           <a:noFill/>
         </p:spPr>
         <p:txBody>
-          <a:bodyPr wrap="none" lIns="54864" rIns="54864" tIns="54864" bIns="54864" anchor="t">
+          <a:bodyPr wrap="none" lIns="54864" tIns="54864" rIns="54864" bIns="54864" anchor="t">
             <a:spAutoFit/>
           </a:bodyPr>
           <a:lstStyle/>
@@ -13116,7 +13219,7 @@
           <a:noFill/>
         </p:spPr>
         <p:txBody>
-          <a:bodyPr wrap="none" lIns="54864" rIns="54864" tIns="54864" bIns="54864" anchor="t">
+          <a:bodyPr wrap="none" lIns="54864" tIns="54864" rIns="54864" bIns="54864" anchor="t">
             <a:spAutoFit/>
           </a:bodyPr>
           <a:lstStyle/>
@@ -13143,7 +13246,7 @@
 </file>
 
 <file path=ppt/slides/slide4.xml><?xml version="1.0" encoding="utf-8"?>
-<p:sld xmlns:a="http://schemas.openxmlformats.org/drawingml/2006/main" xmlns:p="http://schemas.openxmlformats.org/presentationml/2006/main" xmlns:r="http://schemas.openxmlformats.org/officeDocument/2006/relationships">
+<p:sld xmlns:a="http://schemas.openxmlformats.org/drawingml/2006/main" xmlns:r="http://schemas.openxmlformats.org/officeDocument/2006/relationships" xmlns:p="http://schemas.openxmlformats.org/presentationml/2006/main">
   <p:cSld>
     <p:bg>
       <p:bgPr>
@@ -13159,7 +13262,14 @@
         <p:cNvGrpSpPr/>
         <p:nvPr/>
       </p:nvGrpSpPr>
-      <p:grpSpPr/>
+      <p:grpSpPr>
+        <a:xfrm>
+          <a:off x="0" y="0"/>
+          <a:ext cx="0" cy="0"/>
+          <a:chOff x="0" y="0"/>
+          <a:chExt cx="0" cy="0"/>
+        </a:xfrm>
+      </p:grpSpPr>
       <p:sp>
         <p:nvSpPr>
           <p:cNvPr id="2" name="TextBox 1"/>
@@ -13177,7 +13287,7 @@
           <a:noFill/>
         </p:spPr>
         <p:txBody>
-          <a:bodyPr wrap="none" lIns="54864" rIns="54864" tIns="54864" bIns="54864" anchor="t">
+          <a:bodyPr wrap="none" lIns="54864" tIns="54864" rIns="54864" bIns="54864" anchor="t">
             <a:spAutoFit/>
           </a:bodyPr>
           <a:lstStyle/>
@@ -13212,7 +13322,7 @@
           <a:noFill/>
         </p:spPr>
         <p:txBody>
-          <a:bodyPr wrap="none" lIns="54864" rIns="54864" tIns="54864" bIns="54864" anchor="t">
+          <a:bodyPr wrap="none" lIns="54864" tIns="54864" rIns="54864" bIns="54864" anchor="t">
             <a:spAutoFit/>
           </a:bodyPr>
           <a:lstStyle/>
@@ -13272,6 +13382,7 @@
           <a:lstStyle/>
           <a:p>
             <a:pPr algn="ctr"/>
+            <a:endParaRPr/>
           </a:p>
         </p:txBody>
       </p:sp>
@@ -13292,7 +13403,7 @@
           <a:noFill/>
         </p:spPr>
         <p:txBody>
-          <a:bodyPr wrap="none" lIns="54864" rIns="54864" tIns="54864" bIns="54864" anchor="t">
+          <a:bodyPr wrap="none" lIns="54864" tIns="54864" rIns="54864" bIns="54864" anchor="t">
             <a:spAutoFit/>
           </a:bodyPr>
           <a:lstStyle/>
@@ -13327,7 +13438,7 @@
           <a:noFill/>
         </p:spPr>
         <p:txBody>
-          <a:bodyPr wrap="none" lIns="54864" rIns="54864" tIns="54864" bIns="54864" anchor="t">
+          <a:bodyPr wrap="none" lIns="54864" tIns="54864" rIns="54864" bIns="54864" anchor="t">
             <a:spAutoFit/>
           </a:bodyPr>
           <a:lstStyle/>
@@ -13387,6 +13498,7 @@
           <a:lstStyle/>
           <a:p>
             <a:pPr algn="ctr"/>
+            <a:endParaRPr/>
           </a:p>
         </p:txBody>
       </p:sp>
@@ -13407,7 +13519,7 @@
           <a:noFill/>
         </p:spPr>
         <p:txBody>
-          <a:bodyPr wrap="none" lIns="54864" rIns="54864" tIns="54864" bIns="54864" anchor="t">
+          <a:bodyPr wrap="none" lIns="54864" tIns="54864" rIns="54864" bIns="54864" anchor="t">
             <a:spAutoFit/>
           </a:bodyPr>
           <a:lstStyle/>
@@ -13502,6 +13614,7 @@
           <a:lstStyle/>
           <a:p>
             <a:pPr algn="ctr"/>
+            <a:endParaRPr/>
           </a:p>
         </p:txBody>
       </p:sp>
@@ -13522,7 +13635,7 @@
           <a:noFill/>
         </p:spPr>
         <p:txBody>
-          <a:bodyPr wrap="none" lIns="54864" rIns="54864" tIns="54864" bIns="54864" anchor="t">
+          <a:bodyPr wrap="none" lIns="54864" tIns="54864" rIns="54864" bIns="54864" anchor="t">
             <a:spAutoFit/>
           </a:bodyPr>
           <a:lstStyle/>
@@ -13582,6 +13695,7 @@
           <a:lstStyle/>
           <a:p>
             <a:pPr algn="ctr"/>
+            <a:endParaRPr/>
           </a:p>
         </p:txBody>
       </p:sp>
@@ -13602,7 +13716,7 @@
           <a:noFill/>
         </p:spPr>
         <p:txBody>
-          <a:bodyPr wrap="none" lIns="54864" rIns="54864" tIns="54864" bIns="54864" anchor="t">
+          <a:bodyPr wrap="none" lIns="54864" tIns="54864" rIns="54864" bIns="54864" anchor="t">
             <a:spAutoFit/>
           </a:bodyPr>
           <a:lstStyle/>
@@ -13662,6 +13776,7 @@
           <a:lstStyle/>
           <a:p>
             <a:pPr algn="ctr"/>
+            <a:endParaRPr/>
           </a:p>
         </p:txBody>
       </p:sp>
@@ -13682,7 +13797,7 @@
           <a:noFill/>
         </p:spPr>
         <p:txBody>
-          <a:bodyPr wrap="none" lIns="54864" rIns="54864" tIns="54864" bIns="54864" anchor="t">
+          <a:bodyPr wrap="none" lIns="54864" tIns="54864" rIns="54864" bIns="54864" anchor="t">
             <a:spAutoFit/>
           </a:bodyPr>
           <a:lstStyle/>
@@ -13717,7 +13832,7 @@
           <a:noFill/>
         </p:spPr>
         <p:txBody>
-          <a:bodyPr wrap="none" lIns="54864" rIns="54864" tIns="54864" bIns="54864" anchor="t">
+          <a:bodyPr wrap="none" lIns="54864" tIns="54864" rIns="54864" bIns="54864" anchor="t">
             <a:spAutoFit/>
           </a:bodyPr>
           <a:lstStyle/>
@@ -13777,6 +13892,7 @@
           <a:lstStyle/>
           <a:p>
             <a:pPr algn="ctr"/>
+            <a:endParaRPr/>
           </a:p>
         </p:txBody>
       </p:sp>
@@ -13797,7 +13913,7 @@
           <a:noFill/>
         </p:spPr>
         <p:txBody>
-          <a:bodyPr wrap="none" lIns="54864" rIns="54864" tIns="54864" bIns="54864" anchor="t">
+          <a:bodyPr wrap="none" lIns="54864" tIns="54864" rIns="54864" bIns="54864" anchor="t">
             <a:spAutoFit/>
           </a:bodyPr>
           <a:lstStyle/>
@@ -13892,6 +14008,7 @@
           <a:lstStyle/>
           <a:p>
             <a:pPr algn="ctr"/>
+            <a:endParaRPr/>
           </a:p>
         </p:txBody>
       </p:sp>
@@ -13912,7 +14029,7 @@
           <a:noFill/>
         </p:spPr>
         <p:txBody>
-          <a:bodyPr wrap="none" lIns="54864" rIns="54864" tIns="54864" bIns="54864" anchor="t">
+          <a:bodyPr wrap="none" lIns="54864" tIns="54864" rIns="54864" bIns="54864" anchor="t">
             <a:spAutoFit/>
           </a:bodyPr>
           <a:lstStyle/>
@@ -14007,6 +14124,7 @@
           <a:lstStyle/>
           <a:p>
             <a:pPr algn="ctr"/>
+            <a:endParaRPr/>
           </a:p>
         </p:txBody>
       </p:sp>
@@ -14027,7 +14145,7 @@
           <a:noFill/>
         </p:spPr>
         <p:txBody>
-          <a:bodyPr wrap="none" lIns="54864" rIns="54864" tIns="54864" bIns="54864" anchor="t">
+          <a:bodyPr wrap="none" lIns="54864" tIns="54864" rIns="54864" bIns="54864" anchor="t">
             <a:spAutoFit/>
           </a:bodyPr>
           <a:lstStyle/>
@@ -14122,6 +14240,7 @@
           <a:lstStyle/>
           <a:p>
             <a:pPr algn="ctr"/>
+            <a:endParaRPr/>
           </a:p>
         </p:txBody>
       </p:sp>
@@ -14142,7 +14261,7 @@
           <a:noFill/>
         </p:spPr>
         <p:txBody>
-          <a:bodyPr wrap="none" lIns="54864" rIns="54864" tIns="54864" bIns="54864" anchor="t">
+          <a:bodyPr wrap="none" lIns="54864" tIns="54864" rIns="54864" bIns="54864" anchor="t">
             <a:spAutoFit/>
           </a:bodyPr>
           <a:lstStyle/>
@@ -14202,6 +14321,7 @@
           <a:lstStyle/>
           <a:p>
             <a:pPr algn="ctr"/>
+            <a:endParaRPr/>
           </a:p>
         </p:txBody>
       </p:sp>
@@ -14222,7 +14342,7 @@
           <a:noFill/>
         </p:spPr>
         <p:txBody>
-          <a:bodyPr wrap="none" lIns="54864" rIns="54864" tIns="54864" bIns="54864" anchor="t">
+          <a:bodyPr wrap="none" lIns="54864" tIns="54864" rIns="54864" bIns="54864" anchor="t">
             <a:spAutoFit/>
           </a:bodyPr>
           <a:lstStyle/>
@@ -14282,6 +14402,7 @@
           <a:lstStyle/>
           <a:p>
             <a:pPr algn="ctr"/>
+            <a:endParaRPr/>
           </a:p>
         </p:txBody>
       </p:sp>
@@ -14302,7 +14423,7 @@
           <a:noFill/>
         </p:spPr>
         <p:txBody>
-          <a:bodyPr wrap="none" lIns="54864" rIns="54864" tIns="54864" bIns="54864" anchor="t">
+          <a:bodyPr wrap="none" lIns="54864" tIns="54864" rIns="54864" bIns="54864" anchor="t">
             <a:spAutoFit/>
           </a:bodyPr>
           <a:lstStyle/>
@@ -14337,7 +14458,7 @@
           <a:noFill/>
         </p:spPr>
         <p:txBody>
-          <a:bodyPr wrap="none" lIns="54864" rIns="54864" tIns="54864" bIns="54864" anchor="t">
+          <a:bodyPr wrap="none" lIns="54864" tIns="54864" rIns="54864" bIns="54864" anchor="t">
             <a:spAutoFit/>
           </a:bodyPr>
           <a:lstStyle/>
@@ -14397,6 +14518,7 @@
           <a:lstStyle/>
           <a:p>
             <a:pPr algn="ctr"/>
+            <a:endParaRPr/>
           </a:p>
         </p:txBody>
       </p:sp>
@@ -14417,7 +14539,7 @@
           <a:noFill/>
         </p:spPr>
         <p:txBody>
-          <a:bodyPr wrap="none" lIns="54864" rIns="54864" tIns="54864" bIns="54864" anchor="t">
+          <a:bodyPr wrap="none" lIns="54864" tIns="54864" rIns="54864" bIns="54864" anchor="t">
             <a:spAutoFit/>
           </a:bodyPr>
           <a:lstStyle/>
@@ -14477,6 +14599,7 @@
           <a:lstStyle/>
           <a:p>
             <a:pPr algn="ctr"/>
+            <a:endParaRPr/>
           </a:p>
         </p:txBody>
       </p:sp>
@@ -14497,7 +14620,7 @@
           <a:noFill/>
         </p:spPr>
         <p:txBody>
-          <a:bodyPr wrap="none" lIns="54864" rIns="54864" tIns="54864" bIns="54864" anchor="t">
+          <a:bodyPr wrap="none" lIns="54864" tIns="54864" rIns="54864" bIns="54864" anchor="t">
             <a:spAutoFit/>
           </a:bodyPr>
           <a:lstStyle/>
@@ -14557,6 +14680,7 @@
           <a:lstStyle/>
           <a:p>
             <a:pPr algn="ctr"/>
+            <a:endParaRPr/>
           </a:p>
         </p:txBody>
       </p:sp>
@@ -14577,7 +14701,7 @@
           <a:noFill/>
         </p:spPr>
         <p:txBody>
-          <a:bodyPr wrap="none" lIns="54864" rIns="54864" tIns="54864" bIns="54864" anchor="t">
+          <a:bodyPr wrap="none" lIns="54864" tIns="54864" rIns="54864" bIns="54864" anchor="t">
             <a:spAutoFit/>
           </a:bodyPr>
           <a:lstStyle/>
@@ -14707,6 +14831,7 @@
           <a:lstStyle/>
           <a:p>
             <a:pPr algn="ctr"/>
+            <a:endParaRPr/>
           </a:p>
         </p:txBody>
       </p:sp>
@@ -14727,7 +14852,7 @@
           <a:noFill/>
         </p:spPr>
         <p:txBody>
-          <a:bodyPr wrap="none" lIns="54864" rIns="54864" tIns="54864" bIns="54864" anchor="t">
+          <a:bodyPr wrap="none" lIns="54864" tIns="54864" rIns="54864" bIns="54864" anchor="t">
             <a:spAutoFit/>
           </a:bodyPr>
           <a:lstStyle/>
@@ -14787,6 +14912,7 @@
           <a:lstStyle/>
           <a:p>
             <a:pPr algn="ctr"/>
+            <a:endParaRPr/>
           </a:p>
         </p:txBody>
       </p:sp>
@@ -14807,7 +14933,7 @@
           <a:noFill/>
         </p:spPr>
         <p:txBody>
-          <a:bodyPr wrap="none" lIns="54864" rIns="54864" tIns="54864" bIns="54864" anchor="t">
+          <a:bodyPr wrap="none" lIns="54864" tIns="54864" rIns="54864" bIns="54864" anchor="t">
             <a:spAutoFit/>
           </a:bodyPr>
           <a:lstStyle/>
@@ -14842,7 +14968,7 @@
           <a:noFill/>
         </p:spPr>
         <p:txBody>
-          <a:bodyPr wrap="none" lIns="54864" rIns="54864" tIns="54864" bIns="54864" anchor="t">
+          <a:bodyPr wrap="none" lIns="54864" tIns="54864" rIns="54864" bIns="54864" anchor="t">
             <a:spAutoFit/>
           </a:bodyPr>
           <a:lstStyle/>
@@ -14912,7 +15038,7 @@
           <a:noFill/>
         </p:spPr>
         <p:txBody>
-          <a:bodyPr wrap="none" lIns="54864" rIns="54864" tIns="54864" bIns="54864" anchor="t">
+          <a:bodyPr wrap="none" lIns="54864" tIns="54864" rIns="54864" bIns="54864" anchor="t">
             <a:spAutoFit/>
           </a:bodyPr>
           <a:lstStyle/>
@@ -14947,7 +15073,7 @@
           <a:noFill/>
         </p:spPr>
         <p:txBody>
-          <a:bodyPr wrap="none" lIns="54864" rIns="54864" tIns="54864" bIns="54864" anchor="t">
+          <a:bodyPr wrap="none" lIns="54864" tIns="54864" rIns="54864" bIns="54864" anchor="t">
             <a:spAutoFit/>
           </a:bodyPr>
           <a:lstStyle/>
@@ -15017,7 +15143,7 @@
           <a:noFill/>
         </p:spPr>
         <p:txBody>
-          <a:bodyPr wrap="none" lIns="54864" rIns="54864" tIns="54864" bIns="54864" anchor="t">
+          <a:bodyPr wrap="none" lIns="54864" tIns="54864" rIns="54864" bIns="54864" anchor="t">
             <a:spAutoFit/>
           </a:bodyPr>
           <a:lstStyle/>
@@ -15052,7 +15178,7 @@
           <a:noFill/>
         </p:spPr>
         <p:txBody>
-          <a:bodyPr wrap="none" lIns="54864" rIns="54864" tIns="54864" bIns="54864" anchor="t">
+          <a:bodyPr wrap="none" lIns="54864" tIns="54864" rIns="54864" bIns="54864" anchor="t">
             <a:spAutoFit/>
           </a:bodyPr>
           <a:lstStyle/>
@@ -15122,7 +15248,7 @@
           <a:noFill/>
         </p:spPr>
         <p:txBody>
-          <a:bodyPr wrap="none" lIns="54864" rIns="54864" tIns="54864" bIns="54864" anchor="t">
+          <a:bodyPr wrap="none" lIns="54864" tIns="54864" rIns="54864" bIns="54864" anchor="t">
             <a:spAutoFit/>
           </a:bodyPr>
           <a:lstStyle/>
@@ -15157,7 +15283,7 @@
           <a:noFill/>
         </p:spPr>
         <p:txBody>
-          <a:bodyPr wrap="none" lIns="54864" rIns="54864" tIns="54864" bIns="54864" anchor="t">
+          <a:bodyPr wrap="none" lIns="54864" tIns="54864" rIns="54864" bIns="54864" anchor="t">
             <a:spAutoFit/>
           </a:bodyPr>
           <a:lstStyle/>
@@ -15227,7 +15353,7 @@
           <a:noFill/>
         </p:spPr>
         <p:txBody>
-          <a:bodyPr wrap="none" lIns="54864" rIns="54864" tIns="54864" bIns="54864" anchor="t">
+          <a:bodyPr wrap="none" lIns="54864" tIns="54864" rIns="54864" bIns="54864" anchor="t">
             <a:spAutoFit/>
           </a:bodyPr>
           <a:lstStyle/>
@@ -15262,7 +15388,7 @@
           <a:noFill/>
         </p:spPr>
         <p:txBody>
-          <a:bodyPr wrap="none" lIns="54864" rIns="54864" tIns="54864" bIns="54864" anchor="t">
+          <a:bodyPr wrap="none" lIns="54864" tIns="54864" rIns="54864" bIns="54864" anchor="t">
             <a:spAutoFit/>
           </a:bodyPr>
           <a:lstStyle/>
@@ -15332,7 +15458,7 @@
           <a:noFill/>
         </p:spPr>
         <p:txBody>
-          <a:bodyPr wrap="none" lIns="54864" rIns="54864" tIns="54864" bIns="54864" anchor="t">
+          <a:bodyPr wrap="none" lIns="54864" tIns="54864" rIns="54864" bIns="54864" anchor="t">
             <a:spAutoFit/>
           </a:bodyPr>
           <a:lstStyle/>
@@ -15367,7 +15493,7 @@
           <a:noFill/>
         </p:spPr>
         <p:txBody>
-          <a:bodyPr wrap="none" lIns="54864" rIns="54864" tIns="54864" bIns="54864" anchor="t">
+          <a:bodyPr wrap="none" lIns="54864" tIns="54864" rIns="54864" bIns="54864" anchor="t">
             <a:spAutoFit/>
           </a:bodyPr>
           <a:lstStyle/>
@@ -15394,7 +15520,7 @@
 </file>
 
 <file path=ppt/slides/slide5.xml><?xml version="1.0" encoding="utf-8"?>
-<p:sld xmlns:a="http://schemas.openxmlformats.org/drawingml/2006/main" xmlns:p="http://schemas.openxmlformats.org/presentationml/2006/main" xmlns:r="http://schemas.openxmlformats.org/officeDocument/2006/relationships">
+<p:sld xmlns:a="http://schemas.openxmlformats.org/drawingml/2006/main" xmlns:r="http://schemas.openxmlformats.org/officeDocument/2006/relationships" xmlns:p="http://schemas.openxmlformats.org/presentationml/2006/main">
   <p:cSld>
     <p:bg>
       <p:bgPr>
@@ -15410,7 +15536,14 @@
         <p:cNvGrpSpPr/>
         <p:nvPr/>
       </p:nvGrpSpPr>
-      <p:grpSpPr/>
+      <p:grpSpPr>
+        <a:xfrm>
+          <a:off x="0" y="0"/>
+          <a:ext cx="0" cy="0"/>
+          <a:chOff x="0" y="0"/>
+          <a:chExt cx="0" cy="0"/>
+        </a:xfrm>
+      </p:grpSpPr>
       <p:sp>
         <p:nvSpPr>
           <p:cNvPr id="2" name="TextBox 1"/>
@@ -15428,7 +15561,7 @@
           <a:noFill/>
         </p:spPr>
         <p:txBody>
-          <a:bodyPr wrap="none" lIns="54864" rIns="54864" tIns="54864" bIns="54864" anchor="t">
+          <a:bodyPr wrap="none" lIns="54864" tIns="54864" rIns="54864" bIns="54864" anchor="t">
             <a:spAutoFit/>
           </a:bodyPr>
           <a:lstStyle/>
@@ -15463,7 +15596,7 @@
           <a:noFill/>
         </p:spPr>
         <p:txBody>
-          <a:bodyPr wrap="none" lIns="54864" rIns="54864" tIns="54864" bIns="54864" anchor="t">
+          <a:bodyPr wrap="none" lIns="54864" tIns="54864" rIns="54864" bIns="54864" anchor="t">
             <a:spAutoFit/>
           </a:bodyPr>
           <a:lstStyle/>
@@ -15523,6 +15656,7 @@
           <a:lstStyle/>
           <a:p>
             <a:pPr algn="ctr"/>
+            <a:endParaRPr/>
           </a:p>
         </p:txBody>
       </p:sp>
@@ -15543,7 +15677,7 @@
           <a:noFill/>
         </p:spPr>
         <p:txBody>
-          <a:bodyPr wrap="none" lIns="54864" rIns="54864" tIns="54864" bIns="54864" anchor="t">
+          <a:bodyPr wrap="none" lIns="54864" tIns="54864" rIns="54864" bIns="54864" anchor="t">
             <a:spAutoFit/>
           </a:bodyPr>
           <a:lstStyle/>
@@ -15578,7 +15712,7 @@
           <a:noFill/>
         </p:spPr>
         <p:txBody>
-          <a:bodyPr wrap="square" lIns="73152" rIns="36576" tIns="36576" bIns="36576">
+          <a:bodyPr wrap="square" lIns="73152" tIns="36576" rIns="36576" bIns="36576">
             <a:spAutoFit/>
           </a:bodyPr>
           <a:lstStyle/>
@@ -15674,6 +15808,7 @@
           <a:lstStyle/>
           <a:p>
             <a:pPr algn="ctr"/>
+            <a:endParaRPr/>
           </a:p>
         </p:txBody>
       </p:sp>
@@ -15694,7 +15829,7 @@
           <a:noFill/>
         </p:spPr>
         <p:txBody>
-          <a:bodyPr wrap="none" lIns="54864" rIns="54864" tIns="54864" bIns="54864" anchor="t">
+          <a:bodyPr wrap="none" lIns="54864" tIns="54864" rIns="54864" bIns="54864" anchor="t">
             <a:spAutoFit/>
           </a:bodyPr>
           <a:lstStyle/>
@@ -15729,7 +15864,7 @@
           <a:noFill/>
         </p:spPr>
         <p:txBody>
-          <a:bodyPr wrap="none" lIns="54864" rIns="54864" tIns="54864" bIns="54864" anchor="t">
+          <a:bodyPr wrap="none" lIns="54864" tIns="54864" rIns="54864" bIns="54864" anchor="t">
             <a:spAutoFit/>
           </a:bodyPr>
           <a:lstStyle/>
@@ -15792,6 +15927,7 @@
           <a:lstStyle/>
           <a:p>
             <a:pPr algn="ctr"/>
+            <a:endParaRPr/>
           </a:p>
         </p:txBody>
       </p:sp>
@@ -15812,7 +15948,7 @@
           <a:noFill/>
         </p:spPr>
         <p:txBody>
-          <a:bodyPr wrap="none" lIns="54864" rIns="54864" tIns="54864" bIns="54864" anchor="t">
+          <a:bodyPr wrap="none" lIns="54864" tIns="54864" rIns="54864" bIns="54864" anchor="t">
             <a:spAutoFit/>
           </a:bodyPr>
           <a:lstStyle/>
@@ -15847,7 +15983,7 @@
           <a:noFill/>
         </p:spPr>
         <p:txBody>
-          <a:bodyPr wrap="square" lIns="73152" rIns="36576" tIns="36576" bIns="36576">
+          <a:bodyPr wrap="square" lIns="73152" tIns="36576" rIns="36576" bIns="36576">
             <a:spAutoFit/>
           </a:bodyPr>
           <a:lstStyle/>
@@ -15943,6 +16079,7 @@
           <a:lstStyle/>
           <a:p>
             <a:pPr algn="ctr"/>
+            <a:endParaRPr/>
           </a:p>
         </p:txBody>
       </p:sp>
@@ -15963,7 +16100,7 @@
           <a:noFill/>
         </p:spPr>
         <p:txBody>
-          <a:bodyPr wrap="none" lIns="54864" rIns="54864" tIns="54864" bIns="54864" anchor="t">
+          <a:bodyPr wrap="none" lIns="54864" tIns="54864" rIns="54864" bIns="54864" anchor="t">
             <a:spAutoFit/>
           </a:bodyPr>
           <a:lstStyle/>
@@ -15998,7 +16135,7 @@
           <a:noFill/>
         </p:spPr>
         <p:txBody>
-          <a:bodyPr wrap="none" lIns="54864" rIns="54864" tIns="54864" bIns="54864" anchor="t">
+          <a:bodyPr wrap="none" lIns="54864" tIns="54864" rIns="54864" bIns="54864" anchor="t">
             <a:spAutoFit/>
           </a:bodyPr>
           <a:lstStyle/>
@@ -16036,7 +16173,7 @@
           <a:noFill/>
         </p:spPr>
         <p:txBody>
-          <a:bodyPr wrap="none" lIns="54864" rIns="54864" tIns="54864" bIns="54864" anchor="t">
+          <a:bodyPr wrap="none" lIns="54864" tIns="54864" rIns="54864" bIns="54864" anchor="t">
             <a:spAutoFit/>
           </a:bodyPr>
           <a:lstStyle/>
@@ -16096,6 +16233,7 @@
           <a:lstStyle/>
           <a:p>
             <a:pPr algn="ctr"/>
+            <a:endParaRPr/>
           </a:p>
         </p:txBody>
       </p:sp>
@@ -16116,7 +16254,7 @@
           <a:noFill/>
         </p:spPr>
         <p:txBody>
-          <a:bodyPr wrap="none" lIns="54864" rIns="54864" tIns="54864" bIns="54864" anchor="t">
+          <a:bodyPr wrap="none" lIns="54864" tIns="54864" rIns="54864" bIns="54864" anchor="t">
             <a:spAutoFit/>
           </a:bodyPr>
           <a:lstStyle/>
@@ -16151,7 +16289,7 @@
           <a:noFill/>
         </p:spPr>
         <p:txBody>
-          <a:bodyPr wrap="none" lIns="54864" rIns="54864" tIns="54864" bIns="54864" anchor="t">
+          <a:bodyPr wrap="none" lIns="54864" tIns="54864" rIns="54864" bIns="54864" anchor="t">
             <a:spAutoFit/>
           </a:bodyPr>
           <a:lstStyle/>
@@ -16221,7 +16359,7 @@
           <a:noFill/>
         </p:spPr>
         <p:txBody>
-          <a:bodyPr wrap="none" lIns="54864" rIns="54864" tIns="54864" bIns="54864" anchor="t">
+          <a:bodyPr wrap="none" lIns="54864" tIns="54864" rIns="54864" bIns="54864" anchor="t">
             <a:spAutoFit/>
           </a:bodyPr>
           <a:lstStyle/>
@@ -16256,7 +16394,7 @@
           <a:noFill/>
         </p:spPr>
         <p:txBody>
-          <a:bodyPr wrap="none" lIns="54864" rIns="54864" tIns="54864" bIns="54864" anchor="t">
+          <a:bodyPr wrap="none" lIns="54864" tIns="54864" rIns="54864" bIns="54864" anchor="t">
             <a:spAutoFit/>
           </a:bodyPr>
           <a:lstStyle/>
@@ -16326,7 +16464,7 @@
           <a:noFill/>
         </p:spPr>
         <p:txBody>
-          <a:bodyPr wrap="none" lIns="54864" rIns="54864" tIns="54864" bIns="54864" anchor="t">
+          <a:bodyPr wrap="none" lIns="54864" tIns="54864" rIns="54864" bIns="54864" anchor="t">
             <a:spAutoFit/>
           </a:bodyPr>
           <a:lstStyle/>
@@ -16361,7 +16499,7 @@
           <a:noFill/>
         </p:spPr>
         <p:txBody>
-          <a:bodyPr wrap="none" lIns="54864" rIns="54864" tIns="54864" bIns="54864" anchor="t">
+          <a:bodyPr wrap="none" lIns="54864" tIns="54864" rIns="54864" bIns="54864" anchor="t">
             <a:spAutoFit/>
           </a:bodyPr>
           <a:lstStyle/>
@@ -16431,7 +16569,7 @@
           <a:noFill/>
         </p:spPr>
         <p:txBody>
-          <a:bodyPr wrap="none" lIns="54864" rIns="54864" tIns="54864" bIns="54864" anchor="t">
+          <a:bodyPr wrap="none" lIns="54864" tIns="54864" rIns="54864" bIns="54864" anchor="t">
             <a:spAutoFit/>
           </a:bodyPr>
           <a:lstStyle/>
@@ -16466,7 +16604,7 @@
           <a:noFill/>
         </p:spPr>
         <p:txBody>
-          <a:bodyPr wrap="none" lIns="54864" rIns="54864" tIns="54864" bIns="54864" anchor="t">
+          <a:bodyPr wrap="none" lIns="54864" tIns="54864" rIns="54864" bIns="54864" anchor="t">
             <a:spAutoFit/>
           </a:bodyPr>
           <a:lstStyle/>
@@ -16536,7 +16674,7 @@
           <a:noFill/>
         </p:spPr>
         <p:txBody>
-          <a:bodyPr wrap="none" lIns="54864" rIns="54864" tIns="54864" bIns="54864" anchor="t">
+          <a:bodyPr wrap="none" lIns="54864" tIns="54864" rIns="54864" bIns="54864" anchor="t">
             <a:spAutoFit/>
           </a:bodyPr>
           <a:lstStyle/>
@@ -16571,7 +16709,7 @@
           <a:noFill/>
         </p:spPr>
         <p:txBody>
-          <a:bodyPr wrap="none" lIns="54864" rIns="54864" tIns="54864" bIns="54864" anchor="t">
+          <a:bodyPr wrap="none" lIns="54864" tIns="54864" rIns="54864" bIns="54864" anchor="t">
             <a:spAutoFit/>
           </a:bodyPr>
           <a:lstStyle/>
@@ -16641,7 +16779,7 @@
           <a:noFill/>
         </p:spPr>
         <p:txBody>
-          <a:bodyPr wrap="none" lIns="54864" rIns="54864" tIns="54864" bIns="54864" anchor="t">
+          <a:bodyPr wrap="none" lIns="54864" tIns="54864" rIns="54864" bIns="54864" anchor="t">
             <a:spAutoFit/>
           </a:bodyPr>
           <a:lstStyle/>
@@ -16676,7 +16814,7 @@
           <a:noFill/>
         </p:spPr>
         <p:txBody>
-          <a:bodyPr wrap="none" lIns="54864" rIns="54864" tIns="54864" bIns="54864" anchor="t">
+          <a:bodyPr wrap="none" lIns="54864" tIns="54864" rIns="54864" bIns="54864" anchor="t">
             <a:spAutoFit/>
           </a:bodyPr>
           <a:lstStyle/>
@@ -16703,7 +16841,7 @@
 </file>
 
 <file path=ppt/slides/slide6.xml><?xml version="1.0" encoding="utf-8"?>
-<p:sld xmlns:a="http://schemas.openxmlformats.org/drawingml/2006/main" xmlns:p="http://schemas.openxmlformats.org/presentationml/2006/main" xmlns:r="http://schemas.openxmlformats.org/officeDocument/2006/relationships">
+<p:sld xmlns:a="http://schemas.openxmlformats.org/drawingml/2006/main" xmlns:r="http://schemas.openxmlformats.org/officeDocument/2006/relationships" xmlns:p="http://schemas.openxmlformats.org/presentationml/2006/main">
   <p:cSld>
     <p:bg>
       <p:bgPr>
@@ -16719,7 +16857,14 @@
         <p:cNvGrpSpPr/>
         <p:nvPr/>
       </p:nvGrpSpPr>
-      <p:grpSpPr/>
+      <p:grpSpPr>
+        <a:xfrm>
+          <a:off x="0" y="0"/>
+          <a:ext cx="0" cy="0"/>
+          <a:chOff x="0" y="0"/>
+          <a:chExt cx="0" cy="0"/>
+        </a:xfrm>
+      </p:grpSpPr>
       <p:sp>
         <p:nvSpPr>
           <p:cNvPr id="2" name="TextBox 1"/>
@@ -16737,7 +16882,7 @@
           <a:noFill/>
         </p:spPr>
         <p:txBody>
-          <a:bodyPr wrap="none" lIns="54864" rIns="54864" tIns="54864" bIns="54864" anchor="t">
+          <a:bodyPr wrap="none" lIns="54864" tIns="54864" rIns="54864" bIns="54864" anchor="t">
             <a:spAutoFit/>
           </a:bodyPr>
           <a:lstStyle/>
@@ -16772,7 +16917,7 @@
           <a:noFill/>
         </p:spPr>
         <p:txBody>
-          <a:bodyPr wrap="none" lIns="54864" rIns="54864" tIns="54864" bIns="54864" anchor="t">
+          <a:bodyPr wrap="none" lIns="54864" tIns="54864" rIns="54864" bIns="54864" anchor="t">
             <a:spAutoFit/>
           </a:bodyPr>
           <a:lstStyle/>
@@ -16832,6 +16977,7 @@
           <a:lstStyle/>
           <a:p>
             <a:pPr algn="ctr"/>
+            <a:endParaRPr/>
           </a:p>
         </p:txBody>
       </p:sp>
@@ -16852,7 +16998,7 @@
           <a:noFill/>
         </p:spPr>
         <p:txBody>
-          <a:bodyPr wrap="none" lIns="54864" rIns="54864" tIns="54864" bIns="54864" anchor="t">
+          <a:bodyPr wrap="none" lIns="54864" tIns="54864" rIns="54864" bIns="54864" anchor="t">
             <a:spAutoFit/>
           </a:bodyPr>
           <a:lstStyle/>
@@ -16887,7 +17033,7 @@
           <a:noFill/>
         </p:spPr>
         <p:txBody>
-          <a:bodyPr wrap="square" lIns="73152" rIns="36576" tIns="36576" bIns="36576">
+          <a:bodyPr wrap="square" lIns="73152" tIns="36576" rIns="36576" bIns="36576">
             <a:spAutoFit/>
           </a:bodyPr>
           <a:lstStyle/>
@@ -16983,6 +17129,7 @@
           <a:lstStyle/>
           <a:p>
             <a:pPr algn="ctr"/>
+            <a:endParaRPr/>
           </a:p>
         </p:txBody>
       </p:sp>
@@ -17003,7 +17150,7 @@
           <a:noFill/>
         </p:spPr>
         <p:txBody>
-          <a:bodyPr wrap="none" lIns="54864" rIns="54864" tIns="54864" bIns="54864" anchor="t">
+          <a:bodyPr wrap="none" lIns="54864" tIns="54864" rIns="54864" bIns="54864" anchor="t">
             <a:spAutoFit/>
           </a:bodyPr>
           <a:lstStyle/>
@@ -17038,7 +17185,7 @@
           <a:noFill/>
         </p:spPr>
         <p:txBody>
-          <a:bodyPr wrap="none" lIns="54864" rIns="54864" tIns="54864" bIns="54864" anchor="t">
+          <a:bodyPr wrap="none" lIns="54864" tIns="54864" rIns="54864" bIns="54864" anchor="t">
             <a:spAutoFit/>
           </a:bodyPr>
           <a:lstStyle/>
@@ -17101,6 +17248,7 @@
           <a:lstStyle/>
           <a:p>
             <a:pPr algn="ctr"/>
+            <a:endParaRPr/>
           </a:p>
         </p:txBody>
       </p:sp>
@@ -17121,7 +17269,7 @@
           <a:noFill/>
         </p:spPr>
         <p:txBody>
-          <a:bodyPr wrap="none" lIns="54864" rIns="54864" tIns="54864" bIns="54864" anchor="t">
+          <a:bodyPr wrap="none" lIns="54864" tIns="54864" rIns="54864" bIns="54864" anchor="t">
             <a:spAutoFit/>
           </a:bodyPr>
           <a:lstStyle/>
@@ -17156,7 +17304,7 @@
           <a:noFill/>
         </p:spPr>
         <p:txBody>
-          <a:bodyPr wrap="square" lIns="73152" rIns="36576" tIns="36576" bIns="36576">
+          <a:bodyPr wrap="square" lIns="73152" tIns="36576" rIns="36576" bIns="36576">
             <a:spAutoFit/>
           </a:bodyPr>
           <a:lstStyle/>
@@ -17252,6 +17400,7 @@
           <a:lstStyle/>
           <a:p>
             <a:pPr algn="ctr"/>
+            <a:endParaRPr/>
           </a:p>
         </p:txBody>
       </p:sp>
@@ -17272,7 +17421,7 @@
           <a:noFill/>
         </p:spPr>
         <p:txBody>
-          <a:bodyPr wrap="none" lIns="54864" rIns="54864" tIns="54864" bIns="54864" anchor="t">
+          <a:bodyPr wrap="none" lIns="54864" tIns="54864" rIns="54864" bIns="54864" anchor="t">
             <a:spAutoFit/>
           </a:bodyPr>
           <a:lstStyle/>
@@ -17307,7 +17456,7 @@
           <a:noFill/>
         </p:spPr>
         <p:txBody>
-          <a:bodyPr wrap="none" lIns="54864" rIns="54864" tIns="54864" bIns="54864" anchor="t">
+          <a:bodyPr wrap="none" lIns="54864" tIns="54864" rIns="54864" bIns="54864" anchor="t">
             <a:spAutoFit/>
           </a:bodyPr>
           <a:lstStyle/>
@@ -17343,7 +17492,7 @@
           <a:noFill/>
         </p:spPr>
         <p:txBody>
-          <a:bodyPr wrap="none" lIns="54864" rIns="54864" tIns="54864" bIns="54864" anchor="t">
+          <a:bodyPr wrap="none" lIns="54864" tIns="54864" rIns="54864" bIns="54864" anchor="t">
             <a:spAutoFit/>
           </a:bodyPr>
           <a:lstStyle/>
@@ -17403,6 +17552,7 @@
           <a:lstStyle/>
           <a:p>
             <a:pPr algn="ctr"/>
+            <a:endParaRPr/>
           </a:p>
         </p:txBody>
       </p:sp>
@@ -17423,7 +17573,7 @@
           <a:noFill/>
         </p:spPr>
         <p:txBody>
-          <a:bodyPr wrap="none" lIns="54864" rIns="54864" tIns="54864" bIns="54864" anchor="t">
+          <a:bodyPr wrap="none" lIns="54864" tIns="54864" rIns="54864" bIns="54864" anchor="t">
             <a:spAutoFit/>
           </a:bodyPr>
           <a:lstStyle/>
@@ -17458,7 +17608,7 @@
           <a:noFill/>
         </p:spPr>
         <p:txBody>
-          <a:bodyPr wrap="none" lIns="54864" rIns="54864" tIns="54864" bIns="54864" anchor="t">
+          <a:bodyPr wrap="none" lIns="54864" tIns="54864" rIns="54864" bIns="54864" anchor="t">
             <a:spAutoFit/>
           </a:bodyPr>
           <a:lstStyle/>
@@ -17528,7 +17678,7 @@
           <a:noFill/>
         </p:spPr>
         <p:txBody>
-          <a:bodyPr wrap="none" lIns="54864" rIns="54864" tIns="54864" bIns="54864" anchor="t">
+          <a:bodyPr wrap="none" lIns="54864" tIns="54864" rIns="54864" bIns="54864" anchor="t">
             <a:spAutoFit/>
           </a:bodyPr>
           <a:lstStyle/>
@@ -17563,7 +17713,7 @@
           <a:noFill/>
         </p:spPr>
         <p:txBody>
-          <a:bodyPr wrap="none" lIns="54864" rIns="54864" tIns="54864" bIns="54864" anchor="t">
+          <a:bodyPr wrap="none" lIns="54864" tIns="54864" rIns="54864" bIns="54864" anchor="t">
             <a:spAutoFit/>
           </a:bodyPr>
           <a:lstStyle/>
@@ -17633,7 +17783,7 @@
           <a:noFill/>
         </p:spPr>
         <p:txBody>
-          <a:bodyPr wrap="none" lIns="54864" rIns="54864" tIns="54864" bIns="54864" anchor="t">
+          <a:bodyPr wrap="none" lIns="54864" tIns="54864" rIns="54864" bIns="54864" anchor="t">
             <a:spAutoFit/>
           </a:bodyPr>
           <a:lstStyle/>
@@ -17668,7 +17818,7 @@
           <a:noFill/>
         </p:spPr>
         <p:txBody>
-          <a:bodyPr wrap="none" lIns="54864" rIns="54864" tIns="54864" bIns="54864" anchor="t">
+          <a:bodyPr wrap="none" lIns="54864" tIns="54864" rIns="54864" bIns="54864" anchor="t">
             <a:spAutoFit/>
           </a:bodyPr>
           <a:lstStyle/>
@@ -17738,7 +17888,7 @@
           <a:noFill/>
         </p:spPr>
         <p:txBody>
-          <a:bodyPr wrap="none" lIns="54864" rIns="54864" tIns="54864" bIns="54864" anchor="t">
+          <a:bodyPr wrap="none" lIns="54864" tIns="54864" rIns="54864" bIns="54864" anchor="t">
             <a:spAutoFit/>
           </a:bodyPr>
           <a:lstStyle/>
@@ -17773,7 +17923,7 @@
           <a:noFill/>
         </p:spPr>
         <p:txBody>
-          <a:bodyPr wrap="none" lIns="54864" rIns="54864" tIns="54864" bIns="54864" anchor="t">
+          <a:bodyPr wrap="none" lIns="54864" tIns="54864" rIns="54864" bIns="54864" anchor="t">
             <a:spAutoFit/>
           </a:bodyPr>
           <a:lstStyle/>
@@ -17843,7 +17993,7 @@
           <a:noFill/>
         </p:spPr>
         <p:txBody>
-          <a:bodyPr wrap="none" lIns="54864" rIns="54864" tIns="54864" bIns="54864" anchor="t">
+          <a:bodyPr wrap="none" lIns="54864" tIns="54864" rIns="54864" bIns="54864" anchor="t">
             <a:spAutoFit/>
           </a:bodyPr>
           <a:lstStyle/>
@@ -17878,7 +18028,7 @@
           <a:noFill/>
         </p:spPr>
         <p:txBody>
-          <a:bodyPr wrap="none" lIns="54864" rIns="54864" tIns="54864" bIns="54864" anchor="t">
+          <a:bodyPr wrap="none" lIns="54864" tIns="54864" rIns="54864" bIns="54864" anchor="t">
             <a:spAutoFit/>
           </a:bodyPr>
           <a:lstStyle/>
@@ -17948,7 +18098,7 @@
           <a:noFill/>
         </p:spPr>
         <p:txBody>
-          <a:bodyPr wrap="none" lIns="54864" rIns="54864" tIns="54864" bIns="54864" anchor="t">
+          <a:bodyPr wrap="none" lIns="54864" tIns="54864" rIns="54864" bIns="54864" anchor="t">
             <a:spAutoFit/>
           </a:bodyPr>
           <a:lstStyle/>
@@ -17983,7 +18133,7 @@
           <a:noFill/>
         </p:spPr>
         <p:txBody>
-          <a:bodyPr wrap="none" lIns="54864" rIns="54864" tIns="54864" bIns="54864" anchor="t">
+          <a:bodyPr wrap="none" lIns="54864" tIns="54864" rIns="54864" bIns="54864" anchor="t">
             <a:spAutoFit/>
           </a:bodyPr>
           <a:lstStyle/>
@@ -18010,7 +18160,7 @@
 </file>
 
 <file path=ppt/slides/slide7.xml><?xml version="1.0" encoding="utf-8"?>
-<p:sld xmlns:a="http://schemas.openxmlformats.org/drawingml/2006/main" xmlns:p="http://schemas.openxmlformats.org/presentationml/2006/main" xmlns:r="http://schemas.openxmlformats.org/officeDocument/2006/relationships">
+<p:sld xmlns:a="http://schemas.openxmlformats.org/drawingml/2006/main" xmlns:r="http://schemas.openxmlformats.org/officeDocument/2006/relationships" xmlns:p="http://schemas.openxmlformats.org/presentationml/2006/main">
   <p:cSld>
     <p:bg>
       <p:bgPr>
@@ -18026,7 +18176,14 @@
         <p:cNvGrpSpPr/>
         <p:nvPr/>
       </p:nvGrpSpPr>
-      <p:grpSpPr/>
+      <p:grpSpPr>
+        <a:xfrm>
+          <a:off x="0" y="0"/>
+          <a:ext cx="0" cy="0"/>
+          <a:chOff x="0" y="0"/>
+          <a:chExt cx="0" cy="0"/>
+        </a:xfrm>
+      </p:grpSpPr>
       <p:sp>
         <p:nvSpPr>
           <p:cNvPr id="2" name="TextBox 1"/>
@@ -18044,7 +18201,7 @@
           <a:noFill/>
         </p:spPr>
         <p:txBody>
-          <a:bodyPr wrap="none" lIns="54864" rIns="54864" tIns="54864" bIns="54864" anchor="t">
+          <a:bodyPr wrap="none" lIns="54864" tIns="54864" rIns="54864" bIns="54864" anchor="t">
             <a:spAutoFit/>
           </a:bodyPr>
           <a:lstStyle/>
@@ -18079,7 +18236,7 @@
           <a:noFill/>
         </p:spPr>
         <p:txBody>
-          <a:bodyPr wrap="none" lIns="54864" rIns="54864" tIns="54864" bIns="54864" anchor="t">
+          <a:bodyPr wrap="none" lIns="54864" tIns="54864" rIns="54864" bIns="54864" anchor="t">
             <a:spAutoFit/>
           </a:bodyPr>
           <a:lstStyle/>
@@ -18139,6 +18296,7 @@
           <a:lstStyle/>
           <a:p>
             <a:pPr algn="ctr"/>
+            <a:endParaRPr/>
           </a:p>
         </p:txBody>
       </p:sp>
@@ -18159,7 +18317,7 @@
           <a:noFill/>
         </p:spPr>
         <p:txBody>
-          <a:bodyPr wrap="none" lIns="54864" rIns="54864" tIns="54864" bIns="54864" anchor="t">
+          <a:bodyPr wrap="none" lIns="54864" tIns="54864" rIns="54864" bIns="54864" anchor="t">
             <a:spAutoFit/>
           </a:bodyPr>
           <a:lstStyle/>
@@ -18219,6 +18377,7 @@
           <a:lstStyle/>
           <a:p>
             <a:pPr algn="ctr"/>
+            <a:endParaRPr/>
           </a:p>
         </p:txBody>
       </p:sp>
@@ -18239,7 +18398,7 @@
           <a:noFill/>
         </p:spPr>
         <p:txBody>
-          <a:bodyPr wrap="none" lIns="54864" rIns="54864" tIns="54864" bIns="54864" anchor="t">
+          <a:bodyPr wrap="none" lIns="54864" tIns="54864" rIns="54864" bIns="54864" anchor="t">
             <a:spAutoFit/>
           </a:bodyPr>
           <a:lstStyle/>
@@ -18299,6 +18458,7 @@
           <a:lstStyle/>
           <a:p>
             <a:pPr algn="ctr"/>
+            <a:endParaRPr/>
           </a:p>
         </p:txBody>
       </p:sp>
@@ -18319,7 +18479,7 @@
           <a:noFill/>
         </p:spPr>
         <p:txBody>
-          <a:bodyPr wrap="none" lIns="54864" rIns="54864" tIns="54864" bIns="54864" anchor="t">
+          <a:bodyPr wrap="none" lIns="54864" tIns="54864" rIns="54864" bIns="54864" anchor="t">
             <a:spAutoFit/>
           </a:bodyPr>
           <a:lstStyle/>
@@ -18379,6 +18539,7 @@
           <a:lstStyle/>
           <a:p>
             <a:pPr algn="ctr"/>
+            <a:endParaRPr/>
           </a:p>
         </p:txBody>
       </p:sp>
@@ -18399,7 +18560,7 @@
           <a:noFill/>
         </p:spPr>
         <p:txBody>
-          <a:bodyPr wrap="none" lIns="54864" rIns="54864" tIns="54864" bIns="54864" anchor="t">
+          <a:bodyPr wrap="none" lIns="54864" tIns="54864" rIns="54864" bIns="54864" anchor="t">
             <a:spAutoFit/>
           </a:bodyPr>
           <a:lstStyle/>
@@ -18531,6 +18692,7 @@
           <a:lstStyle/>
           <a:p>
             <a:pPr algn="ctr"/>
+            <a:endParaRPr/>
           </a:p>
         </p:txBody>
       </p:sp>
@@ -18551,7 +18713,7 @@
           <a:noFill/>
         </p:spPr>
         <p:txBody>
-          <a:bodyPr wrap="none" lIns="54864" rIns="54864" tIns="54864" bIns="54864" anchor="t">
+          <a:bodyPr wrap="none" lIns="54864" tIns="54864" rIns="54864" bIns="54864" anchor="t">
             <a:spAutoFit/>
           </a:bodyPr>
           <a:lstStyle/>
@@ -18683,6 +18845,7 @@
           <a:lstStyle/>
           <a:p>
             <a:pPr algn="ctr"/>
+            <a:endParaRPr/>
           </a:p>
         </p:txBody>
       </p:sp>
@@ -18703,7 +18866,7 @@
           <a:noFill/>
         </p:spPr>
         <p:txBody>
-          <a:bodyPr wrap="none" lIns="54864" rIns="54864" tIns="54864" bIns="54864" anchor="t">
+          <a:bodyPr wrap="none" lIns="54864" tIns="54864" rIns="54864" bIns="54864" anchor="t">
             <a:spAutoFit/>
           </a:bodyPr>
           <a:lstStyle/>
@@ -18810,7 +18973,7 @@
           <a:noFill/>
         </p:spPr>
         <p:txBody>
-          <a:bodyPr wrap="none" lIns="54864" rIns="54864" tIns="54864" bIns="54864" anchor="t">
+          <a:bodyPr wrap="none" lIns="54864" tIns="54864" rIns="54864" bIns="54864" anchor="t">
             <a:spAutoFit/>
           </a:bodyPr>
           <a:lstStyle/>
@@ -18870,6 +19033,7 @@
           <a:lstStyle/>
           <a:p>
             <a:pPr algn="ctr"/>
+            <a:endParaRPr/>
           </a:p>
         </p:txBody>
       </p:sp>
@@ -18890,7 +19054,7 @@
           <a:noFill/>
         </p:spPr>
         <p:txBody>
-          <a:bodyPr wrap="none" lIns="54864" rIns="54864" tIns="54864" bIns="54864" anchor="t">
+          <a:bodyPr wrap="none" lIns="54864" tIns="54864" rIns="54864" bIns="54864" anchor="t">
             <a:spAutoFit/>
           </a:bodyPr>
           <a:lstStyle/>
@@ -18925,7 +19089,7 @@
           <a:noFill/>
         </p:spPr>
         <p:txBody>
-          <a:bodyPr wrap="square" lIns="73152" rIns="36576" tIns="36576" bIns="36576">
+          <a:bodyPr wrap="square" lIns="73152" tIns="36576" rIns="36576" bIns="36576">
             <a:spAutoFit/>
           </a:bodyPr>
           <a:lstStyle/>
@@ -19037,6 +19201,7 @@
           <a:lstStyle/>
           <a:p>
             <a:pPr algn="ctr"/>
+            <a:endParaRPr/>
           </a:p>
         </p:txBody>
       </p:sp>
@@ -19057,7 +19222,7 @@
           <a:noFill/>
         </p:spPr>
         <p:txBody>
-          <a:bodyPr wrap="none" lIns="54864" rIns="54864" tIns="54864" bIns="54864" anchor="t">
+          <a:bodyPr wrap="none" lIns="54864" tIns="54864" rIns="54864" bIns="54864" anchor="t">
             <a:spAutoFit/>
           </a:bodyPr>
           <a:lstStyle/>
@@ -19118,6 +19283,7 @@
           <a:lstStyle/>
           <a:p>
             <a:pPr algn="ctr"/>
+            <a:endParaRPr/>
           </a:p>
         </p:txBody>
       </p:sp>
@@ -19138,7 +19304,7 @@
           <a:noFill/>
         </p:spPr>
         <p:txBody>
-          <a:bodyPr wrap="none" lIns="54864" rIns="54864" tIns="54864" bIns="54864" anchor="t">
+          <a:bodyPr wrap="none" lIns="54864" tIns="54864" rIns="54864" bIns="54864" anchor="t">
             <a:spAutoFit/>
           </a:bodyPr>
           <a:lstStyle/>
@@ -19173,7 +19339,7 @@
           <a:noFill/>
         </p:spPr>
         <p:txBody>
-          <a:bodyPr wrap="none" lIns="54864" rIns="54864" tIns="54864" bIns="54864" anchor="t">
+          <a:bodyPr wrap="none" lIns="54864" tIns="54864" rIns="54864" bIns="54864" anchor="t">
             <a:spAutoFit/>
           </a:bodyPr>
           <a:lstStyle/>
@@ -19243,7 +19409,7 @@
           <a:noFill/>
         </p:spPr>
         <p:txBody>
-          <a:bodyPr wrap="none" lIns="54864" rIns="54864" tIns="54864" bIns="54864" anchor="t">
+          <a:bodyPr wrap="none" lIns="54864" tIns="54864" rIns="54864" bIns="54864" anchor="t">
             <a:spAutoFit/>
           </a:bodyPr>
           <a:lstStyle/>
@@ -19278,7 +19444,7 @@
           <a:noFill/>
         </p:spPr>
         <p:txBody>
-          <a:bodyPr wrap="none" lIns="54864" rIns="54864" tIns="54864" bIns="54864" anchor="t">
+          <a:bodyPr wrap="none" lIns="54864" tIns="54864" rIns="54864" bIns="54864" anchor="t">
             <a:spAutoFit/>
           </a:bodyPr>
           <a:lstStyle/>
@@ -19348,7 +19514,7 @@
           <a:noFill/>
         </p:spPr>
         <p:txBody>
-          <a:bodyPr wrap="none" lIns="54864" rIns="54864" tIns="54864" bIns="54864" anchor="t">
+          <a:bodyPr wrap="none" lIns="54864" tIns="54864" rIns="54864" bIns="54864" anchor="t">
             <a:spAutoFit/>
           </a:bodyPr>
           <a:lstStyle/>
@@ -19383,7 +19549,7 @@
           <a:noFill/>
         </p:spPr>
         <p:txBody>
-          <a:bodyPr wrap="none" lIns="54864" rIns="54864" tIns="54864" bIns="54864" anchor="t">
+          <a:bodyPr wrap="none" lIns="54864" tIns="54864" rIns="54864" bIns="54864" anchor="t">
             <a:spAutoFit/>
           </a:bodyPr>
           <a:lstStyle/>
@@ -19453,7 +19619,7 @@
           <a:noFill/>
         </p:spPr>
         <p:txBody>
-          <a:bodyPr wrap="none" lIns="54864" rIns="54864" tIns="54864" bIns="54864" anchor="t">
+          <a:bodyPr wrap="none" lIns="54864" tIns="54864" rIns="54864" bIns="54864" anchor="t">
             <a:spAutoFit/>
           </a:bodyPr>
           <a:lstStyle/>
@@ -19488,7 +19654,7 @@
           <a:noFill/>
         </p:spPr>
         <p:txBody>
-          <a:bodyPr wrap="none" lIns="54864" rIns="54864" tIns="54864" bIns="54864" anchor="t">
+          <a:bodyPr wrap="none" lIns="54864" tIns="54864" rIns="54864" bIns="54864" anchor="t">
             <a:spAutoFit/>
           </a:bodyPr>
           <a:lstStyle/>
@@ -19558,7 +19724,7 @@
           <a:noFill/>
         </p:spPr>
         <p:txBody>
-          <a:bodyPr wrap="none" lIns="54864" rIns="54864" tIns="54864" bIns="54864" anchor="t">
+          <a:bodyPr wrap="none" lIns="54864" tIns="54864" rIns="54864" bIns="54864" anchor="t">
             <a:spAutoFit/>
           </a:bodyPr>
           <a:lstStyle/>
@@ -19593,7 +19759,7 @@
           <a:noFill/>
         </p:spPr>
         <p:txBody>
-          <a:bodyPr wrap="none" lIns="54864" rIns="54864" tIns="54864" bIns="54864" anchor="t">
+          <a:bodyPr wrap="none" lIns="54864" tIns="54864" rIns="54864" bIns="54864" anchor="t">
             <a:spAutoFit/>
           </a:bodyPr>
           <a:lstStyle/>
@@ -19663,7 +19829,7 @@
           <a:noFill/>
         </p:spPr>
         <p:txBody>
-          <a:bodyPr wrap="none" lIns="54864" rIns="54864" tIns="54864" bIns="54864" anchor="t">
+          <a:bodyPr wrap="none" lIns="54864" tIns="54864" rIns="54864" bIns="54864" anchor="t">
             <a:spAutoFit/>
           </a:bodyPr>
           <a:lstStyle/>
@@ -19698,7 +19864,7 @@
           <a:noFill/>
         </p:spPr>
         <p:txBody>
-          <a:bodyPr wrap="none" lIns="54864" rIns="54864" tIns="54864" bIns="54864" anchor="t">
+          <a:bodyPr wrap="none" lIns="54864" tIns="54864" rIns="54864" bIns="54864" anchor="t">
             <a:spAutoFit/>
           </a:bodyPr>
           <a:lstStyle/>
@@ -19725,7 +19891,7 @@
 </file>
 
 <file path=ppt/slides/slide8.xml><?xml version="1.0" encoding="utf-8"?>
-<p:sld xmlns:a="http://schemas.openxmlformats.org/drawingml/2006/main" xmlns:p="http://schemas.openxmlformats.org/presentationml/2006/main" xmlns:r="http://schemas.openxmlformats.org/officeDocument/2006/relationships">
+<p:sld xmlns:a="http://schemas.openxmlformats.org/drawingml/2006/main" xmlns:r="http://schemas.openxmlformats.org/officeDocument/2006/relationships" xmlns:p="http://schemas.openxmlformats.org/presentationml/2006/main">
   <p:cSld>
     <p:bg>
       <p:bgPr>
@@ -19741,7 +19907,14 @@
         <p:cNvGrpSpPr/>
         <p:nvPr/>
       </p:nvGrpSpPr>
-      <p:grpSpPr/>
+      <p:grpSpPr>
+        <a:xfrm>
+          <a:off x="0" y="0"/>
+          <a:ext cx="0" cy="0"/>
+          <a:chOff x="0" y="0"/>
+          <a:chExt cx="0" cy="0"/>
+        </a:xfrm>
+      </p:grpSpPr>
       <p:sp>
         <p:nvSpPr>
           <p:cNvPr id="2" name="TextBox 1"/>
@@ -19759,7 +19932,7 @@
           <a:noFill/>
         </p:spPr>
         <p:txBody>
-          <a:bodyPr wrap="none" lIns="54864" rIns="54864" tIns="54864" bIns="54864" anchor="t">
+          <a:bodyPr wrap="none" lIns="54864" tIns="54864" rIns="54864" bIns="54864" anchor="t">
             <a:spAutoFit/>
           </a:bodyPr>
           <a:lstStyle/>
@@ -19794,7 +19967,7 @@
           <a:noFill/>
         </p:spPr>
         <p:txBody>
-          <a:bodyPr wrap="none" lIns="54864" rIns="54864" tIns="54864" bIns="54864" anchor="t">
+          <a:bodyPr wrap="none" lIns="54864" tIns="54864" rIns="54864" bIns="54864" anchor="t">
             <a:spAutoFit/>
           </a:bodyPr>
           <a:lstStyle/>
@@ -19854,6 +20027,7 @@
           <a:lstStyle/>
           <a:p>
             <a:pPr algn="ctr"/>
+            <a:endParaRPr/>
           </a:p>
         </p:txBody>
       </p:sp>
@@ -19874,7 +20048,7 @@
           <a:noFill/>
         </p:spPr>
         <p:txBody>
-          <a:bodyPr wrap="none" lIns="54864" rIns="54864" tIns="54864" bIns="54864" anchor="t">
+          <a:bodyPr wrap="none" lIns="54864" tIns="54864" rIns="54864" bIns="54864" anchor="t">
             <a:spAutoFit/>
           </a:bodyPr>
           <a:lstStyle/>
@@ -19934,6 +20108,7 @@
           <a:lstStyle/>
           <a:p>
             <a:pPr algn="ctr"/>
+            <a:endParaRPr/>
           </a:p>
         </p:txBody>
       </p:sp>
@@ -19954,7 +20129,7 @@
           <a:noFill/>
         </p:spPr>
         <p:txBody>
-          <a:bodyPr wrap="none" lIns="54864" rIns="54864" tIns="54864" bIns="54864" anchor="t">
+          <a:bodyPr wrap="none" lIns="54864" tIns="54864" rIns="54864" bIns="54864" anchor="t">
             <a:spAutoFit/>
           </a:bodyPr>
           <a:lstStyle/>
@@ -19989,7 +20164,7 @@
           <a:noFill/>
         </p:spPr>
         <p:txBody>
-          <a:bodyPr wrap="none" lIns="54864" rIns="54864" tIns="54864" bIns="54864" anchor="t">
+          <a:bodyPr wrap="none" lIns="54864" tIns="54864" rIns="54864" bIns="54864" anchor="t">
             <a:spAutoFit/>
           </a:bodyPr>
           <a:lstStyle/>
@@ -20049,6 +20224,7 @@
           <a:lstStyle/>
           <a:p>
             <a:pPr algn="ctr"/>
+            <a:endParaRPr/>
           </a:p>
         </p:txBody>
       </p:sp>
@@ -20069,7 +20245,7 @@
           <a:noFill/>
         </p:spPr>
         <p:txBody>
-          <a:bodyPr wrap="none" lIns="54864" rIns="54864" tIns="54864" bIns="54864" anchor="t">
+          <a:bodyPr wrap="none" lIns="54864" tIns="54864" rIns="54864" bIns="54864" anchor="t">
             <a:spAutoFit/>
           </a:bodyPr>
           <a:lstStyle/>
@@ -20104,7 +20280,7 @@
           <a:noFill/>
         </p:spPr>
         <p:txBody>
-          <a:bodyPr wrap="none" lIns="54864" rIns="54864" tIns="54864" bIns="54864" anchor="t">
+          <a:bodyPr wrap="none" lIns="54864" tIns="54864" rIns="54864" bIns="54864" anchor="t">
             <a:spAutoFit/>
           </a:bodyPr>
           <a:lstStyle/>
@@ -20164,6 +20340,7 @@
           <a:lstStyle/>
           <a:p>
             <a:pPr algn="ctr"/>
+            <a:endParaRPr/>
           </a:p>
         </p:txBody>
       </p:sp>
@@ -20184,7 +20361,7 @@
           <a:noFill/>
         </p:spPr>
         <p:txBody>
-          <a:bodyPr wrap="none" lIns="54864" rIns="54864" tIns="54864" bIns="54864" anchor="t">
+          <a:bodyPr wrap="none" lIns="54864" tIns="54864" rIns="54864" bIns="54864" anchor="t">
             <a:spAutoFit/>
           </a:bodyPr>
           <a:lstStyle/>
@@ -20219,7 +20396,7 @@
           <a:noFill/>
         </p:spPr>
         <p:txBody>
-          <a:bodyPr wrap="none" lIns="54864" rIns="54864" tIns="54864" bIns="54864" anchor="t">
+          <a:bodyPr wrap="none" lIns="54864" tIns="54864" rIns="54864" bIns="54864" anchor="t">
             <a:spAutoFit/>
           </a:bodyPr>
           <a:lstStyle/>
@@ -20279,6 +20456,7 @@
           <a:lstStyle/>
           <a:p>
             <a:pPr algn="ctr"/>
+            <a:endParaRPr/>
           </a:p>
         </p:txBody>
       </p:sp>
@@ -20299,7 +20477,7 @@
           <a:noFill/>
         </p:spPr>
         <p:txBody>
-          <a:bodyPr wrap="none" lIns="54864" rIns="54864" tIns="54864" bIns="54864" anchor="t">
+          <a:bodyPr wrap="none" lIns="54864" tIns="54864" rIns="54864" bIns="54864" anchor="t">
             <a:spAutoFit/>
           </a:bodyPr>
           <a:lstStyle/>
@@ -20334,7 +20512,7 @@
           <a:noFill/>
         </p:spPr>
         <p:txBody>
-          <a:bodyPr wrap="none" lIns="54864" rIns="54864" tIns="54864" bIns="54864" anchor="t">
+          <a:bodyPr wrap="none" lIns="54864" tIns="54864" rIns="54864" bIns="54864" anchor="t">
             <a:spAutoFit/>
           </a:bodyPr>
           <a:lstStyle/>
@@ -20369,7 +20547,7 @@
           <a:noFill/>
         </p:spPr>
         <p:txBody>
-          <a:bodyPr wrap="none" lIns="54864" rIns="54864" tIns="54864" bIns="54864" anchor="t">
+          <a:bodyPr wrap="none" lIns="54864" tIns="54864" rIns="54864" bIns="54864" anchor="t">
             <a:spAutoFit/>
           </a:bodyPr>
           <a:lstStyle/>
@@ -20429,6 +20607,7 @@
           <a:lstStyle/>
           <a:p>
             <a:pPr algn="ctr"/>
+            <a:endParaRPr/>
           </a:p>
         </p:txBody>
       </p:sp>
@@ -20449,7 +20628,7 @@
           <a:noFill/>
         </p:spPr>
         <p:txBody>
-          <a:bodyPr wrap="none" lIns="54864" rIns="54864" tIns="54864" bIns="54864" anchor="t">
+          <a:bodyPr wrap="none" lIns="54864" tIns="54864" rIns="54864" bIns="54864" anchor="t">
             <a:spAutoFit/>
           </a:bodyPr>
           <a:lstStyle/>
@@ -20509,6 +20688,7 @@
           <a:lstStyle/>
           <a:p>
             <a:pPr algn="ctr"/>
+            <a:endParaRPr/>
           </a:p>
         </p:txBody>
       </p:sp>
@@ -20529,7 +20709,7 @@
           <a:noFill/>
         </p:spPr>
         <p:txBody>
-          <a:bodyPr wrap="none" lIns="54864" rIns="54864" tIns="54864" bIns="54864" anchor="t">
+          <a:bodyPr wrap="none" lIns="54864" tIns="54864" rIns="54864" bIns="54864" anchor="t">
             <a:spAutoFit/>
           </a:bodyPr>
           <a:lstStyle/>
@@ -20564,7 +20744,7 @@
           <a:noFill/>
         </p:spPr>
         <p:txBody>
-          <a:bodyPr wrap="none" lIns="54864" rIns="54864" tIns="54864" bIns="54864" anchor="t">
+          <a:bodyPr wrap="none" lIns="54864" tIns="54864" rIns="54864" bIns="54864" anchor="t">
             <a:spAutoFit/>
           </a:bodyPr>
           <a:lstStyle/>
@@ -20624,6 +20804,7 @@
           <a:lstStyle/>
           <a:p>
             <a:pPr algn="ctr"/>
+            <a:endParaRPr/>
           </a:p>
         </p:txBody>
       </p:sp>
@@ -20644,7 +20825,7 @@
           <a:noFill/>
         </p:spPr>
         <p:txBody>
-          <a:bodyPr wrap="none" lIns="54864" rIns="54864" tIns="54864" bIns="54864" anchor="t">
+          <a:bodyPr wrap="none" lIns="54864" tIns="54864" rIns="54864" bIns="54864" anchor="t">
             <a:spAutoFit/>
           </a:bodyPr>
           <a:lstStyle/>
@@ -20679,7 +20860,7 @@
           <a:noFill/>
         </p:spPr>
         <p:txBody>
-          <a:bodyPr wrap="none" lIns="54864" rIns="54864" tIns="54864" bIns="54864" anchor="t">
+          <a:bodyPr wrap="none" lIns="54864" tIns="54864" rIns="54864" bIns="54864" anchor="t">
             <a:spAutoFit/>
           </a:bodyPr>
           <a:lstStyle/>
@@ -20739,6 +20920,7 @@
           <a:lstStyle/>
           <a:p>
             <a:pPr algn="ctr"/>
+            <a:endParaRPr/>
           </a:p>
         </p:txBody>
       </p:sp>
@@ -20759,7 +20941,7 @@
           <a:noFill/>
         </p:spPr>
         <p:txBody>
-          <a:bodyPr wrap="none" lIns="54864" rIns="54864" tIns="54864" bIns="54864" anchor="t">
+          <a:bodyPr wrap="none" lIns="54864" tIns="54864" rIns="54864" bIns="54864" anchor="t">
             <a:spAutoFit/>
           </a:bodyPr>
           <a:lstStyle/>
@@ -20794,7 +20976,7 @@
           <a:noFill/>
         </p:spPr>
         <p:txBody>
-          <a:bodyPr wrap="none" lIns="54864" rIns="54864" tIns="54864" bIns="54864" anchor="t">
+          <a:bodyPr wrap="none" lIns="54864" tIns="54864" rIns="54864" bIns="54864" anchor="t">
             <a:spAutoFit/>
           </a:bodyPr>
           <a:lstStyle/>
@@ -20854,6 +21036,7 @@
           <a:lstStyle/>
           <a:p>
             <a:pPr algn="ctr"/>
+            <a:endParaRPr/>
           </a:p>
         </p:txBody>
       </p:sp>
@@ -20874,7 +21057,7 @@
           <a:noFill/>
         </p:spPr>
         <p:txBody>
-          <a:bodyPr wrap="none" lIns="54864" rIns="54864" tIns="54864" bIns="54864" anchor="t">
+          <a:bodyPr wrap="none" lIns="54864" tIns="54864" rIns="54864" bIns="54864" anchor="t">
             <a:spAutoFit/>
           </a:bodyPr>
           <a:lstStyle/>
@@ -20909,7 +21092,7 @@
           <a:noFill/>
         </p:spPr>
         <p:txBody>
-          <a:bodyPr wrap="none" lIns="54864" rIns="54864" tIns="54864" bIns="54864" anchor="t">
+          <a:bodyPr wrap="none" lIns="54864" tIns="54864" rIns="54864" bIns="54864" anchor="t">
             <a:spAutoFit/>
           </a:bodyPr>
           <a:lstStyle/>
@@ -20944,7 +21127,7 @@
           <a:noFill/>
         </p:spPr>
         <p:txBody>
-          <a:bodyPr wrap="none" lIns="54864" rIns="54864" tIns="54864" bIns="54864" anchor="t">
+          <a:bodyPr wrap="none" lIns="54864" tIns="54864" rIns="54864" bIns="54864" anchor="t">
             <a:spAutoFit/>
           </a:bodyPr>
           <a:lstStyle/>
@@ -21004,6 +21187,7 @@
           <a:lstStyle/>
           <a:p>
             <a:pPr algn="ctr"/>
+            <a:endParaRPr/>
           </a:p>
         </p:txBody>
       </p:sp>
@@ -21024,7 +21208,7 @@
           <a:noFill/>
         </p:spPr>
         <p:txBody>
-          <a:bodyPr wrap="none" lIns="54864" rIns="54864" tIns="54864" bIns="54864" anchor="t">
+          <a:bodyPr wrap="none" lIns="54864" tIns="54864" rIns="54864" bIns="54864" anchor="t">
             <a:spAutoFit/>
           </a:bodyPr>
           <a:lstStyle/>
@@ -21059,7 +21243,7 @@
           <a:noFill/>
         </p:spPr>
         <p:txBody>
-          <a:bodyPr wrap="none" lIns="54864" rIns="54864" tIns="54864" bIns="54864" anchor="t">
+          <a:bodyPr wrap="none" lIns="54864" tIns="54864" rIns="54864" bIns="54864" anchor="t">
             <a:spAutoFit/>
           </a:bodyPr>
           <a:lstStyle/>
@@ -21129,7 +21313,7 @@
           <a:noFill/>
         </p:spPr>
         <p:txBody>
-          <a:bodyPr wrap="none" lIns="54864" rIns="54864" tIns="54864" bIns="54864" anchor="t">
+          <a:bodyPr wrap="none" lIns="54864" tIns="54864" rIns="54864" bIns="54864" anchor="t">
             <a:spAutoFit/>
           </a:bodyPr>
           <a:lstStyle/>
@@ -21164,7 +21348,7 @@
           <a:noFill/>
         </p:spPr>
         <p:txBody>
-          <a:bodyPr wrap="none" lIns="54864" rIns="54864" tIns="54864" bIns="54864" anchor="t">
+          <a:bodyPr wrap="none" lIns="54864" tIns="54864" rIns="54864" bIns="54864" anchor="t">
             <a:spAutoFit/>
           </a:bodyPr>
           <a:lstStyle/>
@@ -21234,7 +21418,7 @@
           <a:noFill/>
         </p:spPr>
         <p:txBody>
-          <a:bodyPr wrap="none" lIns="54864" rIns="54864" tIns="54864" bIns="54864" anchor="t">
+          <a:bodyPr wrap="none" lIns="54864" tIns="54864" rIns="54864" bIns="54864" anchor="t">
             <a:spAutoFit/>
           </a:bodyPr>
           <a:lstStyle/>
@@ -21269,7 +21453,7 @@
           <a:noFill/>
         </p:spPr>
         <p:txBody>
-          <a:bodyPr wrap="none" lIns="54864" rIns="54864" tIns="54864" bIns="54864" anchor="t">
+          <a:bodyPr wrap="none" lIns="54864" tIns="54864" rIns="54864" bIns="54864" anchor="t">
             <a:spAutoFit/>
           </a:bodyPr>
           <a:lstStyle/>
@@ -21339,7 +21523,7 @@
           <a:noFill/>
         </p:spPr>
         <p:txBody>
-          <a:bodyPr wrap="none" lIns="54864" rIns="54864" tIns="54864" bIns="54864" anchor="t">
+          <a:bodyPr wrap="none" lIns="54864" tIns="54864" rIns="54864" bIns="54864" anchor="t">
             <a:spAutoFit/>
           </a:bodyPr>
           <a:lstStyle/>
@@ -21374,7 +21558,7 @@
           <a:noFill/>
         </p:spPr>
         <p:txBody>
-          <a:bodyPr wrap="none" lIns="54864" rIns="54864" tIns="54864" bIns="54864" anchor="t">
+          <a:bodyPr wrap="none" lIns="54864" tIns="54864" rIns="54864" bIns="54864" anchor="t">
             <a:spAutoFit/>
           </a:bodyPr>
           <a:lstStyle/>
@@ -21444,7 +21628,7 @@
           <a:noFill/>
         </p:spPr>
         <p:txBody>
-          <a:bodyPr wrap="none" lIns="54864" rIns="54864" tIns="54864" bIns="54864" anchor="t">
+          <a:bodyPr wrap="none" lIns="54864" tIns="54864" rIns="54864" bIns="54864" anchor="t">
             <a:spAutoFit/>
           </a:bodyPr>
           <a:lstStyle/>
@@ -21479,7 +21663,7 @@
           <a:noFill/>
         </p:spPr>
         <p:txBody>
-          <a:bodyPr wrap="none" lIns="54864" rIns="54864" tIns="54864" bIns="54864" anchor="t">
+          <a:bodyPr wrap="none" lIns="54864" tIns="54864" rIns="54864" bIns="54864" anchor="t">
             <a:spAutoFit/>
           </a:bodyPr>
           <a:lstStyle/>
@@ -21549,7 +21733,7 @@
           <a:noFill/>
         </p:spPr>
         <p:txBody>
-          <a:bodyPr wrap="none" lIns="54864" rIns="54864" tIns="54864" bIns="54864" anchor="t">
+          <a:bodyPr wrap="none" lIns="54864" tIns="54864" rIns="54864" bIns="54864" anchor="t">
             <a:spAutoFit/>
           </a:bodyPr>
           <a:lstStyle/>
@@ -21584,7 +21768,7 @@
           <a:noFill/>
         </p:spPr>
         <p:txBody>
-          <a:bodyPr wrap="none" lIns="54864" rIns="54864" tIns="54864" bIns="54864" anchor="t">
+          <a:bodyPr wrap="none" lIns="54864" tIns="54864" rIns="54864" bIns="54864" anchor="t">
             <a:spAutoFit/>
           </a:bodyPr>
           <a:lstStyle/>
@@ -21611,7 +21795,7 @@
 </file>
 
 <file path=ppt/slides/slide9.xml><?xml version="1.0" encoding="utf-8"?>
-<p:sld xmlns:a="http://schemas.openxmlformats.org/drawingml/2006/main" xmlns:p="http://schemas.openxmlformats.org/presentationml/2006/main" xmlns:r="http://schemas.openxmlformats.org/officeDocument/2006/relationships">
+<p:sld xmlns:a="http://schemas.openxmlformats.org/drawingml/2006/main" xmlns:r="http://schemas.openxmlformats.org/officeDocument/2006/relationships" xmlns:p="http://schemas.openxmlformats.org/presentationml/2006/main">
   <p:cSld>
     <p:bg>
       <p:bgPr>
@@ -21627,7 +21811,14 @@
         <p:cNvGrpSpPr/>
         <p:nvPr/>
       </p:nvGrpSpPr>
-      <p:grpSpPr/>
+      <p:grpSpPr>
+        <a:xfrm>
+          <a:off x="0" y="0"/>
+          <a:ext cx="0" cy="0"/>
+          <a:chOff x="0" y="0"/>
+          <a:chExt cx="0" cy="0"/>
+        </a:xfrm>
+      </p:grpSpPr>
       <p:sp>
         <p:nvSpPr>
           <p:cNvPr id="2" name="TextBox 1"/>
@@ -21645,7 +21836,7 @@
           <a:noFill/>
         </p:spPr>
         <p:txBody>
-          <a:bodyPr wrap="none" lIns="54864" rIns="54864" tIns="54864" bIns="54864" anchor="t">
+          <a:bodyPr wrap="none" lIns="54864" tIns="54864" rIns="54864" bIns="54864" anchor="t">
             <a:spAutoFit/>
           </a:bodyPr>
           <a:lstStyle/>
@@ -21680,7 +21871,7 @@
           <a:noFill/>
         </p:spPr>
         <p:txBody>
-          <a:bodyPr wrap="none" lIns="54864" rIns="54864" tIns="54864" bIns="54864" anchor="t">
+          <a:bodyPr wrap="none" lIns="54864" tIns="54864" rIns="54864" bIns="54864" anchor="t">
             <a:spAutoFit/>
           </a:bodyPr>
           <a:lstStyle/>
@@ -21740,6 +21931,7 @@
           <a:lstStyle/>
           <a:p>
             <a:pPr algn="ctr"/>
+            <a:endParaRPr/>
           </a:p>
         </p:txBody>
       </p:sp>
@@ -21785,6 +21977,7 @@
           <a:lstStyle/>
           <a:p>
             <a:pPr algn="ctr"/>
+            <a:endParaRPr/>
           </a:p>
         </p:txBody>
       </p:sp>
@@ -21805,7 +21998,7 @@
           <a:noFill/>
         </p:spPr>
         <p:txBody>
-          <a:bodyPr wrap="none" lIns="54864" rIns="54864" tIns="54864" bIns="54864" anchor="t">
+          <a:bodyPr wrap="none" lIns="54864" tIns="54864" rIns="54864" bIns="54864" anchor="t">
             <a:spAutoFit/>
           </a:bodyPr>
           <a:lstStyle/>
@@ -21840,7 +22033,7 @@
           <a:noFill/>
         </p:spPr>
         <p:txBody>
-          <a:bodyPr wrap="none" lIns="54864" rIns="54864" tIns="54864" bIns="54864" anchor="t">
+          <a:bodyPr wrap="none" lIns="54864" tIns="54864" rIns="54864" bIns="54864" anchor="t">
             <a:spAutoFit/>
           </a:bodyPr>
           <a:lstStyle/>
@@ -21900,6 +22093,7 @@
           <a:lstStyle/>
           <a:p>
             <a:pPr algn="ctr"/>
+            <a:endParaRPr/>
           </a:p>
         </p:txBody>
       </p:sp>
@@ -21920,7 +22114,7 @@
           <a:noFill/>
         </p:spPr>
         <p:txBody>
-          <a:bodyPr wrap="none" lIns="54864" rIns="54864" tIns="54864" bIns="54864" anchor="t">
+          <a:bodyPr wrap="none" lIns="54864" tIns="54864" rIns="54864" bIns="54864" anchor="t">
             <a:spAutoFit/>
           </a:bodyPr>
           <a:lstStyle/>
@@ -21955,7 +22149,7 @@
           <a:noFill/>
         </p:spPr>
         <p:txBody>
-          <a:bodyPr wrap="none" lIns="54864" rIns="54864" tIns="54864" bIns="54864" anchor="t">
+          <a:bodyPr wrap="none" lIns="54864" tIns="54864" rIns="54864" bIns="54864" anchor="t">
             <a:spAutoFit/>
           </a:bodyPr>
           <a:lstStyle/>
@@ -22015,6 +22209,7 @@
           <a:lstStyle/>
           <a:p>
             <a:pPr algn="ctr"/>
+            <a:endParaRPr/>
           </a:p>
         </p:txBody>
       </p:sp>
@@ -22035,7 +22230,7 @@
           <a:noFill/>
         </p:spPr>
         <p:txBody>
-          <a:bodyPr wrap="none" lIns="54864" rIns="54864" tIns="54864" bIns="54864" anchor="t">
+          <a:bodyPr wrap="none" lIns="54864" tIns="54864" rIns="54864" bIns="54864" anchor="t">
             <a:spAutoFit/>
           </a:bodyPr>
           <a:lstStyle/>
@@ -22070,7 +22265,7 @@
           <a:noFill/>
         </p:spPr>
         <p:txBody>
-          <a:bodyPr wrap="none" lIns="54864" rIns="54864" tIns="54864" bIns="54864" anchor="t">
+          <a:bodyPr wrap="none" lIns="54864" tIns="54864" rIns="54864" bIns="54864" anchor="t">
             <a:spAutoFit/>
           </a:bodyPr>
           <a:lstStyle/>
@@ -22130,6 +22325,7 @@
           <a:lstStyle/>
           <a:p>
             <a:pPr algn="ctr"/>
+            <a:endParaRPr/>
           </a:p>
         </p:txBody>
       </p:sp>
@@ -22150,7 +22346,7 @@
           <a:noFill/>
         </p:spPr>
         <p:txBody>
-          <a:bodyPr wrap="none" lIns="54864" rIns="54864" tIns="54864" bIns="54864" anchor="t">
+          <a:bodyPr wrap="none" lIns="54864" tIns="54864" rIns="54864" bIns="54864" anchor="t">
             <a:spAutoFit/>
           </a:bodyPr>
           <a:lstStyle/>
@@ -22185,7 +22381,7 @@
           <a:noFill/>
         </p:spPr>
         <p:txBody>
-          <a:bodyPr wrap="none" lIns="54864" rIns="54864" tIns="54864" bIns="54864" anchor="t">
+          <a:bodyPr wrap="none" lIns="54864" tIns="54864" rIns="54864" bIns="54864" anchor="t">
             <a:spAutoFit/>
           </a:bodyPr>
           <a:lstStyle/>
@@ -22255,7 +22451,7 @@
           <a:noFill/>
         </p:spPr>
         <p:txBody>
-          <a:bodyPr wrap="none" lIns="54864" rIns="54864" tIns="54864" bIns="54864" anchor="t">
+          <a:bodyPr wrap="none" lIns="54864" tIns="54864" rIns="54864" bIns="54864" anchor="t">
             <a:spAutoFit/>
           </a:bodyPr>
           <a:lstStyle/>
@@ -22325,7 +22521,7 @@
           <a:noFill/>
         </p:spPr>
         <p:txBody>
-          <a:bodyPr wrap="none" lIns="54864" rIns="54864" tIns="54864" bIns="54864" anchor="t">
+          <a:bodyPr wrap="none" lIns="54864" tIns="54864" rIns="54864" bIns="54864" anchor="t">
             <a:spAutoFit/>
           </a:bodyPr>
           <a:lstStyle/>
@@ -22396,7 +22592,7 @@
           <a:noFill/>
         </p:spPr>
         <p:txBody>
-          <a:bodyPr wrap="none" lIns="54864" rIns="54864" tIns="54864" bIns="54864" anchor="t">
+          <a:bodyPr wrap="none" lIns="54864" tIns="54864" rIns="54864" bIns="54864" anchor="t">
             <a:spAutoFit/>
           </a:bodyPr>
           <a:lstStyle/>
@@ -22456,6 +22652,7 @@
           <a:lstStyle/>
           <a:p>
             <a:pPr algn="ctr"/>
+            <a:endParaRPr/>
           </a:p>
         </p:txBody>
       </p:sp>
@@ -22476,7 +22673,7 @@
           <a:noFill/>
         </p:spPr>
         <p:txBody>
-          <a:bodyPr wrap="none" lIns="54864" rIns="54864" tIns="54864" bIns="54864" anchor="t">
+          <a:bodyPr wrap="none" lIns="54864" tIns="54864" rIns="54864" bIns="54864" anchor="t">
             <a:spAutoFit/>
           </a:bodyPr>
           <a:lstStyle/>
@@ -22511,7 +22708,7 @@
           <a:noFill/>
         </p:spPr>
         <p:txBody>
-          <a:bodyPr wrap="none" lIns="54864" rIns="54864" tIns="54864" bIns="54864" anchor="t">
+          <a:bodyPr wrap="none" lIns="54864" tIns="54864" rIns="54864" bIns="54864" anchor="t">
             <a:spAutoFit/>
           </a:bodyPr>
           <a:lstStyle/>
@@ -22547,7 +22744,7 @@
           <a:noFill/>
         </p:spPr>
         <p:txBody>
-          <a:bodyPr wrap="none" lIns="54864" rIns="54864" tIns="54864" bIns="54864" anchor="t">
+          <a:bodyPr wrap="none" lIns="54864" tIns="54864" rIns="54864" bIns="54864" anchor="t">
             <a:spAutoFit/>
           </a:bodyPr>
           <a:lstStyle/>
@@ -22607,6 +22804,7 @@
           <a:lstStyle/>
           <a:p>
             <a:pPr algn="ctr"/>
+            <a:endParaRPr/>
           </a:p>
         </p:txBody>
       </p:sp>
@@ -22627,7 +22825,7 @@
           <a:noFill/>
         </p:spPr>
         <p:txBody>
-          <a:bodyPr wrap="none" lIns="54864" rIns="54864" tIns="54864" bIns="54864" anchor="t">
+          <a:bodyPr wrap="none" lIns="54864" tIns="54864" rIns="54864" bIns="54864" anchor="t">
             <a:spAutoFit/>
           </a:bodyPr>
           <a:lstStyle/>
@@ -22662,7 +22860,7 @@
           <a:noFill/>
         </p:spPr>
         <p:txBody>
-          <a:bodyPr wrap="none" lIns="54864" rIns="54864" tIns="54864" bIns="54864" anchor="t">
+          <a:bodyPr wrap="none" lIns="54864" tIns="54864" rIns="54864" bIns="54864" anchor="t">
             <a:spAutoFit/>
           </a:bodyPr>
           <a:lstStyle/>
@@ -22732,7 +22930,7 @@
           <a:noFill/>
         </p:spPr>
         <p:txBody>
-          <a:bodyPr wrap="none" lIns="54864" rIns="54864" tIns="54864" bIns="54864" anchor="t">
+          <a:bodyPr wrap="none" lIns="54864" tIns="54864" rIns="54864" bIns="54864" anchor="t">
             <a:spAutoFit/>
           </a:bodyPr>
           <a:lstStyle/>
@@ -22767,7 +22965,7 @@
           <a:noFill/>
         </p:spPr>
         <p:txBody>
-          <a:bodyPr wrap="none" lIns="54864" rIns="54864" tIns="54864" bIns="54864" anchor="t">
+          <a:bodyPr wrap="none" lIns="54864" tIns="54864" rIns="54864" bIns="54864" anchor="t">
             <a:spAutoFit/>
           </a:bodyPr>
           <a:lstStyle/>
@@ -22837,7 +23035,7 @@
           <a:noFill/>
         </p:spPr>
         <p:txBody>
-          <a:bodyPr wrap="none" lIns="54864" rIns="54864" tIns="54864" bIns="54864" anchor="t">
+          <a:bodyPr wrap="none" lIns="54864" tIns="54864" rIns="54864" bIns="54864" anchor="t">
             <a:spAutoFit/>
           </a:bodyPr>
           <a:lstStyle/>
@@ -22872,7 +23070,7 @@
           <a:noFill/>
         </p:spPr>
         <p:txBody>
-          <a:bodyPr wrap="none" lIns="54864" rIns="54864" tIns="54864" bIns="54864" anchor="t">
+          <a:bodyPr wrap="none" lIns="54864" tIns="54864" rIns="54864" bIns="54864" anchor="t">
             <a:spAutoFit/>
           </a:bodyPr>
           <a:lstStyle/>
@@ -22942,7 +23140,7 @@
           <a:noFill/>
         </p:spPr>
         <p:txBody>
-          <a:bodyPr wrap="none" lIns="54864" rIns="54864" tIns="54864" bIns="54864" anchor="t">
+          <a:bodyPr wrap="none" lIns="54864" tIns="54864" rIns="54864" bIns="54864" anchor="t">
             <a:spAutoFit/>
           </a:bodyPr>
           <a:lstStyle/>
@@ -22977,7 +23175,7 @@
           <a:noFill/>
         </p:spPr>
         <p:txBody>
-          <a:bodyPr wrap="none" lIns="54864" rIns="54864" tIns="54864" bIns="54864" anchor="t">
+          <a:bodyPr wrap="none" lIns="54864" tIns="54864" rIns="54864" bIns="54864" anchor="t">
             <a:spAutoFit/>
           </a:bodyPr>
           <a:lstStyle/>
@@ -23047,7 +23245,7 @@
           <a:noFill/>
         </p:spPr>
         <p:txBody>
-          <a:bodyPr wrap="none" lIns="54864" rIns="54864" tIns="54864" bIns="54864" anchor="t">
+          <a:bodyPr wrap="none" lIns="54864" tIns="54864" rIns="54864" bIns="54864" anchor="t">
             <a:spAutoFit/>
           </a:bodyPr>
           <a:lstStyle/>
@@ -23082,7 +23280,7 @@
           <a:noFill/>
         </p:spPr>
         <p:txBody>
-          <a:bodyPr wrap="none" lIns="54864" rIns="54864" tIns="54864" bIns="54864" anchor="t">
+          <a:bodyPr wrap="none" lIns="54864" tIns="54864" rIns="54864" bIns="54864" anchor="t">
             <a:spAutoFit/>
           </a:bodyPr>
           <a:lstStyle/>
@@ -23152,7 +23350,7 @@
           <a:noFill/>
         </p:spPr>
         <p:txBody>
-          <a:bodyPr wrap="none" lIns="54864" rIns="54864" tIns="54864" bIns="54864" anchor="t">
+          <a:bodyPr wrap="none" lIns="54864" tIns="54864" rIns="54864" bIns="54864" anchor="t">
             <a:spAutoFit/>
           </a:bodyPr>
           <a:lstStyle/>
@@ -23187,7 +23385,7 @@
           <a:noFill/>
         </p:spPr>
         <p:txBody>
-          <a:bodyPr wrap="none" lIns="54864" rIns="54864" tIns="54864" bIns="54864" anchor="t">
+          <a:bodyPr wrap="none" lIns="54864" tIns="54864" rIns="54864" bIns="54864" anchor="t">
             <a:spAutoFit/>
           </a:bodyPr>
           <a:lstStyle/>
@@ -23531,4 +23729,10 @@
   </a:objectDefaults>
   <a:extraClrSchemeLst/>
 </a:theme>
+</file>
+
+<file path=docMetadata/LabelInfo.xml><?xml version="1.0" encoding="utf-8"?>
+<clbl:labelList xmlns:clbl="http://schemas.microsoft.com/office/2020/mipLabelMetadata">
+  <clbl:label id="{2ae551e3-0043-40f0-9a67-12d995049d50}" enabled="1" method="Standard" siteId="{97984c2b-a229-4609-8185-ae84947bc3fc}" contentBits="0" removed="0"/>
+</clbl:labelList>
 </file>
--- a/Section_03_Data_Modeling_Schema_Design_Validation/Lesson_028_Understanding_Relations/ppt/Lesson_028_Understanding_Relations.pptx
+++ b/Section_03_Data_Modeling_Schema_Design_Validation/Lesson_028_Understanding_Relations/ppt/Lesson_028_Understanding_Relations.pptx
@@ -4,6 +4,9 @@
   <p:sldMasterIdLst>
     <p:sldMasterId id="2147483648" r:id="rId1"/>
   </p:sldMasterIdLst>
+  <p:notesMasterIdLst>
+    <p:notesMasterId r:id="rId15"/>
+  </p:notesMasterIdLst>
   <p:sldIdLst>
     <p:sldId id="268" r:id="rId2"/>
     <p:sldId id="256" r:id="rId3"/>
@@ -135,6 +138,439 @@
 </p:presentation>
 </file>
 
+<file path=ppt/notesMasters/notesMaster1.xml><?xml version="1.0" encoding="utf-8"?>
+<p:notesMaster xmlns:a="http://schemas.openxmlformats.org/drawingml/2006/main" xmlns:r="http://schemas.openxmlformats.org/officeDocument/2006/relationships" xmlns:p="http://schemas.openxmlformats.org/presentationml/2006/main">
+  <p:cSld>
+    <p:bg>
+      <p:bgRef idx="1001">
+        <a:schemeClr val="bg1"/>
+      </p:bgRef>
+    </p:bg>
+    <p:spTree>
+      <p:nvGrpSpPr>
+        <p:cNvPr id="1" name=""/>
+        <p:cNvGrpSpPr/>
+        <p:nvPr/>
+      </p:nvGrpSpPr>
+      <p:grpSpPr>
+        <a:xfrm>
+          <a:off x="0" y="0"/>
+          <a:ext cx="0" cy="0"/>
+          <a:chOff x="0" y="0"/>
+          <a:chExt cx="0" cy="0"/>
+        </a:xfrm>
+      </p:grpSpPr>
+      <p:sp>
+        <p:nvSpPr>
+          <p:cNvPr id="2" name="Header Placeholder 1"/>
+          <p:cNvSpPr>
+            <a:spLocks noGrp="1"/>
+          </p:cNvSpPr>
+          <p:nvPr>
+            <p:ph type="hdr" sz="quarter"/>
+          </p:nvPr>
+        </p:nvSpPr>
+        <p:spPr>
+          <a:xfrm>
+            <a:off x="0" y="0"/>
+            <a:ext cx="2971800" cy="458788"/>
+          </a:xfrm>
+          <a:prstGeom prst="rect">
+            <a:avLst/>
+          </a:prstGeom>
+        </p:spPr>
+        <p:txBody>
+          <a:bodyPr vert="horz" lIns="91440" tIns="45720" rIns="91440" bIns="45720" rtlCol="0"/>
+          <a:lstStyle>
+            <a:lvl1pPr algn="l">
+              <a:defRPr sz="1200"/>
+            </a:lvl1pPr>
+          </a:lstStyle>
+          <a:p>
+            <a:endParaRPr lang="en-US"/>
+          </a:p>
+        </p:txBody>
+      </p:sp>
+      <p:sp>
+        <p:nvSpPr>
+          <p:cNvPr id="3" name="Date Placeholder 2"/>
+          <p:cNvSpPr>
+            <a:spLocks noGrp="1"/>
+          </p:cNvSpPr>
+          <p:nvPr>
+            <p:ph type="dt" idx="1"/>
+          </p:nvPr>
+        </p:nvSpPr>
+        <p:spPr>
+          <a:xfrm>
+            <a:off x="3884613" y="0"/>
+            <a:ext cx="2971800" cy="458788"/>
+          </a:xfrm>
+          <a:prstGeom prst="rect">
+            <a:avLst/>
+          </a:prstGeom>
+        </p:spPr>
+        <p:txBody>
+          <a:bodyPr vert="horz" lIns="91440" tIns="45720" rIns="91440" bIns="45720" rtlCol="0"/>
+          <a:lstStyle>
+            <a:lvl1pPr algn="r">
+              <a:defRPr sz="1200"/>
+            </a:lvl1pPr>
+          </a:lstStyle>
+          <a:p>
+            <a:fld id="{36025C10-8B5B-4FFB-A9C8-7E51DB31C196}" type="datetimeFigureOut">
+              <a:rPr lang="en-US" smtClean="0"/>
+              <a:t>10/6/2026</a:t>
+            </a:fld>
+            <a:endParaRPr lang="en-US"/>
+          </a:p>
+        </p:txBody>
+      </p:sp>
+      <p:sp>
+        <p:nvSpPr>
+          <p:cNvPr id="4" name="Slide Image Placeholder 3"/>
+          <p:cNvSpPr>
+            <a:spLocks noGrp="1" noRot="1" noChangeAspect="1"/>
+          </p:cNvSpPr>
+          <p:nvPr>
+            <p:ph type="sldImg" idx="2"/>
+          </p:nvPr>
+        </p:nvSpPr>
+        <p:spPr>
+          <a:xfrm>
+            <a:off x="685800" y="1143000"/>
+            <a:ext cx="5486400" cy="3086100"/>
+          </a:xfrm>
+          <a:prstGeom prst="rect">
+            <a:avLst/>
+          </a:prstGeom>
+          <a:noFill/>
+          <a:ln w="12700">
+            <a:solidFill>
+              <a:prstClr val="black"/>
+            </a:solidFill>
+          </a:ln>
+        </p:spPr>
+        <p:txBody>
+          <a:bodyPr vert="horz" lIns="91440" tIns="45720" rIns="91440" bIns="45720" rtlCol="0" anchor="ctr"/>
+          <a:lstStyle/>
+          <a:p>
+            <a:endParaRPr lang="en-US"/>
+          </a:p>
+        </p:txBody>
+      </p:sp>
+      <p:sp>
+        <p:nvSpPr>
+          <p:cNvPr id="5" name="Notes Placeholder 4"/>
+          <p:cNvSpPr>
+            <a:spLocks noGrp="1"/>
+          </p:cNvSpPr>
+          <p:nvPr>
+            <p:ph type="body" sz="quarter" idx="3"/>
+          </p:nvPr>
+        </p:nvSpPr>
+        <p:spPr>
+          <a:xfrm>
+            <a:off x="685800" y="4400550"/>
+            <a:ext cx="5486400" cy="3600450"/>
+          </a:xfrm>
+          <a:prstGeom prst="rect">
+            <a:avLst/>
+          </a:prstGeom>
+        </p:spPr>
+        <p:txBody>
+          <a:bodyPr vert="horz" lIns="91440" tIns="45720" rIns="91440" bIns="45720" rtlCol="0"/>
+          <a:lstStyle/>
+          <a:p>
+            <a:pPr lvl="0"/>
+            <a:r>
+              <a:rPr lang="en-US"/>
+              <a:t>Click to edit Master text styles</a:t>
+            </a:r>
+          </a:p>
+          <a:p>
+            <a:pPr lvl="1"/>
+            <a:r>
+              <a:rPr lang="en-US"/>
+              <a:t>Second level</a:t>
+            </a:r>
+          </a:p>
+          <a:p>
+            <a:pPr lvl="2"/>
+            <a:r>
+              <a:rPr lang="en-US"/>
+              <a:t>Third level</a:t>
+            </a:r>
+          </a:p>
+          <a:p>
+            <a:pPr lvl="3"/>
+            <a:r>
+              <a:rPr lang="en-US"/>
+              <a:t>Fourth level</a:t>
+            </a:r>
+          </a:p>
+          <a:p>
+            <a:pPr lvl="4"/>
+            <a:r>
+              <a:rPr lang="en-US"/>
+              <a:t>Fifth level</a:t>
+            </a:r>
+          </a:p>
+        </p:txBody>
+      </p:sp>
+      <p:sp>
+        <p:nvSpPr>
+          <p:cNvPr id="6" name="Footer Placeholder 5"/>
+          <p:cNvSpPr>
+            <a:spLocks noGrp="1"/>
+          </p:cNvSpPr>
+          <p:nvPr>
+            <p:ph type="ftr" sz="quarter" idx="4"/>
+          </p:nvPr>
+        </p:nvSpPr>
+        <p:spPr>
+          <a:xfrm>
+            <a:off x="0" y="8685213"/>
+            <a:ext cx="2971800" cy="458787"/>
+          </a:xfrm>
+          <a:prstGeom prst="rect">
+            <a:avLst/>
+          </a:prstGeom>
+        </p:spPr>
+        <p:txBody>
+          <a:bodyPr vert="horz" lIns="91440" tIns="45720" rIns="91440" bIns="45720" rtlCol="0" anchor="b"/>
+          <a:lstStyle>
+            <a:lvl1pPr algn="l">
+              <a:defRPr sz="1200"/>
+            </a:lvl1pPr>
+          </a:lstStyle>
+          <a:p>
+            <a:endParaRPr lang="en-US"/>
+          </a:p>
+        </p:txBody>
+      </p:sp>
+      <p:sp>
+        <p:nvSpPr>
+          <p:cNvPr id="7" name="Slide Number Placeholder 6"/>
+          <p:cNvSpPr>
+            <a:spLocks noGrp="1"/>
+          </p:cNvSpPr>
+          <p:nvPr>
+            <p:ph type="sldNum" sz="quarter" idx="5"/>
+          </p:nvPr>
+        </p:nvSpPr>
+        <p:spPr>
+          <a:xfrm>
+            <a:off x="3884613" y="8685213"/>
+            <a:ext cx="2971800" cy="458787"/>
+          </a:xfrm>
+          <a:prstGeom prst="rect">
+            <a:avLst/>
+          </a:prstGeom>
+        </p:spPr>
+        <p:txBody>
+          <a:bodyPr vert="horz" lIns="91440" tIns="45720" rIns="91440" bIns="45720" rtlCol="0" anchor="b"/>
+          <a:lstStyle>
+            <a:lvl1pPr algn="r">
+              <a:defRPr sz="1200"/>
+            </a:lvl1pPr>
+          </a:lstStyle>
+          <a:p>
+            <a:fld id="{AA0842E0-B2ED-4581-8675-E891A730DC51}" type="slidenum">
+              <a:rPr lang="en-US" smtClean="0"/>
+              <a:t>‹#›</a:t>
+            </a:fld>
+            <a:endParaRPr lang="en-US"/>
+          </a:p>
+        </p:txBody>
+      </p:sp>
+    </p:spTree>
+    <p:extLst>
+      <p:ext uri="{BB962C8B-B14F-4D97-AF65-F5344CB8AC3E}">
+        <p14:creationId xmlns:p14="http://schemas.microsoft.com/office/powerpoint/2010/main" val="3344653933"/>
+      </p:ext>
+    </p:extLst>
+  </p:cSld>
+  <p:clrMap bg1="lt1" tx1="dk1" bg2="lt2" tx2="dk2" accent1="accent1" accent2="accent2" accent3="accent3" accent4="accent4" accent5="accent5" accent6="accent6" hlink="hlink" folHlink="folHlink"/>
+  <p:notesStyle>
+    <a:lvl1pPr marL="0" algn="l" defTabSz="914400" rtl="0" eaLnBrk="1" latinLnBrk="0" hangingPunct="1">
+      <a:defRPr sz="1200" kern="1200">
+        <a:solidFill>
+          <a:schemeClr val="tx1"/>
+        </a:solidFill>
+        <a:latin typeface="+mn-lt"/>
+        <a:ea typeface="+mn-ea"/>
+        <a:cs typeface="+mn-cs"/>
+      </a:defRPr>
+    </a:lvl1pPr>
+    <a:lvl2pPr marL="457200" algn="l" defTabSz="914400" rtl="0" eaLnBrk="1" latinLnBrk="0" hangingPunct="1">
+      <a:defRPr sz="1200" kern="1200">
+        <a:solidFill>
+          <a:schemeClr val="tx1"/>
+        </a:solidFill>
+        <a:latin typeface="+mn-lt"/>
+        <a:ea typeface="+mn-ea"/>
+        <a:cs typeface="+mn-cs"/>
+      </a:defRPr>
+    </a:lvl2pPr>
+    <a:lvl3pPr marL="914400" algn="l" defTabSz="914400" rtl="0" eaLnBrk="1" latinLnBrk="0" hangingPunct="1">
+      <a:defRPr sz="1200" kern="1200">
+        <a:solidFill>
+          <a:schemeClr val="tx1"/>
+        </a:solidFill>
+        <a:latin typeface="+mn-lt"/>
+        <a:ea typeface="+mn-ea"/>
+        <a:cs typeface="+mn-cs"/>
+      </a:defRPr>
+    </a:lvl3pPr>
+    <a:lvl4pPr marL="1371600" algn="l" defTabSz="914400" rtl="0" eaLnBrk="1" latinLnBrk="0" hangingPunct="1">
+      <a:defRPr sz="1200" kern="1200">
+        <a:solidFill>
+          <a:schemeClr val="tx1"/>
+        </a:solidFill>
+        <a:latin typeface="+mn-lt"/>
+        <a:ea typeface="+mn-ea"/>
+        <a:cs typeface="+mn-cs"/>
+      </a:defRPr>
+    </a:lvl4pPr>
+    <a:lvl5pPr marL="1828800" algn="l" defTabSz="914400" rtl="0" eaLnBrk="1" latinLnBrk="0" hangingPunct="1">
+      <a:defRPr sz="1200" kern="1200">
+        <a:solidFill>
+          <a:schemeClr val="tx1"/>
+        </a:solidFill>
+        <a:latin typeface="+mn-lt"/>
+        <a:ea typeface="+mn-ea"/>
+        <a:cs typeface="+mn-cs"/>
+      </a:defRPr>
+    </a:lvl5pPr>
+    <a:lvl6pPr marL="2286000" algn="l" defTabSz="914400" rtl="0" eaLnBrk="1" latinLnBrk="0" hangingPunct="1">
+      <a:defRPr sz="1200" kern="1200">
+        <a:solidFill>
+          <a:schemeClr val="tx1"/>
+        </a:solidFill>
+        <a:latin typeface="+mn-lt"/>
+        <a:ea typeface="+mn-ea"/>
+        <a:cs typeface="+mn-cs"/>
+      </a:defRPr>
+    </a:lvl6pPr>
+    <a:lvl7pPr marL="2743200" algn="l" defTabSz="914400" rtl="0" eaLnBrk="1" latinLnBrk="0" hangingPunct="1">
+      <a:defRPr sz="1200" kern="1200">
+        <a:solidFill>
+          <a:schemeClr val="tx1"/>
+        </a:solidFill>
+        <a:latin typeface="+mn-lt"/>
+        <a:ea typeface="+mn-ea"/>
+        <a:cs typeface="+mn-cs"/>
+      </a:defRPr>
+    </a:lvl7pPr>
+    <a:lvl8pPr marL="3200400" algn="l" defTabSz="914400" rtl="0" eaLnBrk="1" latinLnBrk="0" hangingPunct="1">
+      <a:defRPr sz="1200" kern="1200">
+        <a:solidFill>
+          <a:schemeClr val="tx1"/>
+        </a:solidFill>
+        <a:latin typeface="+mn-lt"/>
+        <a:ea typeface="+mn-ea"/>
+        <a:cs typeface="+mn-cs"/>
+      </a:defRPr>
+    </a:lvl8pPr>
+    <a:lvl9pPr marL="3657600" algn="l" defTabSz="914400" rtl="0" eaLnBrk="1" latinLnBrk="0" hangingPunct="1">
+      <a:defRPr sz="1200" kern="1200">
+        <a:solidFill>
+          <a:schemeClr val="tx1"/>
+        </a:solidFill>
+        <a:latin typeface="+mn-lt"/>
+        <a:ea typeface="+mn-ea"/>
+        <a:cs typeface="+mn-cs"/>
+      </a:defRPr>
+    </a:lvl9pPr>
+  </p:notesStyle>
+</p:notesMaster>
+</file>
+
+<file path=ppt/notesSlides/notesSlide1.xml><?xml version="1.0" encoding="utf-8"?>
+<p:notes xmlns:a="http://schemas.openxmlformats.org/drawingml/2006/main" xmlns:r="http://schemas.openxmlformats.org/officeDocument/2006/relationships" xmlns:p="http://schemas.openxmlformats.org/presentationml/2006/main">
+  <p:cSld>
+    <p:spTree>
+      <p:nvGrpSpPr>
+        <p:cNvPr id="1" name=""/>
+        <p:cNvGrpSpPr/>
+        <p:nvPr/>
+      </p:nvGrpSpPr>
+      <p:grpSpPr>
+        <a:xfrm>
+          <a:off x="0" y="0"/>
+          <a:ext cx="0" cy="0"/>
+          <a:chOff x="0" y="0"/>
+          <a:chExt cx="0" cy="0"/>
+        </a:xfrm>
+      </p:grpSpPr>
+      <p:sp>
+        <p:nvSpPr>
+          <p:cNvPr id="2" name="Slide Image Placeholder 1"/>
+          <p:cNvSpPr>
+            <a:spLocks noGrp="1" noRot="1" noChangeAspect="1"/>
+          </p:cNvSpPr>
+          <p:nvPr>
+            <p:ph type="sldImg"/>
+          </p:nvPr>
+        </p:nvSpPr>
+        <p:spPr/>
+      </p:sp>
+      <p:sp>
+        <p:nvSpPr>
+          <p:cNvPr id="3" name="Notes Placeholder 2"/>
+          <p:cNvSpPr>
+            <a:spLocks noGrp="1"/>
+          </p:cNvSpPr>
+          <p:nvPr>
+            <p:ph type="body" idx="1"/>
+          </p:nvPr>
+        </p:nvSpPr>
+        <p:spPr/>
+        <p:txBody>
+          <a:bodyPr/>
+          <a:lstStyle/>
+          <a:p>
+            <a:endParaRPr lang="en-US" dirty="0"/>
+          </a:p>
+        </p:txBody>
+      </p:sp>
+      <p:sp>
+        <p:nvSpPr>
+          <p:cNvPr id="4" name="Slide Number Placeholder 3"/>
+          <p:cNvSpPr>
+            <a:spLocks noGrp="1"/>
+          </p:cNvSpPr>
+          <p:nvPr>
+            <p:ph type="sldNum" sz="quarter" idx="5"/>
+          </p:nvPr>
+        </p:nvSpPr>
+        <p:spPr/>
+        <p:txBody>
+          <a:bodyPr/>
+          <a:lstStyle/>
+          <a:p>
+            <a:fld id="{AA0842E0-B2ED-4581-8675-E891A730DC51}" type="slidenum">
+              <a:rPr lang="en-US" smtClean="0"/>
+              <a:t>4</a:t>
+            </a:fld>
+            <a:endParaRPr lang="en-US"/>
+          </a:p>
+        </p:txBody>
+      </p:sp>
+    </p:spTree>
+    <p:extLst>
+      <p:ext uri="{BB962C8B-B14F-4D97-AF65-F5344CB8AC3E}">
+        <p14:creationId xmlns:p14="http://schemas.microsoft.com/office/powerpoint/2010/main" val="2895338680"/>
+      </p:ext>
+    </p:extLst>
+  </p:cSld>
+  <p:clrMapOvr>
+    <a:masterClrMapping/>
+  </p:clrMapOvr>
+</p:notes>
+</file>
+
 <file path=ppt/slideLayouts/slideLayout1.xml><?xml version="1.0" encoding="utf-8"?>
 <p:sldLayout xmlns:a="http://schemas.openxmlformats.org/drawingml/2006/main" xmlns:r="http://schemas.openxmlformats.org/officeDocument/2006/relationships" xmlns:p="http://schemas.openxmlformats.org/presentationml/2006/main" type="title" preserve="1">
   <p:cSld name="Title Slide">
@@ -314,7 +750,7 @@
           <a:p>
             <a:fld id="{5BCAD085-E8A6-8845-BD4E-CB4CCA059FC4}" type="datetimeFigureOut">
               <a:rPr lang="en-US" smtClean="0"/>
-              <a:t>10/2/2026</a:t>
+              <a:t>10/5/2026</a:t>
             </a:fld>
             <a:endParaRPr lang="en-US"/>
           </a:p>
@@ -482,7 +918,7 @@
           <a:p>
             <a:fld id="{5BCAD085-E8A6-8845-BD4E-CB4CCA059FC4}" type="datetimeFigureOut">
               <a:rPr lang="en-US" smtClean="0"/>
-              <a:t>10/2/2026</a:t>
+              <a:t>10/5/2026</a:t>
             </a:fld>
             <a:endParaRPr lang="en-US"/>
           </a:p>
@@ -660,7 +1096,7 @@
           <a:p>
             <a:fld id="{5BCAD085-E8A6-8845-BD4E-CB4CCA059FC4}" type="datetimeFigureOut">
               <a:rPr lang="en-US" smtClean="0"/>
-              <a:t>10/2/2026</a:t>
+              <a:t>10/5/2026</a:t>
             </a:fld>
             <a:endParaRPr lang="en-US"/>
           </a:p>
@@ -828,7 +1264,7 @@
           <a:p>
             <a:fld id="{5BCAD085-E8A6-8845-BD4E-CB4CCA059FC4}" type="datetimeFigureOut">
               <a:rPr lang="en-US" smtClean="0"/>
-              <a:t>10/2/2026</a:t>
+              <a:t>10/5/2026</a:t>
             </a:fld>
             <a:endParaRPr lang="en-US"/>
           </a:p>
@@ -1073,7 +1509,7 @@
           <a:p>
             <a:fld id="{5BCAD085-E8A6-8845-BD4E-CB4CCA059FC4}" type="datetimeFigureOut">
               <a:rPr lang="en-US" smtClean="0"/>
-              <a:t>10/2/2026</a:t>
+              <a:t>10/5/2026</a:t>
             </a:fld>
             <a:endParaRPr lang="en-US"/>
           </a:p>
@@ -1358,7 +1794,7 @@
           <a:p>
             <a:fld id="{5BCAD085-E8A6-8845-BD4E-CB4CCA059FC4}" type="datetimeFigureOut">
               <a:rPr lang="en-US" smtClean="0"/>
-              <a:t>10/2/2026</a:t>
+              <a:t>10/5/2026</a:t>
             </a:fld>
             <a:endParaRPr lang="en-US"/>
           </a:p>
@@ -1777,7 +2213,7 @@
           <a:p>
             <a:fld id="{5BCAD085-E8A6-8845-BD4E-CB4CCA059FC4}" type="datetimeFigureOut">
               <a:rPr lang="en-US" smtClean="0"/>
-              <a:t>10/2/2026</a:t>
+              <a:t>10/5/2026</a:t>
             </a:fld>
             <a:endParaRPr lang="en-US"/>
           </a:p>
@@ -1894,7 +2330,7 @@
           <a:p>
             <a:fld id="{5BCAD085-E8A6-8845-BD4E-CB4CCA059FC4}" type="datetimeFigureOut">
               <a:rPr lang="en-US" smtClean="0"/>
-              <a:t>10/2/2026</a:t>
+              <a:t>10/5/2026</a:t>
             </a:fld>
             <a:endParaRPr lang="en-US"/>
           </a:p>
@@ -1989,7 +2425,7 @@
           <a:p>
             <a:fld id="{5BCAD085-E8A6-8845-BD4E-CB4CCA059FC4}" type="datetimeFigureOut">
               <a:rPr lang="en-US" smtClean="0"/>
-              <a:t>10/2/2026</a:t>
+              <a:t>10/5/2026</a:t>
             </a:fld>
             <a:endParaRPr lang="en-US"/>
           </a:p>
@@ -2264,7 +2700,7 @@
           <a:p>
             <a:fld id="{5BCAD085-E8A6-8845-BD4E-CB4CCA059FC4}" type="datetimeFigureOut">
               <a:rPr lang="en-US" smtClean="0"/>
-              <a:t>10/2/2026</a:t>
+              <a:t>10/5/2026</a:t>
             </a:fld>
             <a:endParaRPr lang="en-US"/>
           </a:p>
@@ -2516,7 +2952,7 @@
           <a:p>
             <a:fld id="{5BCAD085-E8A6-8845-BD4E-CB4CCA059FC4}" type="datetimeFigureOut">
               <a:rPr lang="en-US" smtClean="0"/>
-              <a:t>10/2/2026</a:t>
+              <a:t>10/5/2026</a:t>
             </a:fld>
             <a:endParaRPr lang="en-US"/>
           </a:p>
@@ -2727,7 +3163,7 @@
           <a:p>
             <a:fld id="{5BCAD085-E8A6-8845-BD4E-CB4CCA059FC4}" type="datetimeFigureOut">
               <a:rPr lang="en-US" smtClean="0"/>
-              <a:t>10/2/2026</a:t>
+              <a:t>10/5/2026</a:t>
             </a:fld>
             <a:endParaRPr lang="en-US"/>
           </a:p>
@@ -6002,8 +6438,8 @@
         </p:nvSpPr>
         <p:spPr>
           <a:xfrm>
-            <a:off x="502920" y="1874519"/>
-            <a:ext cx="2057400" cy="2011680"/>
+            <a:off x="292608" y="1874519"/>
+            <a:ext cx="2267712" cy="2011680"/>
           </a:xfrm>
           <a:prstGeom prst="roundRect">
             <a:avLst/>
@@ -6118,23 +6554,23 @@
         </p:nvSpPr>
         <p:spPr>
           <a:xfrm>
-            <a:off x="685800" y="2542032"/>
-            <a:ext cx="1691640" cy="914400"/>
-          </a:xfrm>
-          <a:prstGeom prst="rect">
-            <a:avLst/>
-          </a:prstGeom>
-          <a:noFill/>
-        </p:spPr>
-        <p:txBody>
-          <a:bodyPr wrap="none" lIns="54864" tIns="54864" rIns="54864" bIns="54864" anchor="ctr">
+            <a:off x="594360" y="2743777"/>
+            <a:ext cx="1783080" cy="510909"/>
+          </a:xfrm>
+          <a:prstGeom prst="rect">
+            <a:avLst/>
+          </a:prstGeom>
+          <a:noFill/>
+        </p:spPr>
+        <p:txBody>
+          <a:bodyPr wrap="square" lIns="54864" tIns="54864" rIns="54864" bIns="54864" anchor="ctr">
             <a:spAutoFit/>
           </a:bodyPr>
           <a:lstStyle/>
           <a:p>
             <a:pPr algn="ctr"/>
             <a:r>
-              <a:rPr sz="1300" b="0">
+              <a:rPr sz="1300" b="0" dirty="0">
                 <a:solidFill>
                   <a:srgbClr val="C2CAD3"/>
                 </a:solidFill>
@@ -6320,7 +6756,7 @@
           <a:p>
             <a:pPr algn="ctr"/>
             <a:r>
-              <a:rPr sz="1300" b="0">
+              <a:rPr sz="1300" b="0" dirty="0">
                 <a:solidFill>
                   <a:srgbClr val="C2CAD3"/>
                 </a:solidFill>
@@ -6490,23 +6926,23 @@
         </p:nvSpPr>
         <p:spPr>
           <a:xfrm>
-            <a:off x="5623560" y="2542032"/>
-            <a:ext cx="1691640" cy="914400"/>
-          </a:xfrm>
-          <a:prstGeom prst="rect">
-            <a:avLst/>
-          </a:prstGeom>
-          <a:noFill/>
-        </p:spPr>
-        <p:txBody>
-          <a:bodyPr wrap="none" lIns="54864" tIns="54864" rIns="54864" bIns="54864" anchor="ctr">
+            <a:off x="5577840" y="2743777"/>
+            <a:ext cx="1737360" cy="510909"/>
+          </a:xfrm>
+          <a:prstGeom prst="rect">
+            <a:avLst/>
+          </a:prstGeom>
+          <a:noFill/>
+        </p:spPr>
+        <p:txBody>
+          <a:bodyPr wrap="square" lIns="54864" tIns="54864" rIns="54864" bIns="54864" anchor="ctr">
             <a:spAutoFit/>
           </a:bodyPr>
           <a:lstStyle/>
           <a:p>
             <a:pPr algn="ctr"/>
             <a:r>
-              <a:rPr sz="1300" b="0">
+              <a:rPr sz="1300" b="0" dirty="0">
                 <a:solidFill>
                   <a:srgbClr val="C2CAD3"/>
                 </a:solidFill>
@@ -6676,23 +7112,23 @@
         </p:nvSpPr>
         <p:spPr>
           <a:xfrm>
-            <a:off x="8092440" y="2542032"/>
-            <a:ext cx="1691640" cy="914400"/>
-          </a:xfrm>
-          <a:prstGeom prst="rect">
-            <a:avLst/>
-          </a:prstGeom>
-          <a:noFill/>
-        </p:spPr>
-        <p:txBody>
-          <a:bodyPr wrap="none" lIns="54864" tIns="54864" rIns="54864" bIns="54864" anchor="ctr">
+            <a:off x="8366760" y="2643750"/>
+            <a:ext cx="1417320" cy="710964"/>
+          </a:xfrm>
+          <a:prstGeom prst="rect">
+            <a:avLst/>
+          </a:prstGeom>
+          <a:noFill/>
+        </p:spPr>
+        <p:txBody>
+          <a:bodyPr wrap="square" lIns="54864" tIns="54864" rIns="54864" bIns="54864" anchor="ctr">
             <a:spAutoFit/>
           </a:bodyPr>
           <a:lstStyle/>
           <a:p>
             <a:pPr algn="ctr"/>
             <a:r>
-              <a:rPr sz="1300" b="0">
+              <a:rPr sz="1300" b="0" dirty="0">
                 <a:solidFill>
                   <a:srgbClr val="C2CAD3"/>
                 </a:solidFill>
@@ -6862,23 +7298,23 @@
         </p:nvSpPr>
         <p:spPr>
           <a:xfrm>
-            <a:off x="10515600" y="2542032"/>
-            <a:ext cx="1371600" cy="914400"/>
-          </a:xfrm>
-          <a:prstGeom prst="rect">
-            <a:avLst/>
-          </a:prstGeom>
-          <a:noFill/>
-        </p:spPr>
-        <p:txBody>
-          <a:bodyPr wrap="none" lIns="54864" tIns="54864" rIns="54864" bIns="54864" anchor="ctr">
+            <a:off x="10908792" y="2594582"/>
+            <a:ext cx="978408" cy="911019"/>
+          </a:xfrm>
+          <a:prstGeom prst="rect">
+            <a:avLst/>
+          </a:prstGeom>
+          <a:noFill/>
+        </p:spPr>
+        <p:txBody>
+          <a:bodyPr wrap="square" lIns="54864" tIns="54864" rIns="54864" bIns="54864" anchor="ctr">
             <a:spAutoFit/>
           </a:bodyPr>
           <a:lstStyle/>
           <a:p>
             <a:pPr algn="ctr"/>
             <a:r>
-              <a:rPr sz="1300" b="0">
+              <a:rPr sz="1300" b="0" dirty="0">
                 <a:solidFill>
                   <a:srgbClr val="C2CAD3"/>
                 </a:solidFill>
@@ -9458,7 +9894,7 @@
         </p:nvSpPr>
         <p:spPr>
           <a:xfrm>
-            <a:off x="2880360" y="1938528"/>
+            <a:off x="3140506" y="2173986"/>
             <a:ext cx="416051" cy="267462"/>
           </a:xfrm>
           <a:prstGeom prst="rect">
@@ -9497,13 +9933,15 @@
       <p:cxnSp>
         <p:nvCxnSpPr>
           <p:cNvPr id="7" name="Connector 6"/>
-          <p:cNvCxnSpPr/>
+          <p:cNvCxnSpPr>
+            <a:cxnSpLocks/>
+          </p:cNvCxnSpPr>
           <p:nvPr/>
         </p:nvCxnSpPr>
         <p:spPr>
           <a:xfrm>
-            <a:off x="2893161" y="1892807"/>
-            <a:ext cx="448056" cy="0"/>
+            <a:off x="3076040" y="1929385"/>
+            <a:ext cx="382220" cy="338327"/>
           </a:xfrm>
           <a:prstGeom prst="line">
             <a:avLst/>
@@ -11076,8 +11514,8 @@
         </p:nvSpPr>
         <p:spPr>
           <a:xfrm>
-            <a:off x="411480" y="1216152"/>
-            <a:ext cx="2926080" cy="402336"/>
+            <a:off x="411480" y="1225296"/>
+            <a:ext cx="3200400" cy="393192"/>
           </a:xfrm>
           <a:prstGeom prst="roundRect">
             <a:avLst/>
@@ -11157,23 +11595,32 @@
         </p:nvSpPr>
         <p:spPr>
           <a:xfrm>
-            <a:off x="850392" y="1234440"/>
-            <a:ext cx="2395728" cy="310896"/>
-          </a:xfrm>
-          <a:prstGeom prst="rect">
-            <a:avLst/>
-          </a:prstGeom>
-          <a:noFill/>
-        </p:spPr>
-        <p:txBody>
-          <a:bodyPr wrap="none" lIns="54864" tIns="54864" rIns="54864" bIns="54864" anchor="ctr">
+            <a:off x="658368" y="1216152"/>
+            <a:ext cx="2953512" cy="341632"/>
+          </a:xfrm>
+          <a:prstGeom prst="rect">
+            <a:avLst/>
+          </a:prstGeom>
+          <a:noFill/>
+        </p:spPr>
+        <p:txBody>
+          <a:bodyPr wrap="square" lIns="54864" tIns="54864" rIns="54864" bIns="54864" anchor="ctr">
             <a:spAutoFit/>
           </a:bodyPr>
           <a:lstStyle/>
           <a:p>
             <a:pPr algn="l"/>
             <a:r>
-              <a:rPr sz="1500" b="1">
+              <a:rPr lang="en-US" sz="1500" b="1" dirty="0">
+                <a:solidFill>
+                  <a:srgbClr val="FF9A12"/>
+                </a:solidFill>
+                <a:latin typeface="Aptos"/>
+              </a:rPr>
+              <a:t>.</a:t>
+            </a:r>
+            <a:r>
+              <a:rPr sz="1500" b="1" dirty="0">
                 <a:solidFill>
                   <a:srgbClr val="FF9A12"/>
                 </a:solidFill>
@@ -12024,7 +12471,7 @@
         </p:nvSpPr>
         <p:spPr>
           <a:xfrm>
-            <a:off x="548640" y="3703320"/>
+            <a:off x="713232" y="3703320"/>
             <a:ext cx="10287000" cy="1325880"/>
           </a:xfrm>
           <a:prstGeom prst="roundRect">
@@ -12105,8 +12552,8 @@
         </p:nvSpPr>
         <p:spPr>
           <a:xfrm>
-            <a:off x="2743200" y="3904487"/>
-            <a:ext cx="1737360" cy="841248"/>
+            <a:off x="2816352" y="4242816"/>
+            <a:ext cx="1737360" cy="722375"/>
           </a:xfrm>
           <a:prstGeom prst="roundRect">
             <a:avLst/>
@@ -12151,8 +12598,8 @@
         </p:nvSpPr>
         <p:spPr>
           <a:xfrm>
-            <a:off x="2816352" y="4023360"/>
-            <a:ext cx="274320" cy="256032"/>
+            <a:off x="2994487" y="3913632"/>
+            <a:ext cx="219804" cy="603242"/>
           </a:xfrm>
           <a:prstGeom prst="rect">
             <a:avLst/>
@@ -12166,8 +12613,17 @@
           <a:lstStyle/>
           <a:p>
             <a:pPr algn="ctr"/>
-            <a:r>
-              <a:rPr sz="1600" b="1">
+            <a:endParaRPr lang="en-US" sz="1600" b="1" dirty="0">
+              <a:solidFill>
+                <a:srgbClr val="FF9A12"/>
+              </a:solidFill>
+              <a:latin typeface="Aptos"/>
+            </a:endParaRPr>
+          </a:p>
+          <a:p>
+            <a:pPr algn="ctr"/>
+            <a:r>
+              <a:rPr sz="1600" b="1" dirty="0">
                 <a:solidFill>
                   <a:srgbClr val="FF9A12"/>
                 </a:solidFill>
@@ -12186,8 +12642,8 @@
         </p:nvSpPr>
         <p:spPr>
           <a:xfrm>
-            <a:off x="3127248" y="3986784"/>
-            <a:ext cx="1234440" cy="320040"/>
+            <a:off x="3214291" y="3986784"/>
+            <a:ext cx="1060354" cy="541687"/>
           </a:xfrm>
           <a:prstGeom prst="rect">
             <a:avLst/>
@@ -12201,8 +12657,17 @@
           <a:lstStyle/>
           <a:p>
             <a:pPr algn="ctr"/>
-            <a:r>
-              <a:rPr sz="1400" b="1">
+            <a:endParaRPr lang="en-US" sz="1400" b="1" dirty="0">
+              <a:solidFill>
+                <a:srgbClr val="F5F7FA"/>
+              </a:solidFill>
+              <a:latin typeface="Aptos"/>
+            </a:endParaRPr>
+          </a:p>
+          <a:p>
+            <a:pPr algn="ctr"/>
+            <a:r>
+              <a:rPr sz="1400" b="1" dirty="0">
                 <a:solidFill>
                   <a:srgbClr val="F5F7FA"/>
                 </a:solidFill>
@@ -12221,8 +12686,8 @@
         </p:nvSpPr>
         <p:spPr>
           <a:xfrm>
-            <a:off x="4800600" y="3904487"/>
-            <a:ext cx="1737360" cy="841248"/>
+            <a:off x="5330952" y="4096511"/>
+            <a:ext cx="1225296" cy="932689"/>
           </a:xfrm>
           <a:prstGeom prst="roundRect">
             <a:avLst/>
@@ -12267,7 +12732,7 @@
         </p:nvSpPr>
         <p:spPr>
           <a:xfrm>
-            <a:off x="4873752" y="4023360"/>
+            <a:off x="5330952" y="3986784"/>
             <a:ext cx="274320" cy="256032"/>
           </a:xfrm>
           <a:prstGeom prst="rect">
@@ -12283,7 +12748,7 @@
           <a:p>
             <a:pPr algn="ctr"/>
             <a:r>
-              <a:rPr sz="1600" b="1">
+              <a:rPr sz="1600" b="1" dirty="0">
                 <a:solidFill>
                   <a:srgbClr val="FF9A12"/>
                 </a:solidFill>
@@ -12302,23 +12767,23 @@
         </p:nvSpPr>
         <p:spPr>
           <a:xfrm>
-            <a:off x="5184648" y="3986784"/>
-            <a:ext cx="1234440" cy="320040"/>
-          </a:xfrm>
-          <a:prstGeom prst="rect">
-            <a:avLst/>
-          </a:prstGeom>
-          <a:noFill/>
-        </p:spPr>
-        <p:txBody>
-          <a:bodyPr wrap="none" lIns="54864" tIns="54864" rIns="54864" bIns="54864" anchor="t">
+            <a:off x="5422392" y="3986784"/>
+            <a:ext cx="996696" cy="326243"/>
+          </a:xfrm>
+          <a:prstGeom prst="rect">
+            <a:avLst/>
+          </a:prstGeom>
+          <a:noFill/>
+        </p:spPr>
+        <p:txBody>
+          <a:bodyPr wrap="square" lIns="54864" tIns="54864" rIns="54864" bIns="54864" anchor="t">
             <a:spAutoFit/>
           </a:bodyPr>
           <a:lstStyle/>
           <a:p>
             <a:pPr algn="ctr"/>
             <a:r>
-              <a:rPr sz="1400" b="1">
+              <a:rPr lang="en-US" sz="1400" b="1" dirty="0">
                 <a:solidFill>
                   <a:srgbClr val="F5F7FA"/>
                 </a:solidFill>
@@ -12326,6 +12791,12 @@
               </a:rPr>
               <a:t>How big?</a:t>
             </a:r>
+            <a:endParaRPr sz="1400" b="1" dirty="0">
+              <a:solidFill>
+                <a:srgbClr val="F5F7FA"/>
+              </a:solidFill>
+              <a:latin typeface="Aptos"/>
+            </a:endParaRPr>
           </a:p>
         </p:txBody>
       </p:sp>
@@ -12337,7 +12808,7 @@
         </p:nvSpPr>
         <p:spPr>
           <a:xfrm>
-            <a:off x="6858000" y="3904487"/>
+            <a:off x="6812280" y="4096511"/>
             <a:ext cx="1737360" cy="841248"/>
           </a:xfrm>
           <a:prstGeom prst="roundRect">
@@ -12383,7 +12854,7 @@
         </p:nvSpPr>
         <p:spPr>
           <a:xfrm>
-            <a:off x="6931152" y="4023360"/>
+            <a:off x="7068312" y="3986784"/>
             <a:ext cx="274320" cy="256032"/>
           </a:xfrm>
           <a:prstGeom prst="rect">
@@ -12399,7 +12870,7 @@
           <a:p>
             <a:pPr algn="ctr"/>
             <a:r>
-              <a:rPr sz="1600" b="1">
+              <a:rPr sz="1600" b="1" dirty="0">
                 <a:solidFill>
                   <a:srgbClr val="FF9A12"/>
                 </a:solidFill>
@@ -12453,7 +12924,7 @@
         </p:nvSpPr>
         <p:spPr>
           <a:xfrm>
-            <a:off x="8915400" y="3904487"/>
+            <a:off x="8924544" y="4048411"/>
             <a:ext cx="1737360" cy="841248"/>
           </a:xfrm>
           <a:prstGeom prst="roundRect">
@@ -12499,7 +12970,7 @@
         </p:nvSpPr>
         <p:spPr>
           <a:xfrm>
-            <a:off x="8988552" y="4023360"/>
+            <a:off x="8988552" y="3931920"/>
             <a:ext cx="274320" cy="256032"/>
           </a:xfrm>
           <a:prstGeom prst="rect">
@@ -12515,7 +12986,7 @@
           <a:p>
             <a:pPr algn="ctr"/>
             <a:r>
-              <a:rPr sz="1600" b="1">
+              <a:rPr sz="1600" b="1" dirty="0">
                 <a:solidFill>
                   <a:srgbClr val="FF9A12"/>
                 </a:solidFill>
@@ -12534,7 +13005,7 @@
         </p:nvSpPr>
         <p:spPr>
           <a:xfrm>
-            <a:off x="9299448" y="3986784"/>
+            <a:off x="9299448" y="4048411"/>
             <a:ext cx="1234440" cy="320040"/>
           </a:xfrm>
           <a:prstGeom prst="rect">
@@ -12550,7 +13021,7 @@
           <a:p>
             <a:pPr algn="ctr"/>
             <a:r>
-              <a:rPr sz="1400" b="1">
+              <a:rPr sz="1400" b="1" dirty="0">
                 <a:solidFill>
                   <a:srgbClr val="F5F7FA"/>
                 </a:solidFill>
@@ -13121,7 +13592,7 @@
           <a:p>
             <a:pPr algn="l"/>
             <a:r>
-              <a:rPr sz="950" b="0">
+              <a:rPr sz="950" b="0" dirty="0">
                 <a:solidFill>
                   <a:srgbClr val="C2CAD3"/>
                 </a:solidFill>
@@ -13226,7 +13697,7 @@
           <a:p>
             <a:pPr algn="l"/>
             <a:r>
-              <a:rPr sz="950" b="0">
+              <a:rPr sz="950" b="0" dirty="0">
                 <a:solidFill>
                   <a:srgbClr val="C2CAD3"/>
                 </a:solidFill>
@@ -14546,7 +15017,7 @@
           <a:p>
             <a:pPr algn="ctr"/>
             <a:r>
-              <a:rPr sz="1200" b="1">
+              <a:rPr sz="1200" b="1" dirty="0">
                 <a:solidFill>
                   <a:srgbClr val="FF9A12"/>
                 </a:solidFill>
@@ -14859,7 +15330,7 @@
           <a:p>
             <a:pPr algn="ctr"/>
             <a:r>
-              <a:rPr sz="1300" b="1">
+              <a:rPr sz="1300" b="1" dirty="0">
                 <a:solidFill>
                   <a:srgbClr val="F5F7FA"/>
                 </a:solidFill>
@@ -15185,7 +15656,7 @@
           <a:p>
             <a:pPr algn="l"/>
             <a:r>
-              <a:rPr sz="950" b="0">
+              <a:rPr sz="950" b="0" dirty="0">
                 <a:solidFill>
                   <a:srgbClr val="C2CAD3"/>
                 </a:solidFill>
@@ -15290,7 +15761,7 @@
           <a:p>
             <a:pPr algn="l"/>
             <a:r>
-              <a:rPr sz="950" b="0">
+              <a:rPr sz="950" b="0" dirty="0">
                 <a:solidFill>
                   <a:srgbClr val="C2CAD3"/>
                 </a:solidFill>
@@ -23731,8 +24202,323 @@
 </a:theme>
 </file>
 
+<file path=ppt/theme/theme2.xml><?xml version="1.0" encoding="utf-8"?>
+<a:theme xmlns:a="http://schemas.openxmlformats.org/drawingml/2006/main" name="Office Theme">
+  <a:themeElements>
+    <a:clrScheme name="Office">
+      <a:dk1>
+        <a:sysClr val="windowText" lastClr="000000"/>
+      </a:dk1>
+      <a:lt1>
+        <a:sysClr val="window" lastClr="FFFFFF"/>
+      </a:lt1>
+      <a:dk2>
+        <a:srgbClr val="0E2841"/>
+      </a:dk2>
+      <a:lt2>
+        <a:srgbClr val="E8E8E8"/>
+      </a:lt2>
+      <a:accent1>
+        <a:srgbClr val="156082"/>
+      </a:accent1>
+      <a:accent2>
+        <a:srgbClr val="E97132"/>
+      </a:accent2>
+      <a:accent3>
+        <a:srgbClr val="196B24"/>
+      </a:accent3>
+      <a:accent4>
+        <a:srgbClr val="0F9ED5"/>
+      </a:accent4>
+      <a:accent5>
+        <a:srgbClr val="A02B93"/>
+      </a:accent5>
+      <a:accent6>
+        <a:srgbClr val="4EA72E"/>
+      </a:accent6>
+      <a:hlink>
+        <a:srgbClr val="467886"/>
+      </a:hlink>
+      <a:folHlink>
+        <a:srgbClr val="96607D"/>
+      </a:folHlink>
+    </a:clrScheme>
+    <a:fontScheme name="Office">
+      <a:majorFont>
+        <a:latin typeface="Aptos Display" panose="02110004020202020204"/>
+        <a:ea typeface=""/>
+        <a:cs typeface=""/>
+        <a:font script="Jpan" typeface="游ゴシック Light"/>
+        <a:font script="Hang" typeface="맑은 고딕"/>
+        <a:font script="Hans" typeface="等线 Light"/>
+        <a:font script="Hant" typeface="新細明體"/>
+        <a:font script="Arab" typeface="Times New Roman"/>
+        <a:font script="Hebr" typeface="Times New Roman"/>
+        <a:font script="Thai" typeface="Angsana New"/>
+        <a:font script="Ethi" typeface="Nyala"/>
+        <a:font script="Beng" typeface="Vrinda"/>
+        <a:font script="Gujr" typeface="Shruti"/>
+        <a:font script="Khmr" typeface="MoolBoran"/>
+        <a:font script="Knda" typeface="Tunga"/>
+        <a:font script="Guru" typeface="Raavi"/>
+        <a:font script="Cans" typeface="Euphemia"/>
+        <a:font script="Cher" typeface="Plantagenet Cherokee"/>
+        <a:font script="Yiii" typeface="Microsoft Yi Baiti"/>
+        <a:font script="Tibt" typeface="Microsoft Himalaya"/>
+        <a:font script="Thaa" typeface="MV Boli"/>
+        <a:font script="Deva" typeface="Mangal"/>
+        <a:font script="Telu" typeface="Gautami"/>
+        <a:font script="Taml" typeface="Latha"/>
+        <a:font script="Syrc" typeface="Estrangelo Edessa"/>
+        <a:font script="Orya" typeface="Kalinga"/>
+        <a:font script="Mlym" typeface="Kartika"/>
+        <a:font script="Laoo" typeface="DokChampa"/>
+        <a:font script="Sinh" typeface="Iskoola Pota"/>
+        <a:font script="Mong" typeface="Mongolian Baiti"/>
+        <a:font script="Viet" typeface="Times New Roman"/>
+        <a:font script="Uigh" typeface="Microsoft Uighur"/>
+        <a:font script="Geor" typeface="Sylfaen"/>
+        <a:font script="Armn" typeface="Arial"/>
+        <a:font script="Bugi" typeface="Leelawadee UI"/>
+        <a:font script="Bopo" typeface="Microsoft JhengHei"/>
+        <a:font script="Java" typeface="Javanese Text"/>
+        <a:font script="Lisu" typeface="Segoe UI"/>
+        <a:font script="Mymr" typeface="Myanmar Text"/>
+        <a:font script="Nkoo" typeface="Ebrima"/>
+        <a:font script="Olck" typeface="Nirmala UI"/>
+        <a:font script="Osma" typeface="Ebrima"/>
+        <a:font script="Phag" typeface="Phagspa"/>
+        <a:font script="Syrn" typeface="Estrangelo Edessa"/>
+        <a:font script="Syrj" typeface="Estrangelo Edessa"/>
+        <a:font script="Syre" typeface="Estrangelo Edessa"/>
+        <a:font script="Sora" typeface="Nirmala UI"/>
+        <a:font script="Tale" typeface="Microsoft Tai Le"/>
+        <a:font script="Talu" typeface="Microsoft New Tai Lue"/>
+        <a:font script="Tfng" typeface="Ebrima"/>
+      </a:majorFont>
+      <a:minorFont>
+        <a:latin typeface="Aptos" panose="02110004020202020204"/>
+        <a:ea typeface=""/>
+        <a:cs typeface=""/>
+        <a:font script="Jpan" typeface="游ゴシック"/>
+        <a:font script="Hang" typeface="맑은 고딕"/>
+        <a:font script="Hans" typeface="等线"/>
+        <a:font script="Hant" typeface="新細明體"/>
+        <a:font script="Arab" typeface="Arial"/>
+        <a:font script="Hebr" typeface="Arial"/>
+        <a:font script="Thai" typeface="Cordia New"/>
+        <a:font script="Ethi" typeface="Nyala"/>
+        <a:font script="Beng" typeface="Vrinda"/>
+        <a:font script="Gujr" typeface="Shruti"/>
+        <a:font script="Khmr" typeface="DaunPenh"/>
+        <a:font script="Knda" typeface="Tunga"/>
+        <a:font script="Guru" typeface="Raavi"/>
+        <a:font script="Cans" typeface="Euphemia"/>
+        <a:font script="Cher" typeface="Plantagenet Cherokee"/>
+        <a:font script="Yiii" typeface="Microsoft Yi Baiti"/>
+        <a:font script="Tibt" typeface="Microsoft Himalaya"/>
+        <a:font script="Thaa" typeface="MV Boli"/>
+        <a:font script="Deva" typeface="Mangal"/>
+        <a:font script="Telu" typeface="Gautami"/>
+        <a:font script="Taml" typeface="Latha"/>
+        <a:font script="Syrc" typeface="Estrangelo Edessa"/>
+        <a:font script="Orya" typeface="Kalinga"/>
+        <a:font script="Mlym" typeface="Kartika"/>
+        <a:font script="Laoo" typeface="DokChampa"/>
+        <a:font script="Sinh" typeface="Iskoola Pota"/>
+        <a:font script="Mong" typeface="Mongolian Baiti"/>
+        <a:font script="Viet" typeface="Arial"/>
+        <a:font script="Uigh" typeface="Microsoft Uighur"/>
+        <a:font script="Geor" typeface="Sylfaen"/>
+        <a:font script="Armn" typeface="Arial"/>
+        <a:font script="Bugi" typeface="Leelawadee UI"/>
+        <a:font script="Bopo" typeface="Microsoft JhengHei"/>
+        <a:font script="Java" typeface="Javanese Text"/>
+        <a:font script="Lisu" typeface="Segoe UI"/>
+        <a:font script="Mymr" typeface="Myanmar Text"/>
+        <a:font script="Nkoo" typeface="Ebrima"/>
+        <a:font script="Olck" typeface="Nirmala UI"/>
+        <a:font script="Osma" typeface="Ebrima"/>
+        <a:font script="Phag" typeface="Phagspa"/>
+        <a:font script="Syrn" typeface="Estrangelo Edessa"/>
+        <a:font script="Syrj" typeface="Estrangelo Edessa"/>
+        <a:font script="Syre" typeface="Estrangelo Edessa"/>
+        <a:font script="Sora" typeface="Nirmala UI"/>
+        <a:font script="Tale" typeface="Microsoft Tai Le"/>
+        <a:font script="Talu" typeface="Microsoft New Tai Lue"/>
+        <a:font script="Tfng" typeface="Ebrima"/>
+      </a:minorFont>
+    </a:fontScheme>
+    <a:fmtScheme name="Office">
+      <a:fillStyleLst>
+        <a:solidFill>
+          <a:schemeClr val="phClr"/>
+        </a:solidFill>
+        <a:gradFill rotWithShape="1">
+          <a:gsLst>
+            <a:gs pos="0">
+              <a:schemeClr val="phClr">
+                <a:lumMod val="110000"/>
+                <a:satMod val="105000"/>
+                <a:tint val="67000"/>
+              </a:schemeClr>
+            </a:gs>
+            <a:gs pos="50000">
+              <a:schemeClr val="phClr">
+                <a:lumMod val="105000"/>
+                <a:satMod val="103000"/>
+                <a:tint val="73000"/>
+              </a:schemeClr>
+            </a:gs>
+            <a:gs pos="100000">
+              <a:schemeClr val="phClr">
+                <a:lumMod val="105000"/>
+                <a:satMod val="109000"/>
+                <a:tint val="81000"/>
+              </a:schemeClr>
+            </a:gs>
+          </a:gsLst>
+          <a:lin ang="5400000" scaled="0"/>
+        </a:gradFill>
+        <a:gradFill rotWithShape="1">
+          <a:gsLst>
+            <a:gs pos="0">
+              <a:schemeClr val="phClr">
+                <a:satMod val="103000"/>
+                <a:lumMod val="102000"/>
+                <a:tint val="94000"/>
+              </a:schemeClr>
+            </a:gs>
+            <a:gs pos="50000">
+              <a:schemeClr val="phClr">
+                <a:satMod val="110000"/>
+                <a:lumMod val="100000"/>
+                <a:shade val="100000"/>
+              </a:schemeClr>
+            </a:gs>
+            <a:gs pos="100000">
+              <a:schemeClr val="phClr">
+                <a:lumMod val="99000"/>
+                <a:satMod val="120000"/>
+                <a:shade val="78000"/>
+              </a:schemeClr>
+            </a:gs>
+          </a:gsLst>
+          <a:lin ang="5400000" scaled="0"/>
+        </a:gradFill>
+      </a:fillStyleLst>
+      <a:lnStyleLst>
+        <a:ln w="12700" cap="flat" cmpd="sng" algn="ctr">
+          <a:solidFill>
+            <a:schemeClr val="phClr"/>
+          </a:solidFill>
+          <a:prstDash val="solid"/>
+          <a:miter lim="800000"/>
+        </a:ln>
+        <a:ln w="19050" cap="flat" cmpd="sng" algn="ctr">
+          <a:solidFill>
+            <a:schemeClr val="phClr"/>
+          </a:solidFill>
+          <a:prstDash val="solid"/>
+          <a:miter lim="800000"/>
+        </a:ln>
+        <a:ln w="25400" cap="flat" cmpd="sng" algn="ctr">
+          <a:solidFill>
+            <a:schemeClr val="phClr"/>
+          </a:solidFill>
+          <a:prstDash val="solid"/>
+          <a:miter lim="800000"/>
+        </a:ln>
+      </a:lnStyleLst>
+      <a:effectStyleLst>
+        <a:effectStyle>
+          <a:effectLst/>
+        </a:effectStyle>
+        <a:effectStyle>
+          <a:effectLst/>
+        </a:effectStyle>
+        <a:effectStyle>
+          <a:effectLst>
+            <a:outerShdw blurRad="57150" dist="19050" dir="5400000" algn="ctr" rotWithShape="0">
+              <a:srgbClr val="000000">
+                <a:alpha val="63000"/>
+              </a:srgbClr>
+            </a:outerShdw>
+          </a:effectLst>
+        </a:effectStyle>
+      </a:effectStyleLst>
+      <a:bgFillStyleLst>
+        <a:solidFill>
+          <a:schemeClr val="phClr"/>
+        </a:solidFill>
+        <a:solidFill>
+          <a:schemeClr val="phClr">
+            <a:tint val="95000"/>
+            <a:satMod val="170000"/>
+          </a:schemeClr>
+        </a:solidFill>
+        <a:gradFill rotWithShape="1">
+          <a:gsLst>
+            <a:gs pos="0">
+              <a:schemeClr val="phClr">
+                <a:tint val="93000"/>
+                <a:satMod val="150000"/>
+                <a:shade val="98000"/>
+                <a:lumMod val="102000"/>
+              </a:schemeClr>
+            </a:gs>
+            <a:gs pos="50000">
+              <a:schemeClr val="phClr">
+                <a:tint val="98000"/>
+                <a:satMod val="130000"/>
+                <a:shade val="90000"/>
+                <a:lumMod val="103000"/>
+              </a:schemeClr>
+            </a:gs>
+            <a:gs pos="100000">
+              <a:schemeClr val="phClr">
+                <a:shade val="63000"/>
+                <a:satMod val="120000"/>
+              </a:schemeClr>
+            </a:gs>
+          </a:gsLst>
+          <a:lin ang="5400000" scaled="0"/>
+        </a:gradFill>
+      </a:bgFillStyleLst>
+    </a:fmtScheme>
+  </a:themeElements>
+  <a:objectDefaults>
+    <a:lnDef>
+      <a:spPr/>
+      <a:bodyPr/>
+      <a:lstStyle/>
+      <a:style>
+        <a:lnRef idx="2">
+          <a:schemeClr val="accent1"/>
+        </a:lnRef>
+        <a:fillRef idx="0">
+          <a:schemeClr val="accent1"/>
+        </a:fillRef>
+        <a:effectRef idx="1">
+          <a:schemeClr val="accent1"/>
+        </a:effectRef>
+        <a:fontRef idx="minor">
+          <a:schemeClr val="tx1"/>
+        </a:fontRef>
+      </a:style>
+    </a:lnDef>
+  </a:objectDefaults>
+  <a:extraClrSchemeLst/>
+  <a:extLst>
+    <a:ext uri="{05A4C25C-085E-4340-85A3-A5531E510DB2}">
+      <thm15:themeFamily xmlns:thm15="http://schemas.microsoft.com/office/thememl/2012/main" name="Office Theme" id="{2E142A2C-CD16-42D6-873A-C26D2A0506FA}" vid="{1BDDFF52-6CD6-40A5-AB3C-68EB2F1E4D0A}"/>
+    </a:ext>
+  </a:extLst>
+</a:theme>
+</file>
+
 <file path=docMetadata/LabelInfo.xml><?xml version="1.0" encoding="utf-8"?>
 <clbl:labelList xmlns:clbl="http://schemas.microsoft.com/office/2020/mipLabelMetadata">
-  <clbl:label id="{2ae551e3-0043-40f0-9a67-12d995049d50}" enabled="1" method="Standard" siteId="{97984c2b-a229-4609-8185-ae84947bc3fc}" contentBits="0" removed="0"/>
+  <clbl:label id="{0aed0b32-58fd-49a1-925b-0e19a34645b1}" enabled="1" method="Privileged" siteId="{97984c2b-a229-4609-8185-ae84947bc3fc}" contentBits="0" removed="0"/>
 </clbl:labelList>
 </file>